--- a/1 - General Overview/1_Setup/pptx/The Complete Claude Setup Guide.pptx
+++ b/1 - General Overview/1_Setup/pptx/The Complete Claude Setup Guide.pptx
@@ -4,6 +4,9 @@
   <p:sldMasterIdLst>
     <p:sldMasterId id="2147483648" r:id="rId1"/>
   </p:sldMasterIdLst>
+  <p:notesMasterIdLst>
+    <p:notesMasterId r:id="rId18"/>
+  </p:notesMasterIdLst>
   <p:sldIdLst>
     <p:sldId id="256" r:id="rId2"/>
     <p:sldId id="257" r:id="rId3"/>
@@ -22,10 +25,7 @@
     <p:sldId id="270" r:id="rId16"/>
     <p:sldId id="271" r:id="rId17"/>
   </p:sldIdLst>
-  <p:notesMasterIdLst>
-    <p:notesMasterId r:id="rId18"/>
-  </p:notesMasterIdLst>
-  <p:sldSz cx="9144000" cy="5143500"/>
+  <p:sldSz cx="9144000" cy="5143500" type="screen16x9"/>
   <p:notesSz cx="5143500" cy="9144000"/>
   <p:defaultTextStyle>
     <a:lvl1pPr marL="0" algn="l" defTabSz="914400" rtl="0" eaLnBrk="1" latinLnBrk="0" hangingPunct="1">
@@ -119,6 +119,11 @@
       </a:defRPr>
     </a:lvl9pPr>
   </p:defaultTextStyle>
+  <p:extLst>
+    <p:ext uri="{EFAFB233-063F-42B5-8137-9DF3F51BA10A}">
+      <p15:sldGuideLst xmlns:p15="http://schemas.microsoft.com/office/powerpoint/2012/main"/>
+    </p:ext>
+  </p:extLst>
 </p:presentation>
 </file>
 
@@ -144,234 +149,10 @@
           <a:chExt cx="0" cy="0"/>
         </a:xfrm>
       </p:grpSpPr>
-      <p:sp>
-        <p:nvSpPr>
-          <p:cNvPr id="2" name="Header Placeholder 1"/>
-          <p:cNvSpPr>
-            <a:spLocks noGrp="1"/>
-          </p:cNvSpPr>
-          <p:nvPr>
-            <p:ph type="hdr" sz="quarter"/>
-          </p:nvPr>
-        </p:nvSpPr>
-        <p:spPr>
-          <a:xfrm>
-            <a:off x="0" y="0"/>
-            <a:ext cx="2971800" cy="458788"/>
-          </a:xfrm>
-          <a:prstGeom prst="rect">
-            <a:avLst/>
-          </a:prstGeom>
-        </p:spPr>
-        <p:txBody>
-          <a:bodyPr vert="horz" lIns="91440" tIns="45720" rIns="91440" bIns="45720" rtlCol="0"/>
-          <a:lstStyle>
-            <a:lvl1pPr algn="l">
-              <a:defRPr sz="1200"/>
-            </a:lvl1pPr>
-          </a:lstStyle>
-          <a:p>
-            <a:endParaRPr lang="en-US"/>
-          </a:p>
-        </p:txBody>
-      </p:sp>
-      <p:sp>
-        <p:nvSpPr>
-          <p:cNvPr id="3" name="Date Placeholder 2"/>
-          <p:cNvSpPr>
-            <a:spLocks noGrp="1"/>
-          </p:cNvSpPr>
-          <p:nvPr>
-            <p:ph type="dt" idx="1"/>
-          </p:nvPr>
-        </p:nvSpPr>
-        <p:spPr>
-          <a:xfrm>
-            <a:off x="3884613" y="0"/>
-            <a:ext cx="2971800" cy="458788"/>
-          </a:xfrm>
-          <a:prstGeom prst="rect">
-            <a:avLst/>
-          </a:prstGeom>
-        </p:spPr>
-        <p:txBody>
-          <a:bodyPr vert="horz" lIns="91440" tIns="45720" rIns="91440" bIns="45720" rtlCol="0"/>
-          <a:lstStyle>
-            <a:lvl1pPr algn="r">
-              <a:defRPr sz="1200"/>
-            </a:lvl1pPr>
-          </a:lstStyle>
-          <a:p>
-            <a:fld id="{5282F153-3F37-0F45-9E97-73ACFA13230C}" type="datetimeFigureOut">
-              <a:rPr lang="en-US"/>
-              <a:t>7/23/19</a:t>
-            </a:fld>
-            <a:endParaRPr lang="en-US"/>
-          </a:p>
-        </p:txBody>
-      </p:sp>
-      <p:sp>
-        <p:nvSpPr>
-          <p:cNvPr id="4" name="Slide Image Placeholder 3"/>
-          <p:cNvSpPr>
-            <a:spLocks noGrp="1" noRot="1" noChangeAspect="1"/>
-          </p:cNvSpPr>
-          <p:nvPr>
-            <p:ph type="sldImg" idx="2"/>
-          </p:nvPr>
-        </p:nvSpPr>
-        <p:spPr>
-          <a:xfrm>
-            <a:off x="685800" y="1143000"/>
-            <a:ext cx="5486400" cy="3086100"/>
-          </a:xfrm>
-          <a:prstGeom prst="rect">
-            <a:avLst/>
-          </a:prstGeom>
-          <a:noFill/>
-          <a:ln w="12700">
-            <a:solidFill>
-              <a:prstClr val="black"/>
-            </a:solidFill>
-          </a:ln>
-        </p:spPr>
-        <p:txBody>
-          <a:bodyPr vert="horz" lIns="91440" tIns="45720" rIns="91440" bIns="45720" rtlCol="0" anchor="ctr"/>
-          <a:lstStyle/>
-          <a:p>
-            <a:endParaRPr lang="en-US"/>
-          </a:p>
-        </p:txBody>
-      </p:sp>
-      <p:sp>
-        <p:nvSpPr>
-          <p:cNvPr id="5" name="Notes Placeholder 4"/>
-          <p:cNvSpPr>
-            <a:spLocks noGrp="1"/>
-          </p:cNvSpPr>
-          <p:nvPr>
-            <p:ph type="body" sz="quarter" idx="3"/>
-          </p:nvPr>
-        </p:nvSpPr>
-        <p:spPr>
-          <a:xfrm>
-            <a:off x="685800" y="4400550"/>
-            <a:ext cx="5486400" cy="3600450"/>
-          </a:xfrm>
-          <a:prstGeom prst="rect">
-            <a:avLst/>
-          </a:prstGeom>
-        </p:spPr>
-        <p:txBody>
-          <a:bodyPr vert="horz" lIns="91440" tIns="45720" rIns="91440" bIns="45720" rtlCol="0"/>
-          <a:lstStyle/>
-          <a:p>
-            <a:pPr lvl="0"/>
-            <a:r>
-              <a:rPr lang="en-US"/>
-              <a:t>Click to edit Master text styles</a:t>
-            </a:r>
-          </a:p>
-          <a:p>
-            <a:pPr lvl="1"/>
-            <a:r>
-              <a:rPr lang="en-US"/>
-              <a:t>Second level</a:t>
-            </a:r>
-          </a:p>
-          <a:p>
-            <a:pPr lvl="2"/>
-            <a:r>
-              <a:rPr lang="en-US"/>
-              <a:t>Third level</a:t>
-            </a:r>
-          </a:p>
-          <a:p>
-            <a:pPr lvl="3"/>
-            <a:r>
-              <a:rPr lang="en-US"/>
-              <a:t>Fourth level</a:t>
-            </a:r>
-          </a:p>
-          <a:p>
-            <a:pPr lvl="4"/>
-            <a:r>
-              <a:rPr lang="en-US"/>
-              <a:t>Fifth level</a:t>
-            </a:r>
-          </a:p>
-        </p:txBody>
-      </p:sp>
-      <p:sp>
-        <p:nvSpPr>
-          <p:cNvPr id="6" name="Footer Placeholder 5"/>
-          <p:cNvSpPr>
-            <a:spLocks noGrp="1"/>
-          </p:cNvSpPr>
-          <p:nvPr>
-            <p:ph type="ftr" sz="quarter" idx="4"/>
-          </p:nvPr>
-        </p:nvSpPr>
-        <p:spPr>
-          <a:xfrm>
-            <a:off x="0" y="8685213"/>
-            <a:ext cx="2971800" cy="458787"/>
-          </a:xfrm>
-          <a:prstGeom prst="rect">
-            <a:avLst/>
-          </a:prstGeom>
-        </p:spPr>
-        <p:txBody>
-          <a:bodyPr vert="horz" lIns="91440" tIns="45720" rIns="91440" bIns="45720" rtlCol="0" anchor="b"/>
-          <a:lstStyle>
-            <a:lvl1pPr algn="l">
-              <a:defRPr sz="1200"/>
-            </a:lvl1pPr>
-          </a:lstStyle>
-          <a:p>
-            <a:endParaRPr lang="en-US"/>
-          </a:p>
-        </p:txBody>
-      </p:sp>
-      <p:sp>
-        <p:nvSpPr>
-          <p:cNvPr id="7" name="Slide Number Placeholder 6"/>
-          <p:cNvSpPr>
-            <a:spLocks noGrp="1"/>
-          </p:cNvSpPr>
-          <p:nvPr>
-            <p:ph type="sldNum" sz="quarter" idx="5"/>
-          </p:nvPr>
-        </p:nvSpPr>
-        <p:spPr>
-          <a:xfrm>
-            <a:off x="3884613" y="8685213"/>
-            <a:ext cx="2971800" cy="458787"/>
-          </a:xfrm>
-          <a:prstGeom prst="rect">
-            <a:avLst/>
-          </a:prstGeom>
-        </p:spPr>
-        <p:txBody>
-          <a:bodyPr vert="horz" lIns="91440" tIns="45720" rIns="91440" bIns="45720" rtlCol="0" anchor="b"/>
-          <a:lstStyle>
-            <a:lvl1pPr algn="r">
-              <a:defRPr sz="1200"/>
-            </a:lvl1pPr>
-          </a:lstStyle>
-          <a:p>
-            <a:fld id="{CE5E9CC1-C706-0F49-92D6-E571CC5EEA8F}" type="slidenum">
-              <a:rPr lang="en-US"/>
-              <a:t>‹#›</a:t>
-            </a:fld>
-            <a:endParaRPr lang="en-US"/>
-          </a:p>
-        </p:txBody>
-      </p:sp>
     </p:spTree>
     <p:extLst>
       <p:ext uri="{BB962C8B-B14F-4D97-AF65-F5344CB8AC3E}">
-        <p14:creationId xmlns:p14="http://schemas.microsoft.com/office/powerpoint/2010/main" val="1024086991"/>
+        <p14:creationId xmlns:p14="http://schemas.microsoft.com/office/powerpoint/2010/main" val="1637744742"/>
       </p:ext>
     </p:extLst>
   </p:cSld>
@@ -515,10 +296,6 @@
           <a:bodyPr/>
           <a:lstStyle/>
           <a:p>
-            <a:r>
-              <a:rPr lang="en-US" dirty="0"/>
-              <a:t/>
-            </a:r>
             <a:endParaRPr lang="en-US" dirty="0"/>
           </a:p>
         </p:txBody>
@@ -603,10 +380,6 @@
           <a:bodyPr/>
           <a:lstStyle/>
           <a:p>
-            <a:r>
-              <a:rPr lang="en-US" dirty="0"/>
-              <a:t/>
-            </a:r>
             <a:endParaRPr lang="en-US" dirty="0"/>
           </a:p>
         </p:txBody>
@@ -691,10 +464,6 @@
           <a:bodyPr/>
           <a:lstStyle/>
           <a:p>
-            <a:r>
-              <a:rPr lang="en-US" dirty="0"/>
-              <a:t/>
-            </a:r>
             <a:endParaRPr lang="en-US" dirty="0"/>
           </a:p>
         </p:txBody>
@@ -779,10 +548,6 @@
           <a:bodyPr/>
           <a:lstStyle/>
           <a:p>
-            <a:r>
-              <a:rPr lang="en-US" dirty="0"/>
-              <a:t/>
-            </a:r>
             <a:endParaRPr lang="en-US" dirty="0"/>
           </a:p>
         </p:txBody>
@@ -867,10 +632,6 @@
           <a:bodyPr/>
           <a:lstStyle/>
           <a:p>
-            <a:r>
-              <a:rPr lang="en-US" dirty="0"/>
-              <a:t/>
-            </a:r>
             <a:endParaRPr lang="en-US" dirty="0"/>
           </a:p>
         </p:txBody>
@@ -955,10 +716,6 @@
           <a:bodyPr/>
           <a:lstStyle/>
           <a:p>
-            <a:r>
-              <a:rPr lang="en-US" dirty="0"/>
-              <a:t/>
-            </a:r>
             <a:endParaRPr lang="en-US" dirty="0"/>
           </a:p>
         </p:txBody>
@@ -1043,10 +800,6 @@
           <a:bodyPr/>
           <a:lstStyle/>
           <a:p>
-            <a:r>
-              <a:rPr lang="en-US" dirty="0"/>
-              <a:t/>
-            </a:r>
             <a:endParaRPr lang="en-US" dirty="0"/>
           </a:p>
         </p:txBody>
@@ -1131,10 +884,6 @@
           <a:bodyPr/>
           <a:lstStyle/>
           <a:p>
-            <a:r>
-              <a:rPr lang="en-US" dirty="0"/>
-              <a:t/>
-            </a:r>
             <a:endParaRPr lang="en-US" dirty="0"/>
           </a:p>
         </p:txBody>
@@ -1219,10 +968,6 @@
           <a:bodyPr/>
           <a:lstStyle/>
           <a:p>
-            <a:r>
-              <a:rPr lang="en-US" dirty="0"/>
-              <a:t/>
-            </a:r>
             <a:endParaRPr lang="en-US" dirty="0"/>
           </a:p>
         </p:txBody>
@@ -1307,10 +1052,6 @@
           <a:bodyPr/>
           <a:lstStyle/>
           <a:p>
-            <a:r>
-              <a:rPr lang="en-US" dirty="0"/>
-              <a:t/>
-            </a:r>
             <a:endParaRPr lang="en-US" dirty="0"/>
           </a:p>
         </p:txBody>
@@ -1395,10 +1136,6 @@
           <a:bodyPr/>
           <a:lstStyle/>
           <a:p>
-            <a:r>
-              <a:rPr lang="en-US" dirty="0"/>
-              <a:t/>
-            </a:r>
             <a:endParaRPr lang="en-US" dirty="0"/>
           </a:p>
         </p:txBody>
@@ -1483,10 +1220,6 @@
           <a:bodyPr/>
           <a:lstStyle/>
           <a:p>
-            <a:r>
-              <a:rPr lang="en-US" dirty="0"/>
-              <a:t/>
-            </a:r>
             <a:endParaRPr lang="en-US" dirty="0"/>
           </a:p>
         </p:txBody>
@@ -1571,10 +1304,6 @@
           <a:bodyPr/>
           <a:lstStyle/>
           <a:p>
-            <a:r>
-              <a:rPr lang="en-US" dirty="0"/>
-              <a:t/>
-            </a:r>
             <a:endParaRPr lang="en-US" dirty="0"/>
           </a:p>
         </p:txBody>
@@ -1659,10 +1388,6 @@
           <a:bodyPr/>
           <a:lstStyle/>
           <a:p>
-            <a:r>
-              <a:rPr lang="en-US" dirty="0"/>
-              <a:t/>
-            </a:r>
             <a:endParaRPr lang="en-US" dirty="0"/>
           </a:p>
         </p:txBody>
@@ -1747,10 +1472,6 @@
           <a:bodyPr/>
           <a:lstStyle/>
           <a:p>
-            <a:r>
-              <a:rPr lang="en-US" dirty="0"/>
-              <a:t/>
-            </a:r>
             <a:endParaRPr lang="en-US" dirty="0"/>
           </a:p>
         </p:txBody>
@@ -1835,10 +1556,6 @@
           <a:bodyPr/>
           <a:lstStyle/>
           <a:p>
-            <a:r>
-              <a:rPr lang="en-US" dirty="0"/>
-              <a:t/>
-            </a:r>
             <a:endParaRPr lang="en-US" dirty="0"/>
           </a:p>
         </p:txBody>
@@ -1912,6 +1629,11 @@
 <file path=ppt/slideMasters/slideMaster1.xml><?xml version="1.0" encoding="utf-8"?>
 <p:sldMaster xmlns:a="http://schemas.openxmlformats.org/drawingml/2006/main" xmlns:r="http://schemas.openxmlformats.org/officeDocument/2006/relationships" xmlns:p="http://schemas.openxmlformats.org/presentationml/2006/main">
   <p:cSld>
+    <p:bg>
+      <p:bgRef idx="1001">
+        <a:schemeClr val="bg1"/>
+      </p:bgRef>
+    </p:bg>
     <p:spTree>
       <p:nvGrpSpPr>
         <p:cNvPr id="1" name=""/>
@@ -2194,6 +1916,7 @@
         <a:solidFill>
           <a:srgbClr val="1E2761"/>
         </a:solidFill>
+        <a:effectLst/>
       </p:bgPr>
     </p:bg>
     <p:spTree>
@@ -2229,6 +1952,13 @@
           </a:solidFill>
           <a:ln/>
         </p:spPr>
+        <p:txBody>
+          <a:bodyPr/>
+          <a:lstStyle/>
+          <a:p>
+            <a:endParaRPr lang="en-US"/>
+          </a:p>
+        </p:txBody>
       </p:sp>
       <p:sp>
         <p:nvSpPr>
@@ -2251,11 +1981,11 @@
           <a:bodyPr wrap="square" rtlCol="0" anchor="ctr"/>
           <a:lstStyle/>
           <a:p>
-            <a:pPr indent="0" marL="0">
-              <a:buNone/>
-            </a:pPr>
-            <a:r>
-              <a:rPr lang="en-US" sz="1800" b="1" spc="800" kern="0" dirty="0">
+            <a:pPr marL="0" indent="0">
+              <a:buNone/>
+            </a:pPr>
+            <a:r>
+              <a:rPr lang="en-US" sz="1800" b="1" kern="0" spc="800" dirty="0">
                 <a:solidFill>
                   <a:srgbClr val="CADCFC"/>
                 </a:solidFill>
@@ -2290,7 +2020,7 @@
           <a:bodyPr wrap="square" rtlCol="0" anchor="ctr"/>
           <a:lstStyle/>
           <a:p>
-            <a:pPr indent="0" marL="0">
+            <a:pPr marL="0" indent="0">
               <a:buNone/>
             </a:pPr>
             <a:r>
@@ -2327,6 +2057,13 @@
           </a:solidFill>
           <a:ln/>
         </p:spPr>
+        <p:txBody>
+          <a:bodyPr/>
+          <a:lstStyle/>
+          <a:p>
+            <a:endParaRPr lang="en-US"/>
+          </a:p>
+        </p:txBody>
       </p:sp>
       <p:sp>
         <p:nvSpPr>
@@ -2349,7 +2086,7 @@
           <a:bodyPr wrap="square" rtlCol="0" anchor="ctr"/>
           <a:lstStyle/>
           <a:p>
-            <a:pPr indent="0" marL="0">
+            <a:pPr marL="0" indent="0">
               <a:buNone/>
             </a:pPr>
             <a:r>
@@ -2388,7 +2125,7 @@
           <a:bodyPr wrap="square" rtlCol="0" anchor="ctr"/>
           <a:lstStyle/>
           <a:p>
-            <a:pPr indent="0" marL="0">
+            <a:pPr marL="0" indent="0">
               <a:buNone/>
             </a:pPr>
             <a:r>
@@ -2422,6 +2159,7 @@
         <a:solidFill>
           <a:srgbClr val="1E2761"/>
         </a:solidFill>
+        <a:effectLst/>
       </p:bgPr>
     </p:bg>
     <p:spTree>
@@ -2457,6 +2195,13 @@
           </a:solidFill>
           <a:ln/>
         </p:spPr>
+        <p:txBody>
+          <a:bodyPr/>
+          <a:lstStyle/>
+          <a:p>
+            <a:endParaRPr lang="en-US"/>
+          </a:p>
+        </p:txBody>
       </p:sp>
       <p:sp>
         <p:nvSpPr>
@@ -2479,11 +2224,11 @@
           <a:bodyPr wrap="square" rtlCol="0" anchor="ctr"/>
           <a:lstStyle/>
           <a:p>
-            <a:pPr indent="0" marL="0">
-              <a:buNone/>
-            </a:pPr>
-            <a:r>
-              <a:rPr lang="en-US" sz="1400" b="1" spc="500" kern="0" dirty="0">
+            <a:pPr marL="0" indent="0">
+              <a:buNone/>
+            </a:pPr>
+            <a:r>
+              <a:rPr lang="en-US" sz="1400" b="1" kern="0" spc="500" dirty="0">
                 <a:solidFill>
                   <a:srgbClr val="0891B2"/>
                 </a:solidFill>
@@ -2518,7 +2263,7 @@
           <a:bodyPr wrap="square" rtlCol="0" anchor="ctr"/>
           <a:lstStyle/>
           <a:p>
-            <a:pPr indent="0" marL="0">
+            <a:pPr marL="0" indent="0">
               <a:buNone/>
             </a:pPr>
             <a:r>
@@ -2538,14 +2283,14 @@
       </p:sp>
       <p:pic>
         <p:nvPicPr>
-          <p:cNvPr id="5" name="Image 0" descr="preencoded.png">    </p:cNvPr>
+          <p:cNvPr id="5" name="Image 0" descr="preencoded.png"/>
           <p:cNvPicPr>
             <a:picLocks noChangeAspect="1"/>
           </p:cNvPicPr>
           <p:nvPr/>
         </p:nvPicPr>
         <p:blipFill>
-          <a:blip r:embed="rId1"/>
+          <a:blip r:embed="rId3"/>
           <a:stretch>
             <a:fillRect/>
           </a:stretch>
@@ -2581,7 +2326,7 @@
           <a:bodyPr wrap="square" rtlCol="0" anchor="ctr"/>
           <a:lstStyle/>
           <a:p>
-            <a:pPr indent="0" marL="0">
+            <a:pPr marL="0" indent="0">
               <a:buNone/>
             </a:pPr>
             <a:r>
@@ -2620,7 +2365,7 @@
           <a:bodyPr wrap="square" rtlCol="0" anchor="ctr"/>
           <a:lstStyle/>
           <a:p>
-            <a:pPr indent="0" marL="0">
+            <a:pPr marL="0" indent="0">
               <a:buNone/>
             </a:pPr>
             <a:r>
@@ -2657,6 +2402,13 @@
           </a:solidFill>
           <a:ln/>
         </p:spPr>
+        <p:txBody>
+          <a:bodyPr/>
+          <a:lstStyle/>
+          <a:p>
+            <a:endParaRPr lang="en-US"/>
+          </a:p>
+        </p:txBody>
       </p:sp>
       <p:sp>
         <p:nvSpPr>
@@ -2679,7 +2431,7 @@
           <a:bodyPr wrap="square" rtlCol="0" anchor="ctr"/>
           <a:lstStyle/>
           <a:p>
-            <a:pPr algn="ctr" indent="0" marL="0">
+            <a:pPr marL="0" indent="0" algn="ctr">
               <a:buNone/>
             </a:pPr>
             <a:r>
@@ -2718,7 +2470,7 @@
           <a:bodyPr wrap="square" lIns="0" tIns="0" rIns="0" bIns="0" rtlCol="0" anchor="ctr"/>
           <a:lstStyle/>
           <a:p>
-            <a:pPr indent="0" marL="0">
+            <a:pPr marL="0" indent="0">
               <a:buNone/>
             </a:pPr>
             <a:r>
@@ -2757,7 +2509,7 @@
           <a:bodyPr wrap="square" lIns="0" tIns="0" rIns="0" bIns="0" rtlCol="0" anchor="ctr"/>
           <a:lstStyle/>
           <a:p>
-            <a:pPr indent="0" marL="0">
+            <a:pPr marL="0" indent="0">
               <a:buNone/>
             </a:pPr>
             <a:r>
@@ -2794,6 +2546,13 @@
           </a:solidFill>
           <a:ln/>
         </p:spPr>
+        <p:txBody>
+          <a:bodyPr/>
+          <a:lstStyle/>
+          <a:p>
+            <a:endParaRPr lang="en-US"/>
+          </a:p>
+        </p:txBody>
       </p:sp>
       <p:sp>
         <p:nvSpPr>
@@ -2816,7 +2575,7 @@
           <a:bodyPr wrap="square" rtlCol="0" anchor="ctr"/>
           <a:lstStyle/>
           <a:p>
-            <a:pPr algn="ctr" indent="0" marL="0">
+            <a:pPr marL="0" indent="0" algn="ctr">
               <a:buNone/>
             </a:pPr>
             <a:r>
@@ -2855,7 +2614,7 @@
           <a:bodyPr wrap="square" lIns="0" tIns="0" rIns="0" bIns="0" rtlCol="0" anchor="ctr"/>
           <a:lstStyle/>
           <a:p>
-            <a:pPr indent="0" marL="0">
+            <a:pPr marL="0" indent="0">
               <a:buNone/>
             </a:pPr>
             <a:r>
@@ -2894,7 +2653,7 @@
           <a:bodyPr wrap="square" lIns="0" tIns="0" rIns="0" bIns="0" rtlCol="0" anchor="ctr"/>
           <a:lstStyle/>
           <a:p>
-            <a:pPr indent="0" marL="0">
+            <a:pPr marL="0" indent="0">
               <a:buNone/>
             </a:pPr>
             <a:r>
@@ -2931,6 +2690,13 @@
           </a:solidFill>
           <a:ln/>
         </p:spPr>
+        <p:txBody>
+          <a:bodyPr/>
+          <a:lstStyle/>
+          <a:p>
+            <a:endParaRPr lang="en-US"/>
+          </a:p>
+        </p:txBody>
       </p:sp>
       <p:sp>
         <p:nvSpPr>
@@ -2953,7 +2719,7 @@
           <a:bodyPr wrap="square" rtlCol="0" anchor="ctr"/>
           <a:lstStyle/>
           <a:p>
-            <a:pPr algn="ctr" indent="0" marL="0">
+            <a:pPr marL="0" indent="0" algn="ctr">
               <a:buNone/>
             </a:pPr>
             <a:r>
@@ -2992,7 +2758,7 @@
           <a:bodyPr wrap="square" lIns="0" tIns="0" rIns="0" bIns="0" rtlCol="0" anchor="ctr"/>
           <a:lstStyle/>
           <a:p>
-            <a:pPr indent="0" marL="0">
+            <a:pPr marL="0" indent="0">
               <a:buNone/>
             </a:pPr>
             <a:r>
@@ -3031,7 +2797,7 @@
           <a:bodyPr wrap="square" lIns="0" tIns="0" rIns="0" bIns="0" rtlCol="0" anchor="ctr"/>
           <a:lstStyle/>
           <a:p>
-            <a:pPr indent="0" marL="0">
+            <a:pPr marL="0" indent="0">
               <a:buNone/>
             </a:pPr>
             <a:r>
@@ -3068,6 +2834,13 @@
           </a:solidFill>
           <a:ln/>
         </p:spPr>
+        <p:txBody>
+          <a:bodyPr/>
+          <a:lstStyle/>
+          <a:p>
+            <a:endParaRPr lang="en-US"/>
+          </a:p>
+        </p:txBody>
       </p:sp>
       <p:sp>
         <p:nvSpPr>
@@ -3090,7 +2863,7 @@
           <a:bodyPr wrap="square" rtlCol="0" anchor="ctr"/>
           <a:lstStyle/>
           <a:p>
-            <a:pPr algn="ctr" indent="0" marL="0">
+            <a:pPr marL="0" indent="0" algn="ctr">
               <a:buNone/>
             </a:pPr>
             <a:r>
@@ -3129,7 +2902,7 @@
           <a:bodyPr wrap="square" lIns="0" tIns="0" rIns="0" bIns="0" rtlCol="0" anchor="ctr"/>
           <a:lstStyle/>
           <a:p>
-            <a:pPr indent="0" marL="0">
+            <a:pPr marL="0" indent="0">
               <a:buNone/>
             </a:pPr>
             <a:r>
@@ -3168,7 +2941,7 @@
           <a:bodyPr wrap="square" lIns="0" tIns="0" rIns="0" bIns="0" rtlCol="0" anchor="ctr"/>
           <a:lstStyle/>
           <a:p>
-            <a:pPr indent="0" marL="0">
+            <a:pPr marL="0" indent="0">
               <a:buNone/>
             </a:pPr>
             <a:r>
@@ -3207,7 +2980,7 @@
           <a:bodyPr wrap="square" rtlCol="0" anchor="ctr"/>
           <a:lstStyle/>
           <a:p>
-            <a:pPr indent="0" marL="0">
+            <a:pPr marL="0" indent="0">
               <a:buNone/>
             </a:pPr>
             <a:r>
@@ -3244,13 +3017,20 @@
           </a:solidFill>
           <a:ln/>
           <a:effectLst>
-            <a:outerShdw sx="100000" sy="100000" kx="0" ky="0" algn="bl" rotWithShape="0" blurRad="101600" dist="38100" dir="8100000">
+            <a:outerShdw blurRad="101600" dist="38100" dir="8100000" algn="bl" rotWithShape="0">
               <a:srgbClr val="000000">
                 <a:alpha val="12000"/>
               </a:srgbClr>
             </a:outerShdw>
           </a:effectLst>
         </p:spPr>
+        <p:txBody>
+          <a:bodyPr/>
+          <a:lstStyle/>
+          <a:p>
+            <a:endParaRPr lang="en-US"/>
+          </a:p>
+        </p:txBody>
       </p:sp>
       <p:sp>
         <p:nvSpPr>
@@ -3273,7 +3053,7 @@
           <a:bodyPr wrap="square" lIns="0" tIns="0" rIns="0" bIns="0" rtlCol="0" anchor="ctr"/>
           <a:lstStyle/>
           <a:p>
-            <a:pPr indent="0" marL="0">
+            <a:pPr marL="0" indent="0">
               <a:buNone/>
             </a:pPr>
             <a:r>
@@ -3312,7 +3092,7 @@
           <a:bodyPr wrap="square" lIns="0" tIns="0" rIns="0" bIns="0" rtlCol="0" anchor="ctr"/>
           <a:lstStyle/>
           <a:p>
-            <a:pPr indent="0" marL="0">
+            <a:pPr marL="0" indent="0">
               <a:buNone/>
             </a:pPr>
             <a:r>
@@ -3349,13 +3129,20 @@
           </a:solidFill>
           <a:ln/>
           <a:effectLst>
-            <a:outerShdw sx="100000" sy="100000" kx="0" ky="0" algn="bl" rotWithShape="0" blurRad="101600" dist="38100" dir="8100000">
+            <a:outerShdw blurRad="101600" dist="38100" dir="8100000" algn="bl" rotWithShape="0">
               <a:srgbClr val="000000">
                 <a:alpha val="12000"/>
               </a:srgbClr>
             </a:outerShdw>
           </a:effectLst>
         </p:spPr>
+        <p:txBody>
+          <a:bodyPr/>
+          <a:lstStyle/>
+          <a:p>
+            <a:endParaRPr lang="en-US"/>
+          </a:p>
+        </p:txBody>
       </p:sp>
       <p:sp>
         <p:nvSpPr>
@@ -3378,7 +3165,7 @@
           <a:bodyPr wrap="square" lIns="0" tIns="0" rIns="0" bIns="0" rtlCol="0" anchor="ctr"/>
           <a:lstStyle/>
           <a:p>
-            <a:pPr indent="0" marL="0">
+            <a:pPr marL="0" indent="0">
               <a:buNone/>
             </a:pPr>
             <a:r>
@@ -3417,7 +3204,7 @@
           <a:bodyPr wrap="square" lIns="0" tIns="0" rIns="0" bIns="0" rtlCol="0" anchor="ctr"/>
           <a:lstStyle/>
           <a:p>
-            <a:pPr indent="0" marL="0">
+            <a:pPr marL="0" indent="0">
               <a:buNone/>
             </a:pPr>
             <a:r>
@@ -3456,7 +3243,7 @@
           <a:bodyPr wrap="square" rtlCol="0" anchor="ctr"/>
           <a:lstStyle/>
           <a:p>
-            <a:pPr indent="0" marL="0">
+            <a:pPr marL="0" indent="0">
               <a:buNone/>
             </a:pPr>
             <a:r>
@@ -3490,6 +3277,7 @@
         <a:solidFill>
           <a:srgbClr val="F0F4F8"/>
         </a:solidFill>
+        <a:effectLst/>
       </p:bgPr>
     </p:bg>
     <p:spTree>
@@ -3525,6 +3313,13 @@
           </a:solidFill>
           <a:ln/>
         </p:spPr>
+        <p:txBody>
+          <a:bodyPr/>
+          <a:lstStyle/>
+          <a:p>
+            <a:endParaRPr lang="en-US"/>
+          </a:p>
+        </p:txBody>
       </p:sp>
       <p:sp>
         <p:nvSpPr>
@@ -3547,11 +3342,11 @@
           <a:bodyPr wrap="square" rtlCol="0" anchor="ctr"/>
           <a:lstStyle/>
           <a:p>
-            <a:pPr indent="0" marL="0">
-              <a:buNone/>
-            </a:pPr>
-            <a:r>
-              <a:rPr lang="en-US" sz="1400" b="1" spc="500" kern="0" dirty="0">
+            <a:pPr marL="0" indent="0">
+              <a:buNone/>
+            </a:pPr>
+            <a:r>
+              <a:rPr lang="en-US" sz="1400" b="1" kern="0" spc="500" dirty="0">
                 <a:solidFill>
                   <a:srgbClr val="0891B2"/>
                 </a:solidFill>
@@ -3586,7 +3381,7 @@
           <a:bodyPr wrap="square" rtlCol="0" anchor="ctr"/>
           <a:lstStyle/>
           <a:p>
-            <a:pPr indent="0" marL="0">
+            <a:pPr marL="0" indent="0">
               <a:buNone/>
             </a:pPr>
             <a:r>
@@ -3606,14 +3401,14 @@
       </p:sp>
       <p:pic>
         <p:nvPicPr>
-          <p:cNvPr id="5" name="Image 0" descr="preencoded.png">    </p:cNvPr>
+          <p:cNvPr id="5" name="Image 0" descr="preencoded.png"/>
           <p:cNvPicPr>
             <a:picLocks noChangeAspect="1"/>
           </p:cNvPicPr>
           <p:nvPr/>
         </p:nvPicPr>
         <p:blipFill>
-          <a:blip r:embed="rId1"/>
+          <a:blip r:embed="rId3"/>
           <a:stretch>
             <a:fillRect/>
           </a:stretch>
@@ -3649,7 +3444,7 @@
           <a:bodyPr wrap="square" rtlCol="0" anchor="ctr"/>
           <a:lstStyle/>
           <a:p>
-            <a:pPr indent="0" marL="0">
+            <a:pPr marL="0" indent="0">
               <a:buNone/>
             </a:pPr>
             <a:r>
@@ -3683,16 +3478,34 @@
         </p:nvGraphicFramePr>
         <p:xfrm>
           <a:off x="457200" y="1965960"/>
-          <a:ext cx="8229600" cy="914400"/>
+          <a:ext cx="8229600" cy="1463040"/>
         </p:xfrm>
         <a:graphic>
           <a:graphicData uri="http://schemas.openxmlformats.org/drawingml/2006/table">
             <a:tbl>
               <a:tblPr/>
               <a:tblGrid>
-                <a:gridCol w="2286000"/>
-                <a:gridCol w="3200400"/>
-                <a:gridCol w="2743200"/>
+                <a:gridCol w="2286000">
+                  <a:extLst>
+                    <a:ext uri="{9D8B030D-6E8A-4147-A177-3AD203B41FA5}">
+                      <a16:colId xmlns:a16="http://schemas.microsoft.com/office/drawing/2014/main" val="20000"/>
+                    </a:ext>
+                  </a:extLst>
+                </a:gridCol>
+                <a:gridCol w="3200400">
+                  <a:extLst>
+                    <a:ext uri="{9D8B030D-6E8A-4147-A177-3AD203B41FA5}">
+                      <a16:colId xmlns:a16="http://schemas.microsoft.com/office/drawing/2014/main" val="20001"/>
+                    </a:ext>
+                  </a:extLst>
+                </a:gridCol>
+                <a:gridCol w="2743200">
+                  <a:extLst>
+                    <a:ext uri="{9D8B030D-6E8A-4147-A177-3AD203B41FA5}">
+                      <a16:colId xmlns:a16="http://schemas.microsoft.com/office/drawing/2014/main" val="20002"/>
+                    </a:ext>
+                  </a:extLst>
+                </a:gridCol>
               </a:tblGrid>
               <a:tr h="365760">
                 <a:tc>
@@ -3700,7 +3513,7 @@
                     <a:bodyPr/>
                     <a:lstStyle/>
                     <a:p>
-                      <a:pPr indent="0" marL="0">
+                      <a:pPr marL="0" indent="0">
                         <a:buNone/>
                       </a:pPr>
                       <a:r>
@@ -3721,7 +3534,7 @@
                       </a:endParaRPr>
                     </a:p>
                   </a:txBody>
-                  <a:tcPr marL="91440" marR="91440" marT="45720" marB="45720">
+                  <a:tcPr>
                     <a:lnL w="6350" cap="flat" cmpd="sng" algn="ctr">
                       <a:solidFill>
                         <a:srgbClr val="E8EDF2"/>
@@ -3768,7 +3581,7 @@
                     <a:bodyPr/>
                     <a:lstStyle/>
                     <a:p>
-                      <a:pPr indent="0" marL="0">
+                      <a:pPr marL="0" indent="0">
                         <a:buNone/>
                       </a:pPr>
                       <a:r>
@@ -3789,7 +3602,7 @@
                       </a:endParaRPr>
                     </a:p>
                   </a:txBody>
-                  <a:tcPr marL="91440" marR="91440" marT="45720" marB="45720">
+                  <a:tcPr>
                     <a:lnL w="6350" cap="flat" cmpd="sng" algn="ctr">
                       <a:solidFill>
                         <a:srgbClr val="E8EDF2"/>
@@ -3836,7 +3649,7 @@
                     <a:bodyPr/>
                     <a:lstStyle/>
                     <a:p>
-                      <a:pPr indent="0" marL="0">
+                      <a:pPr marL="0" indent="0">
                         <a:buNone/>
                       </a:pPr>
                       <a:r>
@@ -3857,7 +3670,7 @@
                       </a:endParaRPr>
                     </a:p>
                   </a:txBody>
-                  <a:tcPr marL="91440" marR="91440" marT="45720" marB="45720">
+                  <a:tcPr>
                     <a:lnL w="6350" cap="flat" cmpd="sng" algn="ctr">
                       <a:solidFill>
                         <a:srgbClr val="E8EDF2"/>
@@ -3899,6 +3712,11 @@
                     </a:solidFill>
                   </a:tcPr>
                 </a:tc>
+                <a:extLst>
+                  <a:ext uri="{0D108BD9-81ED-4DB2-BD59-A6C34878D82A}">
+                    <a16:rowId xmlns:a16="http://schemas.microsoft.com/office/drawing/2014/main" val="10000"/>
+                  </a:ext>
+                </a:extLst>
               </a:tr>
               <a:tr h="365760">
                 <a:tc>
@@ -3906,7 +3724,7 @@
                     <a:bodyPr/>
                     <a:lstStyle/>
                     <a:p>
-                      <a:pPr indent="0" marL="0">
+                      <a:pPr marL="0" indent="0">
                         <a:buNone/>
                       </a:pPr>
                       <a:r>
@@ -3927,7 +3745,7 @@
                       </a:endParaRPr>
                     </a:p>
                   </a:txBody>
-                  <a:tcPr marL="91440" marR="91440" marT="45720" marB="45720">
+                  <a:tcPr>
                     <a:lnL w="6350" cap="flat" cmpd="sng" algn="ctr">
                       <a:solidFill>
                         <a:srgbClr val="E8EDF2"/>
@@ -3971,7 +3789,7 @@
                     <a:bodyPr/>
                     <a:lstStyle/>
                     <a:p>
-                      <a:pPr indent="0" marL="0">
+                      <a:pPr marL="0" indent="0">
                         <a:buNone/>
                       </a:pPr>
                       <a:r>
@@ -3992,7 +3810,7 @@
                       </a:endParaRPr>
                     </a:p>
                   </a:txBody>
-                  <a:tcPr marL="91440" marR="91440" marT="45720" marB="45720">
+                  <a:tcPr>
                     <a:lnL w="6350" cap="flat" cmpd="sng" algn="ctr">
                       <a:solidFill>
                         <a:srgbClr val="E8EDF2"/>
@@ -4036,7 +3854,7 @@
                     <a:bodyPr/>
                     <a:lstStyle/>
                     <a:p>
-                      <a:pPr indent="0" marL="0">
+                      <a:pPr marL="0" indent="0">
                         <a:buNone/>
                       </a:pPr>
                       <a:r>
@@ -4057,7 +3875,7 @@
                       </a:endParaRPr>
                     </a:p>
                   </a:txBody>
-                  <a:tcPr marL="91440" marR="91440" marT="45720" marB="45720">
+                  <a:tcPr>
                     <a:lnL w="6350" cap="flat" cmpd="sng" algn="ctr">
                       <a:solidFill>
                         <a:srgbClr val="E8EDF2"/>
@@ -4096,6 +3914,11 @@
                     </a:lnB>
                   </a:tcPr>
                 </a:tc>
+                <a:extLst>
+                  <a:ext uri="{0D108BD9-81ED-4DB2-BD59-A6C34878D82A}">
+                    <a16:rowId xmlns:a16="http://schemas.microsoft.com/office/drawing/2014/main" val="10001"/>
+                  </a:ext>
+                </a:extLst>
               </a:tr>
               <a:tr h="365760">
                 <a:tc>
@@ -4103,7 +3926,7 @@
                     <a:bodyPr/>
                     <a:lstStyle/>
                     <a:p>
-                      <a:pPr indent="0" marL="0">
+                      <a:pPr marL="0" indent="0">
                         <a:buNone/>
                       </a:pPr>
                       <a:r>
@@ -4124,7 +3947,7 @@
                       </a:endParaRPr>
                     </a:p>
                   </a:txBody>
-                  <a:tcPr marL="91440" marR="91440" marT="45720" marB="45720">
+                  <a:tcPr>
                     <a:lnL w="6350" cap="flat" cmpd="sng" algn="ctr">
                       <a:solidFill>
                         <a:srgbClr val="E8EDF2"/>
@@ -4168,7 +3991,7 @@
                     <a:bodyPr/>
                     <a:lstStyle/>
                     <a:p>
-                      <a:pPr indent="0" marL="0">
+                      <a:pPr marL="0" indent="0">
                         <a:buNone/>
                       </a:pPr>
                       <a:r>
@@ -4189,7 +4012,7 @@
                       </a:endParaRPr>
                     </a:p>
                   </a:txBody>
-                  <a:tcPr marL="91440" marR="91440" marT="45720" marB="45720">
+                  <a:tcPr>
                     <a:lnL w="6350" cap="flat" cmpd="sng" algn="ctr">
                       <a:solidFill>
                         <a:srgbClr val="E8EDF2"/>
@@ -4233,7 +4056,7 @@
                     <a:bodyPr/>
                     <a:lstStyle/>
                     <a:p>
-                      <a:pPr indent="0" marL="0">
+                      <a:pPr marL="0" indent="0">
                         <a:buNone/>
                       </a:pPr>
                       <a:r>
@@ -4254,7 +4077,7 @@
                       </a:endParaRPr>
                     </a:p>
                   </a:txBody>
-                  <a:tcPr marL="91440" marR="91440" marT="45720" marB="45720">
+                  <a:tcPr>
                     <a:lnL w="6350" cap="flat" cmpd="sng" algn="ctr">
                       <a:solidFill>
                         <a:srgbClr val="E8EDF2"/>
@@ -4293,6 +4116,11 @@
                     </a:lnB>
                   </a:tcPr>
                 </a:tc>
+                <a:extLst>
+                  <a:ext uri="{0D108BD9-81ED-4DB2-BD59-A6C34878D82A}">
+                    <a16:rowId xmlns:a16="http://schemas.microsoft.com/office/drawing/2014/main" val="10002"/>
+                  </a:ext>
+                </a:extLst>
               </a:tr>
               <a:tr h="365760">
                 <a:tc>
@@ -4300,7 +4128,7 @@
                     <a:bodyPr/>
                     <a:lstStyle/>
                     <a:p>
-                      <a:pPr indent="0" marL="0">
+                      <a:pPr marL="0" indent="0">
                         <a:buNone/>
                       </a:pPr>
                       <a:r>
@@ -4321,7 +4149,7 @@
                       </a:endParaRPr>
                     </a:p>
                   </a:txBody>
-                  <a:tcPr marL="91440" marR="91440" marT="45720" marB="45720">
+                  <a:tcPr>
                     <a:lnL w="6350" cap="flat" cmpd="sng" algn="ctr">
                       <a:solidFill>
                         <a:srgbClr val="E8EDF2"/>
@@ -4365,7 +4193,7 @@
                     <a:bodyPr/>
                     <a:lstStyle/>
                     <a:p>
-                      <a:pPr indent="0" marL="0">
+                      <a:pPr marL="0" indent="0">
                         <a:buNone/>
                       </a:pPr>
                       <a:r>
@@ -4386,7 +4214,7 @@
                       </a:endParaRPr>
                     </a:p>
                   </a:txBody>
-                  <a:tcPr marL="91440" marR="91440" marT="45720" marB="45720">
+                  <a:tcPr>
                     <a:lnL w="6350" cap="flat" cmpd="sng" algn="ctr">
                       <a:solidFill>
                         <a:srgbClr val="E8EDF2"/>
@@ -4430,7 +4258,7 @@
                     <a:bodyPr/>
                     <a:lstStyle/>
                     <a:p>
-                      <a:pPr indent="0" marL="0">
+                      <a:pPr marL="0" indent="0">
                         <a:buNone/>
                       </a:pPr>
                       <a:r>
@@ -4451,7 +4279,7 @@
                       </a:endParaRPr>
                     </a:p>
                   </a:txBody>
-                  <a:tcPr marL="91440" marR="91440" marT="45720" marB="45720">
+                  <a:tcPr>
                     <a:lnL w="6350" cap="flat" cmpd="sng" algn="ctr">
                       <a:solidFill>
                         <a:srgbClr val="E8EDF2"/>
@@ -4490,6 +4318,11 @@
                     </a:lnB>
                   </a:tcPr>
                 </a:tc>
+                <a:extLst>
+                  <a:ext uri="{0D108BD9-81ED-4DB2-BD59-A6C34878D82A}">
+                    <a16:rowId xmlns:a16="http://schemas.microsoft.com/office/drawing/2014/main" val="10003"/>
+                  </a:ext>
+                </a:extLst>
               </a:tr>
             </a:tbl>
           </a:graphicData>
@@ -4516,7 +4349,7 @@
           <a:bodyPr wrap="square" rtlCol="0" anchor="ctr"/>
           <a:lstStyle/>
           <a:p>
-            <a:pPr indent="0" marL="0">
+            <a:pPr marL="0" indent="0">
               <a:buNone/>
             </a:pPr>
             <a:r>
@@ -4553,13 +4386,20 @@
           </a:solidFill>
           <a:ln/>
           <a:effectLst>
-            <a:outerShdw sx="100000" sy="100000" kx="0" ky="0" algn="bl" rotWithShape="0" blurRad="101600" dist="38100" dir="8100000">
+            <a:outerShdw blurRad="101600" dist="38100" dir="8100000" algn="bl" rotWithShape="0">
               <a:srgbClr val="000000">
                 <a:alpha val="12000"/>
               </a:srgbClr>
             </a:outerShdw>
           </a:effectLst>
         </p:spPr>
+        <p:txBody>
+          <a:bodyPr/>
+          <a:lstStyle/>
+          <a:p>
+            <a:endParaRPr lang="en-US"/>
+          </a:p>
+        </p:txBody>
       </p:sp>
       <p:sp>
         <p:nvSpPr>
@@ -4580,6 +4420,13 @@
           </a:solidFill>
           <a:ln/>
         </p:spPr>
+        <p:txBody>
+          <a:bodyPr/>
+          <a:lstStyle/>
+          <a:p>
+            <a:endParaRPr lang="en-US"/>
+          </a:p>
+        </p:txBody>
       </p:sp>
       <p:sp>
         <p:nvSpPr>
@@ -4602,7 +4449,7 @@
           <a:bodyPr wrap="square" rtlCol="0" anchor="ctr"/>
           <a:lstStyle/>
           <a:p>
-            <a:pPr algn="ctr" indent="0" marL="0">
+            <a:pPr marL="0" indent="0" algn="ctr">
               <a:buNone/>
             </a:pPr>
             <a:r>
@@ -4622,7 +4469,7 @@
       </p:sp>
       <p:sp>
         <p:nvSpPr>
-          <p:cNvPr id="12" name="Text 8"/>
+          <p:cNvPr id="7" name="Text 8"/>
           <p:cNvSpPr/>
           <p:nvPr/>
         </p:nvSpPr>
@@ -4641,7 +4488,7 @@
           <a:bodyPr wrap="square" lIns="0" tIns="0" rIns="0" bIns="0" rtlCol="0" anchor="ctr"/>
           <a:lstStyle/>
           <a:p>
-            <a:pPr indent="0" marL="0">
+            <a:pPr marL="0" indent="0">
               <a:buNone/>
             </a:pPr>
             <a:r>
@@ -4678,13 +4525,20 @@
           </a:solidFill>
           <a:ln/>
           <a:effectLst>
-            <a:outerShdw sx="100000" sy="100000" kx="0" ky="0" algn="bl" rotWithShape="0" blurRad="101600" dist="38100" dir="8100000">
+            <a:outerShdw blurRad="101600" dist="38100" dir="8100000" algn="bl" rotWithShape="0">
               <a:srgbClr val="000000">
                 <a:alpha val="12000"/>
               </a:srgbClr>
             </a:outerShdw>
           </a:effectLst>
         </p:spPr>
+        <p:txBody>
+          <a:bodyPr/>
+          <a:lstStyle/>
+          <a:p>
+            <a:endParaRPr lang="en-US"/>
+          </a:p>
+        </p:txBody>
       </p:sp>
       <p:sp>
         <p:nvSpPr>
@@ -4705,6 +4559,13 @@
           </a:solidFill>
           <a:ln/>
         </p:spPr>
+        <p:txBody>
+          <a:bodyPr/>
+          <a:lstStyle/>
+          <a:p>
+            <a:endParaRPr lang="en-US"/>
+          </a:p>
+        </p:txBody>
       </p:sp>
       <p:sp>
         <p:nvSpPr>
@@ -4727,7 +4588,7 @@
           <a:bodyPr wrap="square" rtlCol="0" anchor="ctr"/>
           <a:lstStyle/>
           <a:p>
-            <a:pPr algn="ctr" indent="0" marL="0">
+            <a:pPr marL="0" indent="0" algn="ctr">
               <a:buNone/>
             </a:pPr>
             <a:r>
@@ -4766,7 +4627,7 @@
           <a:bodyPr wrap="square" lIns="0" tIns="0" rIns="0" bIns="0" rtlCol="0" anchor="ctr"/>
           <a:lstStyle/>
           <a:p>
-            <a:pPr indent="0" marL="0">
+            <a:pPr marL="0" indent="0">
               <a:buNone/>
             </a:pPr>
             <a:r>
@@ -4803,13 +4664,20 @@
           </a:solidFill>
           <a:ln/>
           <a:effectLst>
-            <a:outerShdw sx="100000" sy="100000" kx="0" ky="0" algn="bl" rotWithShape="0" blurRad="101600" dist="38100" dir="8100000">
+            <a:outerShdw blurRad="101600" dist="38100" dir="8100000" algn="bl" rotWithShape="0">
               <a:srgbClr val="000000">
                 <a:alpha val="12000"/>
               </a:srgbClr>
             </a:outerShdw>
           </a:effectLst>
         </p:spPr>
+        <p:txBody>
+          <a:bodyPr/>
+          <a:lstStyle/>
+          <a:p>
+            <a:endParaRPr lang="en-US"/>
+          </a:p>
+        </p:txBody>
       </p:sp>
       <p:sp>
         <p:nvSpPr>
@@ -4830,6 +4698,13 @@
           </a:solidFill>
           <a:ln/>
         </p:spPr>
+        <p:txBody>
+          <a:bodyPr/>
+          <a:lstStyle/>
+          <a:p>
+            <a:endParaRPr lang="en-US"/>
+          </a:p>
+        </p:txBody>
       </p:sp>
       <p:sp>
         <p:nvSpPr>
@@ -4852,7 +4727,7 @@
           <a:bodyPr wrap="square" rtlCol="0" anchor="ctr"/>
           <a:lstStyle/>
           <a:p>
-            <a:pPr algn="ctr" indent="0" marL="0">
+            <a:pPr marL="0" indent="0" algn="ctr">
               <a:buNone/>
             </a:pPr>
             <a:r>
@@ -4891,7 +4766,7 @@
           <a:bodyPr wrap="square" lIns="0" tIns="0" rIns="0" bIns="0" rtlCol="0" anchor="ctr"/>
           <a:lstStyle/>
           <a:p>
-            <a:pPr indent="0" marL="0">
+            <a:pPr marL="0" indent="0">
               <a:buNone/>
             </a:pPr>
             <a:r>
@@ -4928,13 +4803,20 @@
           </a:solidFill>
           <a:ln/>
           <a:effectLst>
-            <a:outerShdw sx="100000" sy="100000" kx="0" ky="0" algn="bl" rotWithShape="0" blurRad="101600" dist="38100" dir="8100000">
+            <a:outerShdw blurRad="101600" dist="38100" dir="8100000" algn="bl" rotWithShape="0">
               <a:srgbClr val="000000">
                 <a:alpha val="12000"/>
               </a:srgbClr>
             </a:outerShdw>
           </a:effectLst>
         </p:spPr>
+        <p:txBody>
+          <a:bodyPr/>
+          <a:lstStyle/>
+          <a:p>
+            <a:endParaRPr lang="en-US"/>
+          </a:p>
+        </p:txBody>
       </p:sp>
       <p:sp>
         <p:nvSpPr>
@@ -4955,6 +4837,13 @@
           </a:solidFill>
           <a:ln/>
         </p:spPr>
+        <p:txBody>
+          <a:bodyPr/>
+          <a:lstStyle/>
+          <a:p>
+            <a:endParaRPr lang="en-US"/>
+          </a:p>
+        </p:txBody>
       </p:sp>
       <p:sp>
         <p:nvSpPr>
@@ -4977,7 +4866,7 @@
           <a:bodyPr wrap="square" rtlCol="0" anchor="ctr"/>
           <a:lstStyle/>
           <a:p>
-            <a:pPr algn="ctr" indent="0" marL="0">
+            <a:pPr marL="0" indent="0" algn="ctr">
               <a:buNone/>
             </a:pPr>
             <a:r>
@@ -5016,7 +4905,7 @@
           <a:bodyPr wrap="square" lIns="0" tIns="0" rIns="0" bIns="0" rtlCol="0" anchor="ctr"/>
           <a:lstStyle/>
           <a:p>
-            <a:pPr indent="0" marL="0">
+            <a:pPr marL="0" indent="0">
               <a:buNone/>
             </a:pPr>
             <a:r>
@@ -5055,7 +4944,7 @@
           <a:bodyPr wrap="square" rtlCol="0" anchor="ctr"/>
           <a:lstStyle/>
           <a:p>
-            <a:pPr indent="0" marL="0">
+            <a:pPr marL="0" indent="0">
               <a:buNone/>
             </a:pPr>
             <a:r>
@@ -5089,6 +4978,7 @@
         <a:solidFill>
           <a:srgbClr val="1E2761"/>
         </a:solidFill>
+        <a:effectLst/>
       </p:bgPr>
     </p:bg>
     <p:spTree>
@@ -5124,6 +5014,13 @@
           </a:solidFill>
           <a:ln/>
         </p:spPr>
+        <p:txBody>
+          <a:bodyPr/>
+          <a:lstStyle/>
+          <a:p>
+            <a:endParaRPr lang="en-US"/>
+          </a:p>
+        </p:txBody>
       </p:sp>
       <p:sp>
         <p:nvSpPr>
@@ -5146,11 +5043,11 @@
           <a:bodyPr wrap="square" rtlCol="0" anchor="ctr"/>
           <a:lstStyle/>
           <a:p>
-            <a:pPr indent="0" marL="0">
-              <a:buNone/>
-            </a:pPr>
-            <a:r>
-              <a:rPr lang="en-US" sz="1400" b="1" spc="500" kern="0" dirty="0">
+            <a:pPr marL="0" indent="0">
+              <a:buNone/>
+            </a:pPr>
+            <a:r>
+              <a:rPr lang="en-US" sz="1400" b="1" kern="0" spc="500" dirty="0">
                 <a:solidFill>
                   <a:srgbClr val="0891B2"/>
                 </a:solidFill>
@@ -5185,7 +5082,7 @@
           <a:bodyPr wrap="square" rtlCol="0" anchor="ctr"/>
           <a:lstStyle/>
           <a:p>
-            <a:pPr indent="0" marL="0">
+            <a:pPr marL="0" indent="0">
               <a:buNone/>
             </a:pPr>
             <a:r>
@@ -5222,13 +5119,20 @@
           </a:solidFill>
           <a:ln/>
           <a:effectLst>
-            <a:outerShdw sx="100000" sy="100000" kx="0" ky="0" algn="bl" rotWithShape="0" blurRad="101600" dist="38100" dir="8100000">
+            <a:outerShdw blurRad="101600" dist="38100" dir="8100000" algn="bl" rotWithShape="0">
               <a:srgbClr val="000000">
                 <a:alpha val="12000"/>
               </a:srgbClr>
             </a:outerShdw>
           </a:effectLst>
         </p:spPr>
+        <p:txBody>
+          <a:bodyPr/>
+          <a:lstStyle/>
+          <a:p>
+            <a:endParaRPr lang="en-US"/>
+          </a:p>
+        </p:txBody>
       </p:sp>
       <p:sp>
         <p:nvSpPr>
@@ -5251,7 +5155,7 @@
           <a:bodyPr wrap="square" rtlCol="0" anchor="ctr"/>
           <a:lstStyle/>
           <a:p>
-            <a:pPr algn="ctr" indent="0" marL="0">
+            <a:pPr marL="0" indent="0" algn="ctr">
               <a:buNone/>
             </a:pPr>
             <a:r>
@@ -5290,7 +5194,7 @@
           <a:bodyPr wrap="square" rtlCol="0" anchor="ctr"/>
           <a:lstStyle/>
           <a:p>
-            <a:pPr algn="ctr" indent="0" marL="0">
+            <a:pPr marL="0" indent="0" algn="ctr">
               <a:buNone/>
             </a:pPr>
             <a:r>
@@ -5327,13 +5231,20 @@
           </a:solidFill>
           <a:ln/>
           <a:effectLst>
-            <a:outerShdw sx="100000" sy="100000" kx="0" ky="0" algn="bl" rotWithShape="0" blurRad="101600" dist="38100" dir="8100000">
+            <a:outerShdw blurRad="101600" dist="38100" dir="8100000" algn="bl" rotWithShape="0">
               <a:srgbClr val="000000">
                 <a:alpha val="12000"/>
               </a:srgbClr>
             </a:outerShdw>
           </a:effectLst>
         </p:spPr>
+        <p:txBody>
+          <a:bodyPr/>
+          <a:lstStyle/>
+          <a:p>
+            <a:endParaRPr lang="en-US"/>
+          </a:p>
+        </p:txBody>
       </p:sp>
       <p:sp>
         <p:nvSpPr>
@@ -5356,7 +5267,7 @@
           <a:bodyPr wrap="square" rtlCol="0" anchor="ctr"/>
           <a:lstStyle/>
           <a:p>
-            <a:pPr algn="ctr" indent="0" marL="0">
+            <a:pPr marL="0" indent="0" algn="ctr">
               <a:buNone/>
             </a:pPr>
             <a:r>
@@ -5395,7 +5306,7 @@
           <a:bodyPr wrap="square" rtlCol="0" anchor="ctr"/>
           <a:lstStyle/>
           <a:p>
-            <a:pPr algn="ctr" indent="0" marL="0">
+            <a:pPr marL="0" indent="0" algn="ctr">
               <a:buNone/>
             </a:pPr>
             <a:r>
@@ -5432,13 +5343,20 @@
           </a:solidFill>
           <a:ln/>
           <a:effectLst>
-            <a:outerShdw sx="100000" sy="100000" kx="0" ky="0" algn="bl" rotWithShape="0" blurRad="101600" dist="38100" dir="8100000">
+            <a:outerShdw blurRad="101600" dist="38100" dir="8100000" algn="bl" rotWithShape="0">
               <a:srgbClr val="000000">
                 <a:alpha val="12000"/>
               </a:srgbClr>
             </a:outerShdw>
           </a:effectLst>
         </p:spPr>
+        <p:txBody>
+          <a:bodyPr/>
+          <a:lstStyle/>
+          <a:p>
+            <a:endParaRPr lang="en-US"/>
+          </a:p>
+        </p:txBody>
       </p:sp>
       <p:sp>
         <p:nvSpPr>
@@ -5461,7 +5379,7 @@
           <a:bodyPr wrap="square" rtlCol="0" anchor="ctr"/>
           <a:lstStyle/>
           <a:p>
-            <a:pPr algn="ctr" indent="0" marL="0">
+            <a:pPr marL="0" indent="0" algn="ctr">
               <a:buNone/>
             </a:pPr>
             <a:r>
@@ -5500,7 +5418,7 @@
           <a:bodyPr wrap="square" rtlCol="0" anchor="ctr"/>
           <a:lstStyle/>
           <a:p>
-            <a:pPr algn="ctr" indent="0" marL="0">
+            <a:pPr marL="0" indent="0" algn="ctr">
               <a:buNone/>
             </a:pPr>
             <a:r>
@@ -5537,13 +5455,20 @@
           </a:solidFill>
           <a:ln/>
           <a:effectLst>
-            <a:outerShdw sx="100000" sy="100000" kx="0" ky="0" algn="bl" rotWithShape="0" blurRad="101600" dist="38100" dir="8100000">
+            <a:outerShdw blurRad="101600" dist="38100" dir="8100000" algn="bl" rotWithShape="0">
               <a:srgbClr val="000000">
                 <a:alpha val="12000"/>
               </a:srgbClr>
             </a:outerShdw>
           </a:effectLst>
         </p:spPr>
+        <p:txBody>
+          <a:bodyPr/>
+          <a:lstStyle/>
+          <a:p>
+            <a:endParaRPr lang="en-US"/>
+          </a:p>
+        </p:txBody>
       </p:sp>
       <p:sp>
         <p:nvSpPr>
@@ -5566,7 +5491,7 @@
           <a:bodyPr wrap="square" rtlCol="0" anchor="ctr"/>
           <a:lstStyle/>
           <a:p>
-            <a:pPr algn="ctr" indent="0" marL="0">
+            <a:pPr marL="0" indent="0" algn="ctr">
               <a:buNone/>
             </a:pPr>
             <a:r>
@@ -5605,7 +5530,7 @@
           <a:bodyPr wrap="square" rtlCol="0" anchor="ctr"/>
           <a:lstStyle/>
           <a:p>
-            <a:pPr algn="ctr" indent="0" marL="0">
+            <a:pPr marL="0" indent="0" algn="ctr">
               <a:buNone/>
             </a:pPr>
             <a:r>
@@ -5642,13 +5567,20 @@
           </a:solidFill>
           <a:ln/>
           <a:effectLst>
-            <a:outerShdw sx="100000" sy="100000" kx="0" ky="0" algn="bl" rotWithShape="0" blurRad="101600" dist="38100" dir="8100000">
+            <a:outerShdw blurRad="101600" dist="38100" dir="8100000" algn="bl" rotWithShape="0">
               <a:srgbClr val="000000">
                 <a:alpha val="12000"/>
               </a:srgbClr>
             </a:outerShdw>
           </a:effectLst>
         </p:spPr>
+        <p:txBody>
+          <a:bodyPr/>
+          <a:lstStyle/>
+          <a:p>
+            <a:endParaRPr lang="en-US"/>
+          </a:p>
+        </p:txBody>
       </p:sp>
       <p:sp>
         <p:nvSpPr>
@@ -5671,7 +5603,7 @@
           <a:bodyPr wrap="square" rtlCol="0" anchor="ctr"/>
           <a:lstStyle/>
           <a:p>
-            <a:pPr algn="ctr" indent="0" marL="0">
+            <a:pPr marL="0" indent="0" algn="ctr">
               <a:buNone/>
             </a:pPr>
             <a:r>
@@ -5710,7 +5642,7 @@
           <a:bodyPr wrap="square" rtlCol="0" anchor="ctr"/>
           <a:lstStyle/>
           <a:p>
-            <a:pPr algn="ctr" indent="0" marL="0">
+            <a:pPr marL="0" indent="0" algn="ctr">
               <a:buNone/>
             </a:pPr>
             <a:r>
@@ -5747,13 +5679,20 @@
           </a:solidFill>
           <a:ln/>
           <a:effectLst>
-            <a:outerShdw sx="100000" sy="100000" kx="0" ky="0" algn="bl" rotWithShape="0" blurRad="101600" dist="38100" dir="8100000">
+            <a:outerShdw blurRad="101600" dist="38100" dir="8100000" algn="bl" rotWithShape="0">
               <a:srgbClr val="000000">
                 <a:alpha val="12000"/>
               </a:srgbClr>
             </a:outerShdw>
           </a:effectLst>
         </p:spPr>
+        <p:txBody>
+          <a:bodyPr/>
+          <a:lstStyle/>
+          <a:p>
+            <a:endParaRPr lang="en-US"/>
+          </a:p>
+        </p:txBody>
       </p:sp>
       <p:sp>
         <p:nvSpPr>
@@ -5776,7 +5715,7 @@
           <a:bodyPr wrap="square" rtlCol="0" anchor="ctr"/>
           <a:lstStyle/>
           <a:p>
-            <a:pPr algn="ctr" indent="0" marL="0">
+            <a:pPr marL="0" indent="0" algn="ctr">
               <a:buNone/>
             </a:pPr>
             <a:r>
@@ -5815,7 +5754,7 @@
           <a:bodyPr wrap="square" rtlCol="0" anchor="ctr"/>
           <a:lstStyle/>
           <a:p>
-            <a:pPr algn="ctr" indent="0" marL="0">
+            <a:pPr marL="0" indent="0" algn="ctr">
               <a:buNone/>
             </a:pPr>
             <a:r>
@@ -5854,7 +5793,7 @@
           <a:bodyPr wrap="square" rtlCol="0" anchor="ctr"/>
           <a:lstStyle/>
           <a:p>
-            <a:pPr algn="ctr" indent="0" marL="0">
+            <a:pPr marL="0" indent="0" algn="ctr">
               <a:buNone/>
             </a:pPr>
             <a:r>
@@ -5888,6 +5827,7 @@
         <a:solidFill>
           <a:srgbClr val="F0F4F8"/>
         </a:solidFill>
+        <a:effectLst/>
       </p:bgPr>
     </p:bg>
     <p:spTree>
@@ -5923,6 +5863,13 @@
           </a:solidFill>
           <a:ln/>
         </p:spPr>
+        <p:txBody>
+          <a:bodyPr/>
+          <a:lstStyle/>
+          <a:p>
+            <a:endParaRPr lang="en-US"/>
+          </a:p>
+        </p:txBody>
       </p:sp>
       <p:sp>
         <p:nvSpPr>
@@ -5945,7 +5892,7 @@
           <a:bodyPr wrap="square" rtlCol="0" anchor="ctr"/>
           <a:lstStyle/>
           <a:p>
-            <a:pPr indent="0" marL="0">
+            <a:pPr marL="0" indent="0">
               <a:buNone/>
             </a:pPr>
             <a:r>
@@ -5984,7 +5931,7 @@
           <a:bodyPr wrap="square" rtlCol="0" anchor="ctr"/>
           <a:lstStyle/>
           <a:p>
-            <a:pPr indent="0" marL="0">
+            <a:pPr marL="0" indent="0">
               <a:buNone/>
             </a:pPr>
             <a:r>
@@ -6021,13 +5968,20 @@
           </a:solidFill>
           <a:ln/>
           <a:effectLst>
-            <a:outerShdw sx="100000" sy="100000" kx="0" ky="0" algn="bl" rotWithShape="0" blurRad="101600" dist="38100" dir="8100000">
+            <a:outerShdw blurRad="101600" dist="38100" dir="8100000" algn="bl" rotWithShape="0">
               <a:srgbClr val="000000">
                 <a:alpha val="12000"/>
               </a:srgbClr>
             </a:outerShdw>
           </a:effectLst>
         </p:spPr>
+        <p:txBody>
+          <a:bodyPr/>
+          <a:lstStyle/>
+          <a:p>
+            <a:endParaRPr lang="en-US"/>
+          </a:p>
+        </p:txBody>
       </p:sp>
       <p:sp>
         <p:nvSpPr>
@@ -6050,7 +6004,7 @@
           <a:bodyPr wrap="square" lIns="0" tIns="0" rIns="0" bIns="0" rtlCol="0" anchor="ctr"/>
           <a:lstStyle/>
           <a:p>
-            <a:pPr indent="0" marL="0">
+            <a:pPr marL="0" indent="0">
               <a:buNone/>
             </a:pPr>
             <a:r>
@@ -6087,13 +6041,20 @@
           </a:solidFill>
           <a:ln/>
           <a:effectLst>
-            <a:outerShdw sx="100000" sy="100000" kx="0" ky="0" algn="bl" rotWithShape="0" blurRad="101600" dist="38100" dir="8100000">
+            <a:outerShdw blurRad="101600" dist="38100" dir="8100000" algn="bl" rotWithShape="0">
               <a:srgbClr val="000000">
                 <a:alpha val="12000"/>
               </a:srgbClr>
             </a:outerShdw>
           </a:effectLst>
         </p:spPr>
+        <p:txBody>
+          <a:bodyPr/>
+          <a:lstStyle/>
+          <a:p>
+            <a:endParaRPr lang="en-US"/>
+          </a:p>
+        </p:txBody>
       </p:sp>
       <p:sp>
         <p:nvSpPr>
@@ -6116,7 +6077,7 @@
           <a:bodyPr wrap="square" lIns="0" tIns="0" rIns="0" bIns="0" rtlCol="0" anchor="ctr"/>
           <a:lstStyle/>
           <a:p>
-            <a:pPr indent="0" marL="0">
+            <a:pPr marL="0" indent="0">
               <a:buNone/>
             </a:pPr>
             <a:r>
@@ -6153,13 +6114,20 @@
           </a:solidFill>
           <a:ln/>
           <a:effectLst>
-            <a:outerShdw sx="100000" sy="100000" kx="0" ky="0" algn="bl" rotWithShape="0" blurRad="101600" dist="38100" dir="8100000">
+            <a:outerShdw blurRad="101600" dist="38100" dir="8100000" algn="bl" rotWithShape="0">
               <a:srgbClr val="000000">
                 <a:alpha val="12000"/>
               </a:srgbClr>
             </a:outerShdw>
           </a:effectLst>
         </p:spPr>
+        <p:txBody>
+          <a:bodyPr/>
+          <a:lstStyle/>
+          <a:p>
+            <a:endParaRPr lang="en-US"/>
+          </a:p>
+        </p:txBody>
       </p:sp>
       <p:sp>
         <p:nvSpPr>
@@ -6182,7 +6150,7 @@
           <a:bodyPr wrap="square" lIns="0" tIns="0" rIns="0" bIns="0" rtlCol="0" anchor="ctr"/>
           <a:lstStyle/>
           <a:p>
-            <a:pPr indent="0" marL="0">
+            <a:pPr marL="0" indent="0">
               <a:buNone/>
             </a:pPr>
             <a:r>
@@ -6219,13 +6187,20 @@
           </a:solidFill>
           <a:ln/>
           <a:effectLst>
-            <a:outerShdw sx="100000" sy="100000" kx="0" ky="0" algn="bl" rotWithShape="0" blurRad="101600" dist="38100" dir="8100000">
+            <a:outerShdw blurRad="101600" dist="38100" dir="8100000" algn="bl" rotWithShape="0">
               <a:srgbClr val="000000">
                 <a:alpha val="12000"/>
               </a:srgbClr>
             </a:outerShdw>
           </a:effectLst>
         </p:spPr>
+        <p:txBody>
+          <a:bodyPr/>
+          <a:lstStyle/>
+          <a:p>
+            <a:endParaRPr lang="en-US"/>
+          </a:p>
+        </p:txBody>
       </p:sp>
       <p:sp>
         <p:nvSpPr>
@@ -6248,7 +6223,7 @@
           <a:bodyPr wrap="square" lIns="0" tIns="0" rIns="0" bIns="0" rtlCol="0" anchor="ctr"/>
           <a:lstStyle/>
           <a:p>
-            <a:pPr indent="0" marL="0">
+            <a:pPr marL="0" indent="0">
               <a:buNone/>
             </a:pPr>
             <a:r>
@@ -6285,13 +6260,20 @@
           </a:solidFill>
           <a:ln/>
           <a:effectLst>
-            <a:outerShdw sx="100000" sy="100000" kx="0" ky="0" algn="bl" rotWithShape="0" blurRad="101600" dist="38100" dir="8100000">
+            <a:outerShdw blurRad="101600" dist="38100" dir="8100000" algn="bl" rotWithShape="0">
               <a:srgbClr val="000000">
                 <a:alpha val="12000"/>
               </a:srgbClr>
             </a:outerShdw>
           </a:effectLst>
         </p:spPr>
+        <p:txBody>
+          <a:bodyPr/>
+          <a:lstStyle/>
+          <a:p>
+            <a:endParaRPr lang="en-US"/>
+          </a:p>
+        </p:txBody>
       </p:sp>
       <p:sp>
         <p:nvSpPr>
@@ -6314,7 +6296,7 @@
           <a:bodyPr wrap="square" lIns="0" tIns="0" rIns="0" bIns="0" rtlCol="0" anchor="ctr"/>
           <a:lstStyle/>
           <a:p>
-            <a:pPr indent="0" marL="0">
+            <a:pPr marL="0" indent="0">
               <a:buNone/>
             </a:pPr>
             <a:r>
@@ -6351,13 +6333,20 @@
           </a:solidFill>
           <a:ln/>
           <a:effectLst>
-            <a:outerShdw sx="100000" sy="100000" kx="0" ky="0" algn="bl" rotWithShape="0" blurRad="101600" dist="38100" dir="8100000">
+            <a:outerShdw blurRad="101600" dist="38100" dir="8100000" algn="bl" rotWithShape="0">
               <a:srgbClr val="000000">
                 <a:alpha val="12000"/>
               </a:srgbClr>
             </a:outerShdw>
           </a:effectLst>
         </p:spPr>
+        <p:txBody>
+          <a:bodyPr/>
+          <a:lstStyle/>
+          <a:p>
+            <a:endParaRPr lang="en-US"/>
+          </a:p>
+        </p:txBody>
       </p:sp>
       <p:sp>
         <p:nvSpPr>
@@ -6380,7 +6369,7 @@
           <a:bodyPr wrap="square" lIns="0" tIns="0" rIns="0" bIns="0" rtlCol="0" anchor="ctr"/>
           <a:lstStyle/>
           <a:p>
-            <a:pPr indent="0" marL="0">
+            <a:pPr marL="0" indent="0">
               <a:buNone/>
             </a:pPr>
             <a:r>
@@ -6417,13 +6406,20 @@
           </a:solidFill>
           <a:ln/>
           <a:effectLst>
-            <a:outerShdw sx="100000" sy="100000" kx="0" ky="0" algn="bl" rotWithShape="0" blurRad="101600" dist="38100" dir="8100000">
+            <a:outerShdw blurRad="101600" dist="38100" dir="8100000" algn="bl" rotWithShape="0">
               <a:srgbClr val="000000">
                 <a:alpha val="12000"/>
               </a:srgbClr>
             </a:outerShdw>
           </a:effectLst>
         </p:spPr>
+        <p:txBody>
+          <a:bodyPr/>
+          <a:lstStyle/>
+          <a:p>
+            <a:endParaRPr lang="en-US"/>
+          </a:p>
+        </p:txBody>
       </p:sp>
       <p:sp>
         <p:nvSpPr>
@@ -6446,7 +6442,7 @@
           <a:bodyPr wrap="square" lIns="0" tIns="0" rIns="0" bIns="0" rtlCol="0" anchor="ctr"/>
           <a:lstStyle/>
           <a:p>
-            <a:pPr indent="0" marL="0">
+            <a:pPr marL="0" indent="0">
               <a:buNone/>
             </a:pPr>
             <a:r>
@@ -6483,13 +6479,20 @@
           </a:solidFill>
           <a:ln/>
           <a:effectLst>
-            <a:outerShdw sx="100000" sy="100000" kx="0" ky="0" algn="bl" rotWithShape="0" blurRad="101600" dist="38100" dir="8100000">
+            <a:outerShdw blurRad="101600" dist="38100" dir="8100000" algn="bl" rotWithShape="0">
               <a:srgbClr val="000000">
                 <a:alpha val="12000"/>
               </a:srgbClr>
             </a:outerShdw>
           </a:effectLst>
         </p:spPr>
+        <p:txBody>
+          <a:bodyPr/>
+          <a:lstStyle/>
+          <a:p>
+            <a:endParaRPr lang="en-US"/>
+          </a:p>
+        </p:txBody>
       </p:sp>
       <p:sp>
         <p:nvSpPr>
@@ -6512,7 +6515,7 @@
           <a:bodyPr wrap="square" lIns="0" tIns="0" rIns="0" bIns="0" rtlCol="0" anchor="ctr"/>
           <a:lstStyle/>
           <a:p>
-            <a:pPr indent="0" marL="0">
+            <a:pPr marL="0" indent="0">
               <a:buNone/>
             </a:pPr>
             <a:r>
@@ -6549,13 +6552,20 @@
           </a:solidFill>
           <a:ln/>
           <a:effectLst>
-            <a:outerShdw sx="100000" sy="100000" kx="0" ky="0" algn="bl" rotWithShape="0" blurRad="101600" dist="38100" dir="8100000">
+            <a:outerShdw blurRad="101600" dist="38100" dir="8100000" algn="bl" rotWithShape="0">
               <a:srgbClr val="000000">
                 <a:alpha val="12000"/>
               </a:srgbClr>
             </a:outerShdw>
           </a:effectLst>
         </p:spPr>
+        <p:txBody>
+          <a:bodyPr/>
+          <a:lstStyle/>
+          <a:p>
+            <a:endParaRPr lang="en-US"/>
+          </a:p>
+        </p:txBody>
       </p:sp>
       <p:sp>
         <p:nvSpPr>
@@ -6578,7 +6588,7 @@
           <a:bodyPr wrap="square" lIns="0" tIns="0" rIns="0" bIns="0" rtlCol="0" anchor="ctr"/>
           <a:lstStyle/>
           <a:p>
-            <a:pPr indent="0" marL="0">
+            <a:pPr marL="0" indent="0">
               <a:buNone/>
             </a:pPr>
             <a:r>
@@ -6615,13 +6625,20 @@
           </a:solidFill>
           <a:ln/>
           <a:effectLst>
-            <a:outerShdw sx="100000" sy="100000" kx="0" ky="0" algn="bl" rotWithShape="0" blurRad="101600" dist="38100" dir="8100000">
+            <a:outerShdw blurRad="101600" dist="38100" dir="8100000" algn="bl" rotWithShape="0">
               <a:srgbClr val="000000">
                 <a:alpha val="12000"/>
               </a:srgbClr>
             </a:outerShdw>
           </a:effectLst>
         </p:spPr>
+        <p:txBody>
+          <a:bodyPr/>
+          <a:lstStyle/>
+          <a:p>
+            <a:endParaRPr lang="en-US"/>
+          </a:p>
+        </p:txBody>
       </p:sp>
       <p:sp>
         <p:nvSpPr>
@@ -6644,7 +6661,7 @@
           <a:bodyPr wrap="square" lIns="0" tIns="0" rIns="0" bIns="0" rtlCol="0" anchor="ctr"/>
           <a:lstStyle/>
           <a:p>
-            <a:pPr indent="0" marL="0">
+            <a:pPr marL="0" indent="0">
               <a:buNone/>
             </a:pPr>
             <a:r>
@@ -6681,13 +6698,20 @@
           </a:solidFill>
           <a:ln/>
           <a:effectLst>
-            <a:outerShdw sx="100000" sy="100000" kx="0" ky="0" algn="bl" rotWithShape="0" blurRad="101600" dist="38100" dir="8100000">
+            <a:outerShdw blurRad="101600" dist="38100" dir="8100000" algn="bl" rotWithShape="0">
               <a:srgbClr val="000000">
                 <a:alpha val="12000"/>
               </a:srgbClr>
             </a:outerShdw>
           </a:effectLst>
         </p:spPr>
+        <p:txBody>
+          <a:bodyPr/>
+          <a:lstStyle/>
+          <a:p>
+            <a:endParaRPr lang="en-US"/>
+          </a:p>
+        </p:txBody>
       </p:sp>
       <p:sp>
         <p:nvSpPr>
@@ -6710,7 +6734,7 @@
           <a:bodyPr wrap="square" lIns="0" tIns="0" rIns="0" bIns="0" rtlCol="0" anchor="ctr"/>
           <a:lstStyle/>
           <a:p>
-            <a:pPr indent="0" marL="0">
+            <a:pPr marL="0" indent="0">
               <a:buNone/>
             </a:pPr>
             <a:r>
@@ -6747,13 +6771,20 @@
           </a:solidFill>
           <a:ln/>
           <a:effectLst>
-            <a:outerShdw sx="100000" sy="100000" kx="0" ky="0" algn="bl" rotWithShape="0" blurRad="101600" dist="38100" dir="8100000">
+            <a:outerShdw blurRad="101600" dist="38100" dir="8100000" algn="bl" rotWithShape="0">
               <a:srgbClr val="000000">
                 <a:alpha val="12000"/>
               </a:srgbClr>
             </a:outerShdw>
           </a:effectLst>
         </p:spPr>
+        <p:txBody>
+          <a:bodyPr/>
+          <a:lstStyle/>
+          <a:p>
+            <a:endParaRPr lang="en-US"/>
+          </a:p>
+        </p:txBody>
       </p:sp>
       <p:sp>
         <p:nvSpPr>
@@ -6776,7 +6807,7 @@
           <a:bodyPr wrap="square" lIns="0" tIns="0" rIns="0" bIns="0" rtlCol="0" anchor="ctr"/>
           <a:lstStyle/>
           <a:p>
-            <a:pPr indent="0" marL="0">
+            <a:pPr marL="0" indent="0">
               <a:buNone/>
             </a:pPr>
             <a:r>
@@ -6815,7 +6846,7 @@
           <a:bodyPr wrap="square" rtlCol="0" anchor="ctr"/>
           <a:lstStyle/>
           <a:p>
-            <a:pPr indent="0" marL="0">
+            <a:pPr marL="0" indent="0">
               <a:buNone/>
             </a:pPr>
             <a:r>
@@ -6852,13 +6883,20 @@
           </a:solidFill>
           <a:ln/>
           <a:effectLst>
-            <a:outerShdw sx="100000" sy="100000" kx="0" ky="0" algn="bl" rotWithShape="0" blurRad="101600" dist="38100" dir="8100000">
+            <a:outerShdw blurRad="101600" dist="38100" dir="8100000" algn="bl" rotWithShape="0">
               <a:srgbClr val="000000">
                 <a:alpha val="12000"/>
               </a:srgbClr>
             </a:outerShdw>
           </a:effectLst>
         </p:spPr>
+        <p:txBody>
+          <a:bodyPr/>
+          <a:lstStyle/>
+          <a:p>
+            <a:endParaRPr lang="en-US"/>
+          </a:p>
+        </p:txBody>
       </p:sp>
       <p:sp>
         <p:nvSpPr>
@@ -6881,7 +6919,7 @@
           <a:bodyPr wrap="square" lIns="0" tIns="0" rIns="0" bIns="0" rtlCol="0" anchor="ctr"/>
           <a:lstStyle/>
           <a:p>
-            <a:pPr indent="0" marL="0">
+            <a:pPr marL="0" indent="0">
               <a:buNone/>
             </a:pPr>
             <a:r>
@@ -6918,13 +6956,20 @@
           </a:solidFill>
           <a:ln/>
           <a:effectLst>
-            <a:outerShdw sx="100000" sy="100000" kx="0" ky="0" algn="bl" rotWithShape="0" blurRad="101600" dist="38100" dir="8100000">
+            <a:outerShdw blurRad="101600" dist="38100" dir="8100000" algn="bl" rotWithShape="0">
               <a:srgbClr val="000000">
                 <a:alpha val="12000"/>
               </a:srgbClr>
             </a:outerShdw>
           </a:effectLst>
         </p:spPr>
+        <p:txBody>
+          <a:bodyPr/>
+          <a:lstStyle/>
+          <a:p>
+            <a:endParaRPr lang="en-US"/>
+          </a:p>
+        </p:txBody>
       </p:sp>
       <p:sp>
         <p:nvSpPr>
@@ -6947,7 +6992,7 @@
           <a:bodyPr wrap="square" lIns="0" tIns="0" rIns="0" bIns="0" rtlCol="0" anchor="ctr"/>
           <a:lstStyle/>
           <a:p>
-            <a:pPr indent="0" marL="0">
+            <a:pPr marL="0" indent="0">
               <a:buNone/>
             </a:pPr>
             <a:r>
@@ -6984,13 +7029,20 @@
           </a:solidFill>
           <a:ln/>
           <a:effectLst>
-            <a:outerShdw sx="100000" sy="100000" kx="0" ky="0" algn="bl" rotWithShape="0" blurRad="101600" dist="38100" dir="8100000">
+            <a:outerShdw blurRad="101600" dist="38100" dir="8100000" algn="bl" rotWithShape="0">
               <a:srgbClr val="000000">
                 <a:alpha val="12000"/>
               </a:srgbClr>
             </a:outerShdw>
           </a:effectLst>
         </p:spPr>
+        <p:txBody>
+          <a:bodyPr/>
+          <a:lstStyle/>
+          <a:p>
+            <a:endParaRPr lang="en-US"/>
+          </a:p>
+        </p:txBody>
       </p:sp>
       <p:sp>
         <p:nvSpPr>
@@ -7013,7 +7065,7 @@
           <a:bodyPr wrap="square" lIns="0" tIns="0" rIns="0" bIns="0" rtlCol="0" anchor="ctr"/>
           <a:lstStyle/>
           <a:p>
-            <a:pPr indent="0" marL="0">
+            <a:pPr marL="0" indent="0">
               <a:buNone/>
             </a:pPr>
             <a:r>
@@ -7050,13 +7102,20 @@
           </a:solidFill>
           <a:ln/>
           <a:effectLst>
-            <a:outerShdw sx="100000" sy="100000" kx="0" ky="0" algn="bl" rotWithShape="0" blurRad="101600" dist="38100" dir="8100000">
+            <a:outerShdw blurRad="101600" dist="38100" dir="8100000" algn="bl" rotWithShape="0">
               <a:srgbClr val="000000">
                 <a:alpha val="12000"/>
               </a:srgbClr>
             </a:outerShdw>
           </a:effectLst>
         </p:spPr>
+        <p:txBody>
+          <a:bodyPr/>
+          <a:lstStyle/>
+          <a:p>
+            <a:endParaRPr lang="en-US"/>
+          </a:p>
+        </p:txBody>
       </p:sp>
       <p:sp>
         <p:nvSpPr>
@@ -7079,7 +7138,7 @@
           <a:bodyPr wrap="square" lIns="0" tIns="0" rIns="0" bIns="0" rtlCol="0" anchor="ctr"/>
           <a:lstStyle/>
           <a:p>
-            <a:pPr indent="0" marL="0">
+            <a:pPr marL="0" indent="0">
               <a:buNone/>
             </a:pPr>
             <a:r>
@@ -7116,13 +7175,20 @@
           </a:solidFill>
           <a:ln/>
           <a:effectLst>
-            <a:outerShdw sx="100000" sy="100000" kx="0" ky="0" algn="bl" rotWithShape="0" blurRad="101600" dist="38100" dir="8100000">
+            <a:outerShdw blurRad="101600" dist="38100" dir="8100000" algn="bl" rotWithShape="0">
               <a:srgbClr val="000000">
                 <a:alpha val="12000"/>
               </a:srgbClr>
             </a:outerShdw>
           </a:effectLst>
         </p:spPr>
+        <p:txBody>
+          <a:bodyPr/>
+          <a:lstStyle/>
+          <a:p>
+            <a:endParaRPr lang="en-US"/>
+          </a:p>
+        </p:txBody>
       </p:sp>
       <p:sp>
         <p:nvSpPr>
@@ -7145,7 +7211,7 @@
           <a:bodyPr wrap="square" lIns="0" tIns="0" rIns="0" bIns="0" rtlCol="0" anchor="ctr"/>
           <a:lstStyle/>
           <a:p>
-            <a:pPr indent="0" marL="0">
+            <a:pPr marL="0" indent="0">
               <a:buNone/>
             </a:pPr>
             <a:r>
@@ -7182,13 +7248,20 @@
           </a:solidFill>
           <a:ln/>
           <a:effectLst>
-            <a:outerShdw sx="100000" sy="100000" kx="0" ky="0" algn="bl" rotWithShape="0" blurRad="101600" dist="38100" dir="8100000">
+            <a:outerShdw blurRad="101600" dist="38100" dir="8100000" algn="bl" rotWithShape="0">
               <a:srgbClr val="000000">
                 <a:alpha val="12000"/>
               </a:srgbClr>
             </a:outerShdw>
           </a:effectLst>
         </p:spPr>
+        <p:txBody>
+          <a:bodyPr/>
+          <a:lstStyle/>
+          <a:p>
+            <a:endParaRPr lang="en-US"/>
+          </a:p>
+        </p:txBody>
       </p:sp>
       <p:sp>
         <p:nvSpPr>
@@ -7211,7 +7284,7 @@
           <a:bodyPr wrap="square" lIns="0" tIns="0" rIns="0" bIns="0" rtlCol="0" anchor="ctr"/>
           <a:lstStyle/>
           <a:p>
-            <a:pPr indent="0" marL="0">
+            <a:pPr marL="0" indent="0">
               <a:buNone/>
             </a:pPr>
             <a:r>
@@ -7248,13 +7321,20 @@
           </a:solidFill>
           <a:ln/>
           <a:effectLst>
-            <a:outerShdw sx="100000" sy="100000" kx="0" ky="0" algn="bl" rotWithShape="0" blurRad="101600" dist="38100" dir="8100000">
+            <a:outerShdw blurRad="101600" dist="38100" dir="8100000" algn="bl" rotWithShape="0">
               <a:srgbClr val="000000">
                 <a:alpha val="12000"/>
               </a:srgbClr>
             </a:outerShdw>
           </a:effectLst>
         </p:spPr>
+        <p:txBody>
+          <a:bodyPr/>
+          <a:lstStyle/>
+          <a:p>
+            <a:endParaRPr lang="en-US"/>
+          </a:p>
+        </p:txBody>
       </p:sp>
       <p:sp>
         <p:nvSpPr>
@@ -7277,7 +7357,7 @@
           <a:bodyPr wrap="square" lIns="0" tIns="0" rIns="0" bIns="0" rtlCol="0" anchor="ctr"/>
           <a:lstStyle/>
           <a:p>
-            <a:pPr indent="0" marL="0">
+            <a:pPr marL="0" indent="0">
               <a:buNone/>
             </a:pPr>
             <a:r>
@@ -7316,7 +7396,7 @@
           <a:bodyPr wrap="square" rtlCol="0" anchor="ctr"/>
           <a:lstStyle/>
           <a:p>
-            <a:pPr algn="ctr" indent="0" marL="0">
+            <a:pPr marL="0" indent="0" algn="ctr">
               <a:buNone/>
             </a:pPr>
             <a:r>
@@ -7350,6 +7430,7 @@
         <a:solidFill>
           <a:srgbClr val="F0F4F8"/>
         </a:solidFill>
+        <a:effectLst/>
       </p:bgPr>
     </p:bg>
     <p:spTree>
@@ -7385,6 +7466,13 @@
           </a:solidFill>
           <a:ln/>
         </p:spPr>
+        <p:txBody>
+          <a:bodyPr/>
+          <a:lstStyle/>
+          <a:p>
+            <a:endParaRPr lang="en-US"/>
+          </a:p>
+        </p:txBody>
       </p:sp>
       <p:sp>
         <p:nvSpPr>
@@ -7407,7 +7495,7 @@
           <a:bodyPr wrap="square" rtlCol="0" anchor="ctr"/>
           <a:lstStyle/>
           <a:p>
-            <a:pPr indent="0" marL="0">
+            <a:pPr marL="0" indent="0">
               <a:buNone/>
             </a:pPr>
             <a:r>
@@ -7441,15 +7529,27 @@
         </p:nvGraphicFramePr>
         <p:xfrm>
           <a:off x="457200" y="914400"/>
-          <a:ext cx="8229600" cy="914400"/>
+          <a:ext cx="8229600" cy="3803904"/>
         </p:xfrm>
         <a:graphic>
           <a:graphicData uri="http://schemas.openxmlformats.org/drawingml/2006/table">
             <a:tbl>
               <a:tblPr/>
               <a:tblGrid>
-                <a:gridCol w="2743200"/>
-                <a:gridCol w="5486400"/>
+                <a:gridCol w="2743200">
+                  <a:extLst>
+                    <a:ext uri="{9D8B030D-6E8A-4147-A177-3AD203B41FA5}">
+                      <a16:colId xmlns:a16="http://schemas.microsoft.com/office/drawing/2014/main" val="20000"/>
+                    </a:ext>
+                  </a:extLst>
+                </a:gridCol>
+                <a:gridCol w="5486400">
+                  <a:extLst>
+                    <a:ext uri="{9D8B030D-6E8A-4147-A177-3AD203B41FA5}">
+                      <a16:colId xmlns:a16="http://schemas.microsoft.com/office/drawing/2014/main" val="20001"/>
+                    </a:ext>
+                  </a:extLst>
+                </a:gridCol>
               </a:tblGrid>
               <a:tr h="292608">
                 <a:tc>
@@ -7457,7 +7557,7 @@
                     <a:bodyPr/>
                     <a:lstStyle/>
                     <a:p>
-                      <a:pPr indent="0" marL="0">
+                      <a:pPr marL="0" indent="0">
                         <a:buNone/>
                       </a:pPr>
                       <a:r>
@@ -7478,7 +7578,7 @@
                       </a:endParaRPr>
                     </a:p>
                   </a:txBody>
-                  <a:tcPr marL="91440" marR="91440" marT="45720" marB="45720">
+                  <a:tcPr>
                     <a:lnL w="6350" cap="flat" cmpd="sng" algn="ctr">
                       <a:solidFill>
                         <a:srgbClr val="E8EDF2"/>
@@ -7525,7 +7625,7 @@
                     <a:bodyPr/>
                     <a:lstStyle/>
                     <a:p>
-                      <a:pPr indent="0" marL="0">
+                      <a:pPr marL="0" indent="0">
                         <a:buNone/>
                       </a:pPr>
                       <a:r>
@@ -7546,7 +7646,7 @@
                       </a:endParaRPr>
                     </a:p>
                   </a:txBody>
-                  <a:tcPr marL="91440" marR="91440" marT="45720" marB="45720">
+                  <a:tcPr>
                     <a:lnL w="6350" cap="flat" cmpd="sng" algn="ctr">
                       <a:solidFill>
                         <a:srgbClr val="E8EDF2"/>
@@ -7588,6 +7688,11 @@
                     </a:solidFill>
                   </a:tcPr>
                 </a:tc>
+                <a:extLst>
+                  <a:ext uri="{0D108BD9-81ED-4DB2-BD59-A6C34878D82A}">
+                    <a16:rowId xmlns:a16="http://schemas.microsoft.com/office/drawing/2014/main" val="10000"/>
+                  </a:ext>
+                </a:extLst>
               </a:tr>
               <a:tr h="292608">
                 <a:tc>
@@ -7595,7 +7700,7 @@
                     <a:bodyPr/>
                     <a:lstStyle/>
                     <a:p>
-                      <a:pPr indent="0" marL="0">
+                      <a:pPr marL="0" indent="0">
                         <a:buNone/>
                       </a:pPr>
                       <a:r>
@@ -7616,7 +7721,7 @@
                       </a:endParaRPr>
                     </a:p>
                   </a:txBody>
-                  <a:tcPr marL="91440" marR="91440" marT="45720" marB="45720">
+                  <a:tcPr>
                     <a:lnL w="6350" cap="flat" cmpd="sng" algn="ctr">
                       <a:solidFill>
                         <a:srgbClr val="E8EDF2"/>
@@ -7660,7 +7765,7 @@
                     <a:bodyPr/>
                     <a:lstStyle/>
                     <a:p>
-                      <a:pPr indent="0" marL="0">
+                      <a:pPr marL="0" indent="0">
                         <a:buNone/>
                       </a:pPr>
                       <a:r>
@@ -7681,7 +7786,7 @@
                       </a:endParaRPr>
                     </a:p>
                   </a:txBody>
-                  <a:tcPr marL="91440" marR="91440" marT="45720" marB="45720">
+                  <a:tcPr>
                     <a:lnL w="6350" cap="flat" cmpd="sng" algn="ctr">
                       <a:solidFill>
                         <a:srgbClr val="E8EDF2"/>
@@ -7720,6 +7825,11 @@
                     </a:lnB>
                   </a:tcPr>
                 </a:tc>
+                <a:extLst>
+                  <a:ext uri="{0D108BD9-81ED-4DB2-BD59-A6C34878D82A}">
+                    <a16:rowId xmlns:a16="http://schemas.microsoft.com/office/drawing/2014/main" val="10001"/>
+                  </a:ext>
+                </a:extLst>
               </a:tr>
               <a:tr h="292608">
                 <a:tc>
@@ -7727,7 +7837,7 @@
                     <a:bodyPr/>
                     <a:lstStyle/>
                     <a:p>
-                      <a:pPr indent="0" marL="0">
+                      <a:pPr marL="0" indent="0">
                         <a:buNone/>
                       </a:pPr>
                       <a:r>
@@ -7748,7 +7858,7 @@
                       </a:endParaRPr>
                     </a:p>
                   </a:txBody>
-                  <a:tcPr marL="91440" marR="91440" marT="45720" marB="45720">
+                  <a:tcPr>
                     <a:lnL w="6350" cap="flat" cmpd="sng" algn="ctr">
                       <a:solidFill>
                         <a:srgbClr val="E8EDF2"/>
@@ -7792,7 +7902,7 @@
                     <a:bodyPr/>
                     <a:lstStyle/>
                     <a:p>
-                      <a:pPr indent="0" marL="0">
+                      <a:pPr marL="0" indent="0">
                         <a:buNone/>
                       </a:pPr>
                       <a:r>
@@ -7813,7 +7923,7 @@
                       </a:endParaRPr>
                     </a:p>
                   </a:txBody>
-                  <a:tcPr marL="91440" marR="91440" marT="45720" marB="45720">
+                  <a:tcPr>
                     <a:lnL w="6350" cap="flat" cmpd="sng" algn="ctr">
                       <a:solidFill>
                         <a:srgbClr val="E8EDF2"/>
@@ -7852,6 +7962,11 @@
                     </a:lnB>
                   </a:tcPr>
                 </a:tc>
+                <a:extLst>
+                  <a:ext uri="{0D108BD9-81ED-4DB2-BD59-A6C34878D82A}">
+                    <a16:rowId xmlns:a16="http://schemas.microsoft.com/office/drawing/2014/main" val="10002"/>
+                  </a:ext>
+                </a:extLst>
               </a:tr>
               <a:tr h="292608">
                 <a:tc>
@@ -7859,7 +7974,7 @@
                     <a:bodyPr/>
                     <a:lstStyle/>
                     <a:p>
-                      <a:pPr indent="0" marL="0">
+                      <a:pPr marL="0" indent="0">
                         <a:buNone/>
                       </a:pPr>
                       <a:r>
@@ -7880,7 +7995,7 @@
                       </a:endParaRPr>
                     </a:p>
                   </a:txBody>
-                  <a:tcPr marL="91440" marR="91440" marT="45720" marB="45720">
+                  <a:tcPr>
                     <a:lnL w="6350" cap="flat" cmpd="sng" algn="ctr">
                       <a:solidFill>
                         <a:srgbClr val="E8EDF2"/>
@@ -7924,7 +8039,7 @@
                     <a:bodyPr/>
                     <a:lstStyle/>
                     <a:p>
-                      <a:pPr indent="0" marL="0">
+                      <a:pPr marL="0" indent="0">
                         <a:buNone/>
                       </a:pPr>
                       <a:r>
@@ -7945,7 +8060,7 @@
                       </a:endParaRPr>
                     </a:p>
                   </a:txBody>
-                  <a:tcPr marL="91440" marR="91440" marT="45720" marB="45720">
+                  <a:tcPr>
                     <a:lnL w="6350" cap="flat" cmpd="sng" algn="ctr">
                       <a:solidFill>
                         <a:srgbClr val="E8EDF2"/>
@@ -7984,6 +8099,11 @@
                     </a:lnB>
                   </a:tcPr>
                 </a:tc>
+                <a:extLst>
+                  <a:ext uri="{0D108BD9-81ED-4DB2-BD59-A6C34878D82A}">
+                    <a16:rowId xmlns:a16="http://schemas.microsoft.com/office/drawing/2014/main" val="10003"/>
+                  </a:ext>
+                </a:extLst>
               </a:tr>
               <a:tr h="292608">
                 <a:tc>
@@ -7991,7 +8111,7 @@
                     <a:bodyPr/>
                     <a:lstStyle/>
                     <a:p>
-                      <a:pPr indent="0" marL="0">
+                      <a:pPr marL="0" indent="0">
                         <a:buNone/>
                       </a:pPr>
                       <a:r>
@@ -8012,7 +8132,7 @@
                       </a:endParaRPr>
                     </a:p>
                   </a:txBody>
-                  <a:tcPr marL="91440" marR="91440" marT="45720" marB="45720">
+                  <a:tcPr>
                     <a:lnL w="6350" cap="flat" cmpd="sng" algn="ctr">
                       <a:solidFill>
                         <a:srgbClr val="E8EDF2"/>
@@ -8056,7 +8176,7 @@
                     <a:bodyPr/>
                     <a:lstStyle/>
                     <a:p>
-                      <a:pPr indent="0" marL="0">
+                      <a:pPr marL="0" indent="0">
                         <a:buNone/>
                       </a:pPr>
                       <a:r>
@@ -8077,7 +8197,7 @@
                       </a:endParaRPr>
                     </a:p>
                   </a:txBody>
-                  <a:tcPr marL="91440" marR="91440" marT="45720" marB="45720">
+                  <a:tcPr>
                     <a:lnL w="6350" cap="flat" cmpd="sng" algn="ctr">
                       <a:solidFill>
                         <a:srgbClr val="E8EDF2"/>
@@ -8116,6 +8236,11 @@
                     </a:lnB>
                   </a:tcPr>
                 </a:tc>
+                <a:extLst>
+                  <a:ext uri="{0D108BD9-81ED-4DB2-BD59-A6C34878D82A}">
+                    <a16:rowId xmlns:a16="http://schemas.microsoft.com/office/drawing/2014/main" val="10004"/>
+                  </a:ext>
+                </a:extLst>
               </a:tr>
               <a:tr h="292608">
                 <a:tc>
@@ -8123,7 +8248,7 @@
                     <a:bodyPr/>
                     <a:lstStyle/>
                     <a:p>
-                      <a:pPr indent="0" marL="0">
+                      <a:pPr marL="0" indent="0">
                         <a:buNone/>
                       </a:pPr>
                       <a:r>
@@ -8144,7 +8269,7 @@
                       </a:endParaRPr>
                     </a:p>
                   </a:txBody>
-                  <a:tcPr marL="91440" marR="91440" marT="45720" marB="45720">
+                  <a:tcPr>
                     <a:lnL w="6350" cap="flat" cmpd="sng" algn="ctr">
                       <a:solidFill>
                         <a:srgbClr val="E8EDF2"/>
@@ -8188,7 +8313,7 @@
                     <a:bodyPr/>
                     <a:lstStyle/>
                     <a:p>
-                      <a:pPr indent="0" marL="0">
+                      <a:pPr marL="0" indent="0">
                         <a:buNone/>
                       </a:pPr>
                       <a:r>
@@ -8209,7 +8334,7 @@
                       </a:endParaRPr>
                     </a:p>
                   </a:txBody>
-                  <a:tcPr marL="91440" marR="91440" marT="45720" marB="45720">
+                  <a:tcPr>
                     <a:lnL w="6350" cap="flat" cmpd="sng" algn="ctr">
                       <a:solidFill>
                         <a:srgbClr val="E8EDF2"/>
@@ -8248,6 +8373,11 @@
                     </a:lnB>
                   </a:tcPr>
                 </a:tc>
+                <a:extLst>
+                  <a:ext uri="{0D108BD9-81ED-4DB2-BD59-A6C34878D82A}">
+                    <a16:rowId xmlns:a16="http://schemas.microsoft.com/office/drawing/2014/main" val="10005"/>
+                  </a:ext>
+                </a:extLst>
               </a:tr>
               <a:tr h="292608">
                 <a:tc>
@@ -8255,7 +8385,7 @@
                     <a:bodyPr/>
                     <a:lstStyle/>
                     <a:p>
-                      <a:pPr indent="0" marL="0">
+                      <a:pPr marL="0" indent="0">
                         <a:buNone/>
                       </a:pPr>
                       <a:r>
@@ -8276,7 +8406,7 @@
                       </a:endParaRPr>
                     </a:p>
                   </a:txBody>
-                  <a:tcPr marL="91440" marR="91440" marT="45720" marB="45720">
+                  <a:tcPr>
                     <a:lnL w="6350" cap="flat" cmpd="sng" algn="ctr">
                       <a:solidFill>
                         <a:srgbClr val="E8EDF2"/>
@@ -8320,7 +8450,7 @@
                     <a:bodyPr/>
                     <a:lstStyle/>
                     <a:p>
-                      <a:pPr indent="0" marL="0">
+                      <a:pPr marL="0" indent="0">
                         <a:buNone/>
                       </a:pPr>
                       <a:r>
@@ -8341,7 +8471,7 @@
                       </a:endParaRPr>
                     </a:p>
                   </a:txBody>
-                  <a:tcPr marL="91440" marR="91440" marT="45720" marB="45720">
+                  <a:tcPr>
                     <a:lnL w="6350" cap="flat" cmpd="sng" algn="ctr">
                       <a:solidFill>
                         <a:srgbClr val="E8EDF2"/>
@@ -8380,6 +8510,11 @@
                     </a:lnB>
                   </a:tcPr>
                 </a:tc>
+                <a:extLst>
+                  <a:ext uri="{0D108BD9-81ED-4DB2-BD59-A6C34878D82A}">
+                    <a16:rowId xmlns:a16="http://schemas.microsoft.com/office/drawing/2014/main" val="10006"/>
+                  </a:ext>
+                </a:extLst>
               </a:tr>
               <a:tr h="292608">
                 <a:tc>
@@ -8387,7 +8522,7 @@
                     <a:bodyPr/>
                     <a:lstStyle/>
                     <a:p>
-                      <a:pPr indent="0" marL="0">
+                      <a:pPr marL="0" indent="0">
                         <a:buNone/>
                       </a:pPr>
                       <a:r>
@@ -8408,7 +8543,7 @@
                       </a:endParaRPr>
                     </a:p>
                   </a:txBody>
-                  <a:tcPr marL="91440" marR="91440" marT="45720" marB="45720">
+                  <a:tcPr>
                     <a:lnL w="6350" cap="flat" cmpd="sng" algn="ctr">
                       <a:solidFill>
                         <a:srgbClr val="E8EDF2"/>
@@ -8452,7 +8587,7 @@
                     <a:bodyPr/>
                     <a:lstStyle/>
                     <a:p>
-                      <a:pPr indent="0" marL="0">
+                      <a:pPr marL="0" indent="0">
                         <a:buNone/>
                       </a:pPr>
                       <a:r>
@@ -8473,7 +8608,7 @@
                       </a:endParaRPr>
                     </a:p>
                   </a:txBody>
-                  <a:tcPr marL="91440" marR="91440" marT="45720" marB="45720">
+                  <a:tcPr>
                     <a:lnL w="6350" cap="flat" cmpd="sng" algn="ctr">
                       <a:solidFill>
                         <a:srgbClr val="E8EDF2"/>
@@ -8512,6 +8647,11 @@
                     </a:lnB>
                   </a:tcPr>
                 </a:tc>
+                <a:extLst>
+                  <a:ext uri="{0D108BD9-81ED-4DB2-BD59-A6C34878D82A}">
+                    <a16:rowId xmlns:a16="http://schemas.microsoft.com/office/drawing/2014/main" val="10007"/>
+                  </a:ext>
+                </a:extLst>
               </a:tr>
               <a:tr h="292608">
                 <a:tc>
@@ -8519,7 +8659,7 @@
                     <a:bodyPr/>
                     <a:lstStyle/>
                     <a:p>
-                      <a:pPr indent="0" marL="0">
+                      <a:pPr marL="0" indent="0">
                         <a:buNone/>
                       </a:pPr>
                       <a:r>
@@ -8540,7 +8680,7 @@
                       </a:endParaRPr>
                     </a:p>
                   </a:txBody>
-                  <a:tcPr marL="91440" marR="91440" marT="45720" marB="45720">
+                  <a:tcPr>
                     <a:lnL w="6350" cap="flat" cmpd="sng" algn="ctr">
                       <a:solidFill>
                         <a:srgbClr val="E8EDF2"/>
@@ -8584,7 +8724,7 @@
                     <a:bodyPr/>
                     <a:lstStyle/>
                     <a:p>
-                      <a:pPr indent="0" marL="0">
+                      <a:pPr marL="0" indent="0">
                         <a:buNone/>
                       </a:pPr>
                       <a:r>
@@ -8605,7 +8745,7 @@
                       </a:endParaRPr>
                     </a:p>
                   </a:txBody>
-                  <a:tcPr marL="91440" marR="91440" marT="45720" marB="45720">
+                  <a:tcPr>
                     <a:lnL w="6350" cap="flat" cmpd="sng" algn="ctr">
                       <a:solidFill>
                         <a:srgbClr val="E8EDF2"/>
@@ -8644,6 +8784,11 @@
                     </a:lnB>
                   </a:tcPr>
                 </a:tc>
+                <a:extLst>
+                  <a:ext uri="{0D108BD9-81ED-4DB2-BD59-A6C34878D82A}">
+                    <a16:rowId xmlns:a16="http://schemas.microsoft.com/office/drawing/2014/main" val="10008"/>
+                  </a:ext>
+                </a:extLst>
               </a:tr>
               <a:tr h="292608">
                 <a:tc>
@@ -8651,7 +8796,7 @@
                     <a:bodyPr/>
                     <a:lstStyle/>
                     <a:p>
-                      <a:pPr indent="0" marL="0">
+                      <a:pPr marL="0" indent="0">
                         <a:buNone/>
                       </a:pPr>
                       <a:r>
@@ -8672,7 +8817,7 @@
                       </a:endParaRPr>
                     </a:p>
                   </a:txBody>
-                  <a:tcPr marL="91440" marR="91440" marT="45720" marB="45720">
+                  <a:tcPr>
                     <a:lnL w="6350" cap="flat" cmpd="sng" algn="ctr">
                       <a:solidFill>
                         <a:srgbClr val="E8EDF2"/>
@@ -8716,7 +8861,7 @@
                     <a:bodyPr/>
                     <a:lstStyle/>
                     <a:p>
-                      <a:pPr indent="0" marL="0">
+                      <a:pPr marL="0" indent="0">
                         <a:buNone/>
                       </a:pPr>
                       <a:r>
@@ -8737,7 +8882,7 @@
                       </a:endParaRPr>
                     </a:p>
                   </a:txBody>
-                  <a:tcPr marL="91440" marR="91440" marT="45720" marB="45720">
+                  <a:tcPr>
                     <a:lnL w="6350" cap="flat" cmpd="sng" algn="ctr">
                       <a:solidFill>
                         <a:srgbClr val="E8EDF2"/>
@@ -8776,6 +8921,11 @@
                     </a:lnB>
                   </a:tcPr>
                 </a:tc>
+                <a:extLst>
+                  <a:ext uri="{0D108BD9-81ED-4DB2-BD59-A6C34878D82A}">
+                    <a16:rowId xmlns:a16="http://schemas.microsoft.com/office/drawing/2014/main" val="10009"/>
+                  </a:ext>
+                </a:extLst>
               </a:tr>
               <a:tr h="292608">
                 <a:tc>
@@ -8783,7 +8933,7 @@
                     <a:bodyPr/>
                     <a:lstStyle/>
                     <a:p>
-                      <a:pPr indent="0" marL="0">
+                      <a:pPr marL="0" indent="0">
                         <a:buNone/>
                       </a:pPr>
                       <a:r>
@@ -8804,7 +8954,7 @@
                       </a:endParaRPr>
                     </a:p>
                   </a:txBody>
-                  <a:tcPr marL="91440" marR="91440" marT="45720" marB="45720">
+                  <a:tcPr>
                     <a:lnL w="6350" cap="flat" cmpd="sng" algn="ctr">
                       <a:solidFill>
                         <a:srgbClr val="E8EDF2"/>
@@ -8848,7 +8998,7 @@
                     <a:bodyPr/>
                     <a:lstStyle/>
                     <a:p>
-                      <a:pPr indent="0" marL="0">
+                      <a:pPr marL="0" indent="0">
                         <a:buNone/>
                       </a:pPr>
                       <a:r>
@@ -8869,7 +9019,7 @@
                       </a:endParaRPr>
                     </a:p>
                   </a:txBody>
-                  <a:tcPr marL="91440" marR="91440" marT="45720" marB="45720">
+                  <a:tcPr>
                     <a:lnL w="6350" cap="flat" cmpd="sng" algn="ctr">
                       <a:solidFill>
                         <a:srgbClr val="E8EDF2"/>
@@ -8908,6 +9058,11 @@
                     </a:lnB>
                   </a:tcPr>
                 </a:tc>
+                <a:extLst>
+                  <a:ext uri="{0D108BD9-81ED-4DB2-BD59-A6C34878D82A}">
+                    <a16:rowId xmlns:a16="http://schemas.microsoft.com/office/drawing/2014/main" val="10010"/>
+                  </a:ext>
+                </a:extLst>
               </a:tr>
               <a:tr h="292608">
                 <a:tc>
@@ -8915,7 +9070,7 @@
                     <a:bodyPr/>
                     <a:lstStyle/>
                     <a:p>
-                      <a:pPr indent="0" marL="0">
+                      <a:pPr marL="0" indent="0">
                         <a:buNone/>
                       </a:pPr>
                       <a:r>
@@ -8936,7 +9091,7 @@
                       </a:endParaRPr>
                     </a:p>
                   </a:txBody>
-                  <a:tcPr marL="91440" marR="91440" marT="45720" marB="45720">
+                  <a:tcPr>
                     <a:lnL w="6350" cap="flat" cmpd="sng" algn="ctr">
                       <a:solidFill>
                         <a:srgbClr val="E8EDF2"/>
@@ -8980,7 +9135,7 @@
                     <a:bodyPr/>
                     <a:lstStyle/>
                     <a:p>
-                      <a:pPr indent="0" marL="0">
+                      <a:pPr marL="0" indent="0">
                         <a:buNone/>
                       </a:pPr>
                       <a:r>
@@ -9001,7 +9156,7 @@
                       </a:endParaRPr>
                     </a:p>
                   </a:txBody>
-                  <a:tcPr marL="91440" marR="91440" marT="45720" marB="45720">
+                  <a:tcPr>
                     <a:lnL w="6350" cap="flat" cmpd="sng" algn="ctr">
                       <a:solidFill>
                         <a:srgbClr val="E8EDF2"/>
@@ -9040,6 +9195,11 @@
                     </a:lnB>
                   </a:tcPr>
                 </a:tc>
+                <a:extLst>
+                  <a:ext uri="{0D108BD9-81ED-4DB2-BD59-A6C34878D82A}">
+                    <a16:rowId xmlns:a16="http://schemas.microsoft.com/office/drawing/2014/main" val="10011"/>
+                  </a:ext>
+                </a:extLst>
               </a:tr>
               <a:tr h="292608">
                 <a:tc>
@@ -9047,7 +9207,7 @@
                     <a:bodyPr/>
                     <a:lstStyle/>
                     <a:p>
-                      <a:pPr indent="0" marL="0">
+                      <a:pPr marL="0" indent="0">
                         <a:buNone/>
                       </a:pPr>
                       <a:r>
@@ -9068,7 +9228,7 @@
                       </a:endParaRPr>
                     </a:p>
                   </a:txBody>
-                  <a:tcPr marL="91440" marR="91440" marT="45720" marB="45720">
+                  <a:tcPr>
                     <a:lnL w="6350" cap="flat" cmpd="sng" algn="ctr">
                       <a:solidFill>
                         <a:srgbClr val="E8EDF2"/>
@@ -9112,7 +9272,7 @@
                     <a:bodyPr/>
                     <a:lstStyle/>
                     <a:p>
-                      <a:pPr indent="0" marL="0">
+                      <a:pPr marL="0" indent="0">
                         <a:buNone/>
                       </a:pPr>
                       <a:r>
@@ -9133,7 +9293,7 @@
                       </a:endParaRPr>
                     </a:p>
                   </a:txBody>
-                  <a:tcPr marL="91440" marR="91440" marT="45720" marB="45720">
+                  <a:tcPr>
                     <a:lnL w="6350" cap="flat" cmpd="sng" algn="ctr">
                       <a:solidFill>
                         <a:srgbClr val="E8EDF2"/>
@@ -9172,6 +9332,11 @@
                     </a:lnB>
                   </a:tcPr>
                 </a:tc>
+                <a:extLst>
+                  <a:ext uri="{0D108BD9-81ED-4DB2-BD59-A6C34878D82A}">
+                    <a16:rowId xmlns:a16="http://schemas.microsoft.com/office/drawing/2014/main" val="10012"/>
+                  </a:ext>
+                </a:extLst>
               </a:tr>
             </a:tbl>
           </a:graphicData>
@@ -9198,7 +9363,7 @@
           <a:bodyPr wrap="square" rtlCol="0" anchor="ctr"/>
           <a:lstStyle/>
           <a:p>
-            <a:pPr indent="0" marL="0">
+            <a:pPr marL="0" indent="0">
               <a:buNone/>
             </a:pPr>
             <a:r>
@@ -9232,6 +9397,7 @@
         <a:solidFill>
           <a:srgbClr val="1E2761"/>
         </a:solidFill>
+        <a:effectLst/>
       </p:bgPr>
     </p:bg>
     <p:spTree>
@@ -9267,6 +9433,13 @@
           </a:solidFill>
           <a:ln/>
         </p:spPr>
+        <p:txBody>
+          <a:bodyPr/>
+          <a:lstStyle/>
+          <a:p>
+            <a:endParaRPr lang="en-US"/>
+          </a:p>
+        </p:txBody>
       </p:sp>
       <p:sp>
         <p:nvSpPr>
@@ -9289,7 +9462,7 @@
           <a:bodyPr wrap="square" rtlCol="0" anchor="ctr"/>
           <a:lstStyle/>
           <a:p>
-            <a:pPr indent="0" marL="0">
+            <a:pPr marL="0" indent="0">
               <a:buNone/>
             </a:pPr>
             <a:r>
@@ -9326,13 +9499,20 @@
           </a:solidFill>
           <a:ln/>
           <a:effectLst>
-            <a:outerShdw sx="100000" sy="100000" kx="0" ky="0" algn="bl" rotWithShape="0" blurRad="101600" dist="38100" dir="8100000">
+            <a:outerShdw blurRad="101600" dist="38100" dir="8100000" algn="bl" rotWithShape="0">
               <a:srgbClr val="000000">
                 <a:alpha val="12000"/>
               </a:srgbClr>
             </a:outerShdw>
           </a:effectLst>
         </p:spPr>
+        <p:txBody>
+          <a:bodyPr/>
+          <a:lstStyle/>
+          <a:p>
+            <a:endParaRPr lang="en-US"/>
+          </a:p>
+        </p:txBody>
       </p:sp>
       <p:sp>
         <p:nvSpPr>
@@ -9353,6 +9533,13 @@
           </a:solidFill>
           <a:ln/>
         </p:spPr>
+        <p:txBody>
+          <a:bodyPr/>
+          <a:lstStyle/>
+          <a:p>
+            <a:endParaRPr lang="en-US"/>
+          </a:p>
+        </p:txBody>
       </p:sp>
       <p:sp>
         <p:nvSpPr>
@@ -9375,7 +9562,7 @@
           <a:bodyPr wrap="square" lIns="0" tIns="0" rIns="0" bIns="0" rtlCol="0" anchor="ctr"/>
           <a:lstStyle/>
           <a:p>
-            <a:pPr indent="0" marL="0">
+            <a:pPr marL="0" indent="0">
               <a:buNone/>
             </a:pPr>
             <a:r>
@@ -9414,7 +9601,7 @@
           <a:bodyPr wrap="square" lIns="0" tIns="0" rIns="0" bIns="0" rtlCol="0" anchor="ctr"/>
           <a:lstStyle/>
           <a:p>
-            <a:pPr indent="0" marL="0">
+            <a:pPr marL="0" indent="0">
               <a:buNone/>
             </a:pPr>
             <a:r>
@@ -9431,7 +9618,7 @@
             <a:endParaRPr lang="en-US" sz="1000" dirty="0"/>
           </a:p>
           <a:p>
-            <a:pPr indent="0" marL="0">
+            <a:pPr marL="0" indent="0">
               <a:buNone/>
             </a:pPr>
             <a:r>
@@ -9448,7 +9635,7 @@
             <a:endParaRPr lang="en-US" sz="1000" dirty="0"/>
           </a:p>
           <a:p>
-            <a:pPr indent="0" marL="0">
+            <a:pPr marL="0" indent="0">
               <a:buNone/>
             </a:pPr>
             <a:r>
@@ -9485,13 +9672,20 @@
           </a:solidFill>
           <a:ln/>
           <a:effectLst>
-            <a:outerShdw sx="100000" sy="100000" kx="0" ky="0" algn="bl" rotWithShape="0" blurRad="101600" dist="38100" dir="8100000">
+            <a:outerShdw blurRad="101600" dist="38100" dir="8100000" algn="bl" rotWithShape="0">
               <a:srgbClr val="000000">
                 <a:alpha val="12000"/>
               </a:srgbClr>
             </a:outerShdw>
           </a:effectLst>
         </p:spPr>
+        <p:txBody>
+          <a:bodyPr/>
+          <a:lstStyle/>
+          <a:p>
+            <a:endParaRPr lang="en-US"/>
+          </a:p>
+        </p:txBody>
       </p:sp>
       <p:sp>
         <p:nvSpPr>
@@ -9512,6 +9706,13 @@
           </a:solidFill>
           <a:ln/>
         </p:spPr>
+        <p:txBody>
+          <a:bodyPr/>
+          <a:lstStyle/>
+          <a:p>
+            <a:endParaRPr lang="en-US"/>
+          </a:p>
+        </p:txBody>
       </p:sp>
       <p:sp>
         <p:nvSpPr>
@@ -9534,7 +9735,7 @@
           <a:bodyPr wrap="square" lIns="0" tIns="0" rIns="0" bIns="0" rtlCol="0" anchor="ctr"/>
           <a:lstStyle/>
           <a:p>
-            <a:pPr indent="0" marL="0">
+            <a:pPr marL="0" indent="0">
               <a:buNone/>
             </a:pPr>
             <a:r>
@@ -9573,7 +9774,7 @@
           <a:bodyPr wrap="square" lIns="0" tIns="0" rIns="0" bIns="0" rtlCol="0" anchor="ctr"/>
           <a:lstStyle/>
           <a:p>
-            <a:pPr indent="0" marL="0">
+            <a:pPr marL="0" indent="0">
               <a:buNone/>
             </a:pPr>
             <a:r>
@@ -9590,7 +9791,7 @@
             <a:endParaRPr lang="en-US" sz="1000" dirty="0"/>
           </a:p>
           <a:p>
-            <a:pPr indent="0" marL="0">
+            <a:pPr marL="0" indent="0">
               <a:buNone/>
             </a:pPr>
             <a:r>
@@ -9607,7 +9808,7 @@
             <a:endParaRPr lang="en-US" sz="1000" dirty="0"/>
           </a:p>
           <a:p>
-            <a:pPr indent="0" marL="0">
+            <a:pPr marL="0" indent="0">
               <a:buNone/>
             </a:pPr>
             <a:r>
@@ -9624,7 +9825,7 @@
             <a:endParaRPr lang="en-US" sz="1000" dirty="0"/>
           </a:p>
           <a:p>
-            <a:pPr indent="0" marL="0">
+            <a:pPr marL="0" indent="0">
               <a:buNone/>
             </a:pPr>
             <a:r>
@@ -9661,13 +9862,20 @@
           </a:solidFill>
           <a:ln/>
           <a:effectLst>
-            <a:outerShdw sx="100000" sy="100000" kx="0" ky="0" algn="bl" rotWithShape="0" blurRad="101600" dist="38100" dir="8100000">
+            <a:outerShdw blurRad="101600" dist="38100" dir="8100000" algn="bl" rotWithShape="0">
               <a:srgbClr val="000000">
                 <a:alpha val="12000"/>
               </a:srgbClr>
             </a:outerShdw>
           </a:effectLst>
         </p:spPr>
+        <p:txBody>
+          <a:bodyPr/>
+          <a:lstStyle/>
+          <a:p>
+            <a:endParaRPr lang="en-US"/>
+          </a:p>
+        </p:txBody>
       </p:sp>
       <p:sp>
         <p:nvSpPr>
@@ -9688,6 +9896,13 @@
           </a:solidFill>
           <a:ln/>
         </p:spPr>
+        <p:txBody>
+          <a:bodyPr/>
+          <a:lstStyle/>
+          <a:p>
+            <a:endParaRPr lang="en-US"/>
+          </a:p>
+        </p:txBody>
       </p:sp>
       <p:sp>
         <p:nvSpPr>
@@ -9710,7 +9925,7 @@
           <a:bodyPr wrap="square" lIns="0" tIns="0" rIns="0" bIns="0" rtlCol="0" anchor="ctr"/>
           <a:lstStyle/>
           <a:p>
-            <a:pPr indent="0" marL="0">
+            <a:pPr marL="0" indent="0">
               <a:buNone/>
             </a:pPr>
             <a:r>
@@ -9749,7 +9964,7 @@
           <a:bodyPr wrap="square" lIns="0" tIns="0" rIns="0" bIns="0" rtlCol="0" anchor="ctr"/>
           <a:lstStyle/>
           <a:p>
-            <a:pPr indent="0" marL="0">
+            <a:pPr marL="0" indent="0">
               <a:buNone/>
             </a:pPr>
             <a:r>
@@ -9766,7 +9981,7 @@
             <a:endParaRPr lang="en-US" sz="1000" dirty="0"/>
           </a:p>
           <a:p>
-            <a:pPr indent="0" marL="0">
+            <a:pPr marL="0" indent="0">
               <a:buNone/>
             </a:pPr>
             <a:r>
@@ -9783,7 +9998,7 @@
             <a:endParaRPr lang="en-US" sz="1000" dirty="0"/>
           </a:p>
           <a:p>
-            <a:pPr indent="0" marL="0">
+            <a:pPr marL="0" indent="0">
               <a:buNone/>
             </a:pPr>
             <a:r>
@@ -9800,7 +10015,7 @@
             <a:endParaRPr lang="en-US" sz="1000" dirty="0"/>
           </a:p>
           <a:p>
-            <a:pPr indent="0" marL="0">
+            <a:pPr marL="0" indent="0">
               <a:buNone/>
             </a:pPr>
             <a:r>
@@ -9837,13 +10052,20 @@
           </a:solidFill>
           <a:ln/>
           <a:effectLst>
-            <a:outerShdw sx="100000" sy="100000" kx="0" ky="0" algn="bl" rotWithShape="0" blurRad="101600" dist="38100" dir="8100000">
+            <a:outerShdw blurRad="101600" dist="38100" dir="8100000" algn="bl" rotWithShape="0">
               <a:srgbClr val="000000">
                 <a:alpha val="12000"/>
               </a:srgbClr>
             </a:outerShdw>
           </a:effectLst>
         </p:spPr>
+        <p:txBody>
+          <a:bodyPr/>
+          <a:lstStyle/>
+          <a:p>
+            <a:endParaRPr lang="en-US"/>
+          </a:p>
+        </p:txBody>
       </p:sp>
       <p:sp>
         <p:nvSpPr>
@@ -9864,6 +10086,13 @@
           </a:solidFill>
           <a:ln/>
         </p:spPr>
+        <p:txBody>
+          <a:bodyPr/>
+          <a:lstStyle/>
+          <a:p>
+            <a:endParaRPr lang="en-US"/>
+          </a:p>
+        </p:txBody>
       </p:sp>
       <p:sp>
         <p:nvSpPr>
@@ -9886,7 +10115,7 @@
           <a:bodyPr wrap="square" lIns="0" tIns="0" rIns="0" bIns="0" rtlCol="0" anchor="ctr"/>
           <a:lstStyle/>
           <a:p>
-            <a:pPr indent="0" marL="0">
+            <a:pPr marL="0" indent="0">
               <a:buNone/>
             </a:pPr>
             <a:r>
@@ -9925,7 +10154,7 @@
           <a:bodyPr wrap="square" lIns="0" tIns="0" rIns="0" bIns="0" rtlCol="0" anchor="ctr"/>
           <a:lstStyle/>
           <a:p>
-            <a:pPr indent="0" marL="0">
+            <a:pPr marL="0" indent="0">
               <a:buNone/>
             </a:pPr>
             <a:r>
@@ -9942,7 +10171,7 @@
             <a:endParaRPr lang="en-US" sz="1000" dirty="0"/>
           </a:p>
           <a:p>
-            <a:pPr indent="0" marL="0">
+            <a:pPr marL="0" indent="0">
               <a:buNone/>
             </a:pPr>
             <a:r>
@@ -9959,7 +10188,7 @@
             <a:endParaRPr lang="en-US" sz="1000" dirty="0"/>
           </a:p>
           <a:p>
-            <a:pPr indent="0" marL="0">
+            <a:pPr marL="0" indent="0">
               <a:buNone/>
             </a:pPr>
             <a:r>
@@ -9993,6 +10222,7 @@
         <a:solidFill>
           <a:srgbClr val="1E2761"/>
         </a:solidFill>
+        <a:effectLst/>
       </p:bgPr>
     </p:bg>
     <p:spTree>
@@ -10028,6 +10258,13 @@
           </a:solidFill>
           <a:ln/>
         </p:spPr>
+        <p:txBody>
+          <a:bodyPr/>
+          <a:lstStyle/>
+          <a:p>
+            <a:endParaRPr lang="en-US"/>
+          </a:p>
+        </p:txBody>
       </p:sp>
       <p:sp>
         <p:nvSpPr>
@@ -10050,7 +10287,7 @@
           <a:bodyPr wrap="square" rtlCol="0" anchor="ctr"/>
           <a:lstStyle/>
           <a:p>
-            <a:pPr indent="0" marL="0">
+            <a:pPr marL="0" indent="0">
               <a:buNone/>
             </a:pPr>
             <a:r>
@@ -10087,6 +10324,13 @@
           </a:solidFill>
           <a:ln/>
         </p:spPr>
+        <p:txBody>
+          <a:bodyPr/>
+          <a:lstStyle/>
+          <a:p>
+            <a:endParaRPr lang="en-US"/>
+          </a:p>
+        </p:txBody>
       </p:sp>
       <p:sp>
         <p:nvSpPr>
@@ -10109,7 +10353,7 @@
           <a:bodyPr wrap="square" lIns="0" tIns="0" rIns="0" bIns="0" rtlCol="0" anchor="ctr"/>
           <a:lstStyle/>
           <a:p>
-            <a:pPr indent="0" marL="0">
+            <a:pPr marL="0" indent="0">
               <a:buNone/>
             </a:pPr>
             <a:r>
@@ -10148,7 +10392,7 @@
           <a:bodyPr wrap="square" lIns="0" tIns="0" rIns="0" bIns="0" rtlCol="0" anchor="ctr"/>
           <a:lstStyle/>
           <a:p>
-            <a:pPr indent="0" marL="0">
+            <a:pPr marL="0" indent="0">
               <a:buNone/>
             </a:pPr>
             <a:r>
@@ -10168,13 +10412,13 @@
       </p:sp>
       <p:sp>
         <p:nvSpPr>
-          <p:cNvPr id="7" name="Shape 5"/>
-          <p:cNvSpPr/>
-          <p:nvPr/>
-        </p:nvSpPr>
-        <p:spPr>
-          <a:xfrm>
-            <a:off x="731520" y="1563624"/>
+          <p:cNvPr id="10" name="Shape 8"/>
+          <p:cNvSpPr/>
+          <p:nvPr/>
+        </p:nvSpPr>
+        <p:spPr>
+          <a:xfrm>
+            <a:off x="731520" y="1490472"/>
             <a:ext cx="7680960" cy="384048"/>
           </a:xfrm>
           <a:prstGeom prst="rect">
@@ -10185,16 +10429,23 @@
           </a:solidFill>
           <a:ln/>
         </p:spPr>
-      </p:sp>
-      <p:sp>
-        <p:nvSpPr>
-          <p:cNvPr id="8" name="Text 6"/>
-          <p:cNvSpPr/>
-          <p:nvPr/>
-        </p:nvSpPr>
-        <p:spPr>
-          <a:xfrm>
-            <a:off x="914400" y="1563624"/>
+        <p:txBody>
+          <a:bodyPr/>
+          <a:lstStyle/>
+          <a:p>
+            <a:endParaRPr lang="en-US"/>
+          </a:p>
+        </p:txBody>
+      </p:sp>
+      <p:sp>
+        <p:nvSpPr>
+          <p:cNvPr id="11" name="Text 9"/>
+          <p:cNvSpPr/>
+          <p:nvPr/>
+        </p:nvSpPr>
+        <p:spPr>
+          <a:xfrm>
+            <a:off x="914400" y="1490472"/>
             <a:ext cx="4114800" cy="384048"/>
           </a:xfrm>
           <a:prstGeom prst="rect">
@@ -10207,7 +10458,7 @@
           <a:bodyPr wrap="square" lIns="0" tIns="0" rIns="0" bIns="0" rtlCol="0" anchor="ctr"/>
           <a:lstStyle/>
           <a:p>
-            <a:pPr indent="0" marL="0">
+            <a:pPr marL="0" indent="0">
               <a:buNone/>
             </a:pPr>
             <a:r>
@@ -10219,7 +10470,7 @@
                 <a:ea typeface="Consolas" pitchFamily="34" charset="-122"/>
                 <a:cs typeface="Consolas" pitchFamily="34" charset="-120"/>
               </a:rPr>
-              <a:t>anthropic.com/download</a:t>
+              <a:t>docs.claude.com</a:t>
             </a:r>
             <a:endParaRPr lang="en-US" sz="1200" dirty="0"/>
           </a:p>
@@ -10227,13 +10478,13 @@
       </p:sp>
       <p:sp>
         <p:nvSpPr>
-          <p:cNvPr id="9" name="Text 7"/>
-          <p:cNvSpPr/>
-          <p:nvPr/>
-        </p:nvSpPr>
-        <p:spPr>
-          <a:xfrm>
-            <a:off x="5029200" y="1563624"/>
+          <p:cNvPr id="12" name="Text 10"/>
+          <p:cNvSpPr/>
+          <p:nvPr/>
+        </p:nvSpPr>
+        <p:spPr>
+          <a:xfrm>
+            <a:off x="5029200" y="1490472"/>
             <a:ext cx="3200400" cy="384048"/>
           </a:xfrm>
           <a:prstGeom prst="rect">
@@ -10246,7 +10497,7 @@
           <a:bodyPr wrap="square" lIns="0" tIns="0" rIns="0" bIns="0" rtlCol="0" anchor="ctr"/>
           <a:lstStyle/>
           <a:p>
-            <a:pPr indent="0" marL="0">
+            <a:pPr marL="0" indent="0">
               <a:buNone/>
             </a:pPr>
             <a:r>
@@ -10258,7 +10509,7 @@
                 <a:ea typeface="Calibri" pitchFamily="34" charset="-122"/>
                 <a:cs typeface="Calibri" pitchFamily="34" charset="-120"/>
               </a:rPr>
-              <a:t>Desktop download</a:t>
+              <a:t>Full documentation</a:t>
             </a:r>
             <a:endParaRPr lang="en-US" sz="1200" dirty="0"/>
           </a:p>
@@ -10266,13 +10517,13 @@
       </p:sp>
       <p:sp>
         <p:nvSpPr>
-          <p:cNvPr id="10" name="Shape 8"/>
-          <p:cNvSpPr/>
-          <p:nvPr/>
-        </p:nvSpPr>
-        <p:spPr>
-          <a:xfrm>
-            <a:off x="731520" y="2075688"/>
+          <p:cNvPr id="13" name="Shape 11"/>
+          <p:cNvSpPr/>
+          <p:nvPr/>
+        </p:nvSpPr>
+        <p:spPr>
+          <a:xfrm>
+            <a:off x="731520" y="2002536"/>
             <a:ext cx="7680960" cy="384048"/>
           </a:xfrm>
           <a:prstGeom prst="rect">
@@ -10283,16 +10534,23 @@
           </a:solidFill>
           <a:ln/>
         </p:spPr>
-      </p:sp>
-      <p:sp>
-        <p:nvSpPr>
-          <p:cNvPr id="11" name="Text 9"/>
-          <p:cNvSpPr/>
-          <p:nvPr/>
-        </p:nvSpPr>
-        <p:spPr>
-          <a:xfrm>
-            <a:off x="914400" y="2075688"/>
+        <p:txBody>
+          <a:bodyPr/>
+          <a:lstStyle/>
+          <a:p>
+            <a:endParaRPr lang="en-US"/>
+          </a:p>
+        </p:txBody>
+      </p:sp>
+      <p:sp>
+        <p:nvSpPr>
+          <p:cNvPr id="14" name="Text 12"/>
+          <p:cNvSpPr/>
+          <p:nvPr/>
+        </p:nvSpPr>
+        <p:spPr>
+          <a:xfrm>
+            <a:off x="914400" y="2002536"/>
             <a:ext cx="4114800" cy="384048"/>
           </a:xfrm>
           <a:prstGeom prst="rect">
@@ -10305,7 +10563,7 @@
           <a:bodyPr wrap="square" lIns="0" tIns="0" rIns="0" bIns="0" rtlCol="0" anchor="ctr"/>
           <a:lstStyle/>
           <a:p>
-            <a:pPr indent="0" marL="0">
+            <a:pPr marL="0" indent="0">
               <a:buNone/>
             </a:pPr>
             <a:r>
@@ -10317,7 +10575,7 @@
                 <a:ea typeface="Consolas" pitchFamily="34" charset="-122"/>
                 <a:cs typeface="Consolas" pitchFamily="34" charset="-120"/>
               </a:rPr>
-              <a:t>docs.claude.com</a:t>
+              <a:t>claude.ai/settings/connectors</a:t>
             </a:r>
             <a:endParaRPr lang="en-US" sz="1200" dirty="0"/>
           </a:p>
@@ -10325,13 +10583,13 @@
       </p:sp>
       <p:sp>
         <p:nvSpPr>
-          <p:cNvPr id="12" name="Text 10"/>
-          <p:cNvSpPr/>
-          <p:nvPr/>
-        </p:nvSpPr>
-        <p:spPr>
-          <a:xfrm>
-            <a:off x="5029200" y="2075688"/>
+          <p:cNvPr id="15" name="Text 13"/>
+          <p:cNvSpPr/>
+          <p:nvPr/>
+        </p:nvSpPr>
+        <p:spPr>
+          <a:xfrm>
+            <a:off x="5029200" y="2002536"/>
             <a:ext cx="3200400" cy="384048"/>
           </a:xfrm>
           <a:prstGeom prst="rect">
@@ -10344,7 +10602,7 @@
           <a:bodyPr wrap="square" lIns="0" tIns="0" rIns="0" bIns="0" rtlCol="0" anchor="ctr"/>
           <a:lstStyle/>
           <a:p>
-            <a:pPr indent="0" marL="0">
+            <a:pPr marL="0" indent="0">
               <a:buNone/>
             </a:pPr>
             <a:r>
@@ -10356,7 +10614,7 @@
                 <a:ea typeface="Calibri" pitchFamily="34" charset="-122"/>
                 <a:cs typeface="Calibri" pitchFamily="34" charset="-120"/>
               </a:rPr>
-              <a:t>Full documentation</a:t>
+              <a:t>Connectors directory</a:t>
             </a:r>
             <a:endParaRPr lang="en-US" sz="1200" dirty="0"/>
           </a:p>
@@ -10364,13 +10622,13 @@
       </p:sp>
       <p:sp>
         <p:nvSpPr>
-          <p:cNvPr id="13" name="Shape 11"/>
-          <p:cNvSpPr/>
-          <p:nvPr/>
-        </p:nvSpPr>
-        <p:spPr>
-          <a:xfrm>
-            <a:off x="731520" y="2587752"/>
+          <p:cNvPr id="16" name="Shape 14"/>
+          <p:cNvSpPr/>
+          <p:nvPr/>
+        </p:nvSpPr>
+        <p:spPr>
+          <a:xfrm>
+            <a:off x="731520" y="2514600"/>
             <a:ext cx="7680960" cy="384048"/>
           </a:xfrm>
           <a:prstGeom prst="rect">
@@ -10381,16 +10639,23 @@
           </a:solidFill>
           <a:ln/>
         </p:spPr>
-      </p:sp>
-      <p:sp>
-        <p:nvSpPr>
-          <p:cNvPr id="14" name="Text 12"/>
-          <p:cNvSpPr/>
-          <p:nvPr/>
-        </p:nvSpPr>
-        <p:spPr>
-          <a:xfrm>
-            <a:off x="914400" y="2587752"/>
+        <p:txBody>
+          <a:bodyPr/>
+          <a:lstStyle/>
+          <a:p>
+            <a:endParaRPr lang="en-US"/>
+          </a:p>
+        </p:txBody>
+      </p:sp>
+      <p:sp>
+        <p:nvSpPr>
+          <p:cNvPr id="17" name="Text 15"/>
+          <p:cNvSpPr/>
+          <p:nvPr/>
+        </p:nvSpPr>
+        <p:spPr>
+          <a:xfrm>
+            <a:off x="914400" y="2514600"/>
             <a:ext cx="4114800" cy="384048"/>
           </a:xfrm>
           <a:prstGeom prst="rect">
@@ -10403,7 +10668,7 @@
           <a:bodyPr wrap="square" lIns="0" tIns="0" rIns="0" bIns="0" rtlCol="0" anchor="ctr"/>
           <a:lstStyle/>
           <a:p>
-            <a:pPr indent="0" marL="0">
+            <a:pPr marL="0" indent="0">
               <a:buNone/>
             </a:pPr>
             <a:r>
@@ -10415,7 +10680,7 @@
                 <a:ea typeface="Consolas" pitchFamily="34" charset="-122"/>
                 <a:cs typeface="Consolas" pitchFamily="34" charset="-120"/>
               </a:rPr>
-              <a:t>claude.ai/settings/connectors</a:t>
+              <a:t>support.claude.com</a:t>
             </a:r>
             <a:endParaRPr lang="en-US" sz="1200" dirty="0"/>
           </a:p>
@@ -10423,13 +10688,13 @@
       </p:sp>
       <p:sp>
         <p:nvSpPr>
-          <p:cNvPr id="15" name="Text 13"/>
-          <p:cNvSpPr/>
-          <p:nvPr/>
-        </p:nvSpPr>
-        <p:spPr>
-          <a:xfrm>
-            <a:off x="5029200" y="2587752"/>
+          <p:cNvPr id="18" name="Text 16"/>
+          <p:cNvSpPr/>
+          <p:nvPr/>
+        </p:nvSpPr>
+        <p:spPr>
+          <a:xfrm>
+            <a:off x="5029200" y="2514600"/>
             <a:ext cx="3200400" cy="384048"/>
           </a:xfrm>
           <a:prstGeom prst="rect">
@@ -10442,7 +10707,7 @@
           <a:bodyPr wrap="square" lIns="0" tIns="0" rIns="0" bIns="0" rtlCol="0" anchor="ctr"/>
           <a:lstStyle/>
           <a:p>
-            <a:pPr indent="0" marL="0">
+            <a:pPr marL="0" indent="0">
               <a:buNone/>
             </a:pPr>
             <a:r>
@@ -10454,7 +10719,7 @@
                 <a:ea typeface="Calibri" pitchFamily="34" charset="-122"/>
                 <a:cs typeface="Calibri" pitchFamily="34" charset="-120"/>
               </a:rPr>
-              <a:t>Connectors directory</a:t>
+              <a:t>Help center</a:t>
             </a:r>
             <a:endParaRPr lang="en-US" sz="1200" dirty="0"/>
           </a:p>
@@ -10462,13 +10727,13 @@
       </p:sp>
       <p:sp>
         <p:nvSpPr>
-          <p:cNvPr id="16" name="Shape 14"/>
-          <p:cNvSpPr/>
-          <p:nvPr/>
-        </p:nvSpPr>
-        <p:spPr>
-          <a:xfrm>
-            <a:off x="731520" y="3099816"/>
+          <p:cNvPr id="19" name="Shape 17"/>
+          <p:cNvSpPr/>
+          <p:nvPr/>
+        </p:nvSpPr>
+        <p:spPr>
+          <a:xfrm>
+            <a:off x="731520" y="3026664"/>
             <a:ext cx="7680960" cy="384048"/>
           </a:xfrm>
           <a:prstGeom prst="rect">
@@ -10479,16 +10744,23 @@
           </a:solidFill>
           <a:ln/>
         </p:spPr>
-      </p:sp>
-      <p:sp>
-        <p:nvSpPr>
-          <p:cNvPr id="17" name="Text 15"/>
-          <p:cNvSpPr/>
-          <p:nvPr/>
-        </p:nvSpPr>
-        <p:spPr>
-          <a:xfrm>
-            <a:off x="914400" y="3099816"/>
+        <p:txBody>
+          <a:bodyPr/>
+          <a:lstStyle/>
+          <a:p>
+            <a:endParaRPr lang="en-US"/>
+          </a:p>
+        </p:txBody>
+      </p:sp>
+      <p:sp>
+        <p:nvSpPr>
+          <p:cNvPr id="20" name="Text 18"/>
+          <p:cNvSpPr/>
+          <p:nvPr/>
+        </p:nvSpPr>
+        <p:spPr>
+          <a:xfrm>
+            <a:off x="914400" y="3026664"/>
             <a:ext cx="4114800" cy="384048"/>
           </a:xfrm>
           <a:prstGeom prst="rect">
@@ -10501,7 +10773,7 @@
           <a:bodyPr wrap="square" lIns="0" tIns="0" rIns="0" bIns="0" rtlCol="0" anchor="ctr"/>
           <a:lstStyle/>
           <a:p>
-            <a:pPr indent="0" marL="0">
+            <a:pPr marL="0" indent="0">
               <a:buNone/>
             </a:pPr>
             <a:r>
@@ -10513,7 +10785,7 @@
                 <a:ea typeface="Consolas" pitchFamily="34" charset="-122"/>
                 <a:cs typeface="Consolas" pitchFamily="34" charset="-120"/>
               </a:rPr>
-              <a:t>support.claude.com</a:t>
+              <a:t>code.claude.com/docs/en/plugins</a:t>
             </a:r>
             <a:endParaRPr lang="en-US" sz="1200" dirty="0"/>
           </a:p>
@@ -10521,13 +10793,13 @@
       </p:sp>
       <p:sp>
         <p:nvSpPr>
-          <p:cNvPr id="18" name="Text 16"/>
-          <p:cNvSpPr/>
-          <p:nvPr/>
-        </p:nvSpPr>
-        <p:spPr>
-          <a:xfrm>
-            <a:off x="5029200" y="3099816"/>
+          <p:cNvPr id="21" name="Text 19"/>
+          <p:cNvSpPr/>
+          <p:nvPr/>
+        </p:nvSpPr>
+        <p:spPr>
+          <a:xfrm>
+            <a:off x="5029200" y="3026664"/>
             <a:ext cx="3200400" cy="384048"/>
           </a:xfrm>
           <a:prstGeom prst="rect">
@@ -10540,7 +10812,7 @@
           <a:bodyPr wrap="square" lIns="0" tIns="0" rIns="0" bIns="0" rtlCol="0" anchor="ctr"/>
           <a:lstStyle/>
           <a:p>
-            <a:pPr indent="0" marL="0">
+            <a:pPr marL="0" indent="0">
               <a:buNone/>
             </a:pPr>
             <a:r>
@@ -10552,7 +10824,7 @@
                 <a:ea typeface="Calibri" pitchFamily="34" charset="-122"/>
                 <a:cs typeface="Calibri" pitchFamily="34" charset="-120"/>
               </a:rPr>
-              <a:t>Help center</a:t>
+              <a:t>Plugin creation</a:t>
             </a:r>
             <a:endParaRPr lang="en-US" sz="1200" dirty="0"/>
           </a:p>
@@ -10560,13 +10832,13 @@
       </p:sp>
       <p:sp>
         <p:nvSpPr>
-          <p:cNvPr id="19" name="Shape 17"/>
-          <p:cNvSpPr/>
-          <p:nvPr/>
-        </p:nvSpPr>
-        <p:spPr>
-          <a:xfrm>
-            <a:off x="731520" y="3611880"/>
+          <p:cNvPr id="22" name="Shape 20"/>
+          <p:cNvSpPr/>
+          <p:nvPr/>
+        </p:nvSpPr>
+        <p:spPr>
+          <a:xfrm>
+            <a:off x="731520" y="3538728"/>
             <a:ext cx="7680960" cy="384048"/>
           </a:xfrm>
           <a:prstGeom prst="rect">
@@ -10577,16 +10849,23 @@
           </a:solidFill>
           <a:ln/>
         </p:spPr>
-      </p:sp>
-      <p:sp>
-        <p:nvSpPr>
-          <p:cNvPr id="20" name="Text 18"/>
-          <p:cNvSpPr/>
-          <p:nvPr/>
-        </p:nvSpPr>
-        <p:spPr>
-          <a:xfrm>
-            <a:off x="914400" y="3611880"/>
+        <p:txBody>
+          <a:bodyPr/>
+          <a:lstStyle/>
+          <a:p>
+            <a:endParaRPr lang="en-US"/>
+          </a:p>
+        </p:txBody>
+      </p:sp>
+      <p:sp>
+        <p:nvSpPr>
+          <p:cNvPr id="23" name="Text 21"/>
+          <p:cNvSpPr/>
+          <p:nvPr/>
+        </p:nvSpPr>
+        <p:spPr>
+          <a:xfrm>
+            <a:off x="914400" y="3538728"/>
             <a:ext cx="4114800" cy="384048"/>
           </a:xfrm>
           <a:prstGeom prst="rect">
@@ -10599,7 +10878,7 @@
           <a:bodyPr wrap="square" lIns="0" tIns="0" rIns="0" bIns="0" rtlCol="0" anchor="ctr"/>
           <a:lstStyle/>
           <a:p>
-            <a:pPr indent="0" marL="0">
+            <a:pPr marL="0" indent="0">
               <a:buNone/>
             </a:pPr>
             <a:r>
@@ -10611,7 +10890,7 @@
                 <a:ea typeface="Consolas" pitchFamily="34" charset="-122"/>
                 <a:cs typeface="Consolas" pitchFamily="34" charset="-120"/>
               </a:rPr>
-              <a:t>code.claude.com/docs/en/plugins</a:t>
+              <a:t>github.com/anthropics/claude-plugins-official</a:t>
             </a:r>
             <a:endParaRPr lang="en-US" sz="1200" dirty="0"/>
           </a:p>
@@ -10619,13 +10898,13 @@
       </p:sp>
       <p:sp>
         <p:nvSpPr>
-          <p:cNvPr id="21" name="Text 19"/>
-          <p:cNvSpPr/>
-          <p:nvPr/>
-        </p:nvSpPr>
-        <p:spPr>
-          <a:xfrm>
-            <a:off x="5029200" y="3611880"/>
+          <p:cNvPr id="24" name="Text 22"/>
+          <p:cNvSpPr/>
+          <p:nvPr/>
+        </p:nvSpPr>
+        <p:spPr>
+          <a:xfrm>
+            <a:off x="5029200" y="3538728"/>
             <a:ext cx="3200400" cy="384048"/>
           </a:xfrm>
           <a:prstGeom prst="rect">
@@ -10638,7 +10917,7 @@
           <a:bodyPr wrap="square" lIns="0" tIns="0" rIns="0" bIns="0" rtlCol="0" anchor="ctr"/>
           <a:lstStyle/>
           <a:p>
-            <a:pPr indent="0" marL="0">
+            <a:pPr marL="0" indent="0">
               <a:buNone/>
             </a:pPr>
             <a:r>
@@ -10650,104 +10929,6 @@
                 <a:ea typeface="Calibri" pitchFamily="34" charset="-122"/>
                 <a:cs typeface="Calibri" pitchFamily="34" charset="-120"/>
               </a:rPr>
-              <a:t>Plugin creation</a:t>
-            </a:r>
-            <a:endParaRPr lang="en-US" sz="1200" dirty="0"/>
-          </a:p>
-        </p:txBody>
-      </p:sp>
-      <p:sp>
-        <p:nvSpPr>
-          <p:cNvPr id="22" name="Shape 20"/>
-          <p:cNvSpPr/>
-          <p:nvPr/>
-        </p:nvSpPr>
-        <p:spPr>
-          <a:xfrm>
-            <a:off x="731520" y="4123944"/>
-            <a:ext cx="7680960" cy="384048"/>
-          </a:xfrm>
-          <a:prstGeom prst="rect">
-            <a:avLst/>
-          </a:prstGeom>
-          <a:solidFill>
-            <a:srgbClr val="21295C"/>
-          </a:solidFill>
-          <a:ln/>
-        </p:spPr>
-      </p:sp>
-      <p:sp>
-        <p:nvSpPr>
-          <p:cNvPr id="23" name="Text 21"/>
-          <p:cNvSpPr/>
-          <p:nvPr/>
-        </p:nvSpPr>
-        <p:spPr>
-          <a:xfrm>
-            <a:off x="914400" y="4123944"/>
-            <a:ext cx="4114800" cy="384048"/>
-          </a:xfrm>
-          <a:prstGeom prst="rect">
-            <a:avLst/>
-          </a:prstGeom>
-          <a:noFill/>
-          <a:ln/>
-        </p:spPr>
-        <p:txBody>
-          <a:bodyPr wrap="square" lIns="0" tIns="0" rIns="0" bIns="0" rtlCol="0" anchor="ctr"/>
-          <a:lstStyle/>
-          <a:p>
-            <a:pPr indent="0" marL="0">
-              <a:buNone/>
-            </a:pPr>
-            <a:r>
-              <a:rPr lang="en-US" sz="1200" dirty="0">
-                <a:solidFill>
-                  <a:srgbClr val="0891B2"/>
-                </a:solidFill>
-                <a:latin typeface="Consolas" pitchFamily="34" charset="0"/>
-                <a:ea typeface="Consolas" pitchFamily="34" charset="-122"/>
-                <a:cs typeface="Consolas" pitchFamily="34" charset="-120"/>
-              </a:rPr>
-              <a:t>github.com/anthropics/claude-plugins-official</a:t>
-            </a:r>
-            <a:endParaRPr lang="en-US" sz="1200" dirty="0"/>
-          </a:p>
-        </p:txBody>
-      </p:sp>
-      <p:sp>
-        <p:nvSpPr>
-          <p:cNvPr id="24" name="Text 22"/>
-          <p:cNvSpPr/>
-          <p:nvPr/>
-        </p:nvSpPr>
-        <p:spPr>
-          <a:xfrm>
-            <a:off x="5029200" y="4123944"/>
-            <a:ext cx="3200400" cy="384048"/>
-          </a:xfrm>
-          <a:prstGeom prst="rect">
-            <a:avLst/>
-          </a:prstGeom>
-          <a:noFill/>
-          <a:ln/>
-        </p:spPr>
-        <p:txBody>
-          <a:bodyPr wrap="square" lIns="0" tIns="0" rIns="0" bIns="0" rtlCol="0" anchor="ctr"/>
-          <a:lstStyle/>
-          <a:p>
-            <a:pPr indent="0" marL="0">
-              <a:buNone/>
-            </a:pPr>
-            <a:r>
-              <a:rPr lang="en-US" sz="1200" dirty="0">
-                <a:solidFill>
-                  <a:srgbClr val="CADCFC"/>
-                </a:solidFill>
-                <a:latin typeface="Calibri" pitchFamily="34" charset="0"/>
-                <a:ea typeface="Calibri" pitchFamily="34" charset="-122"/>
-                <a:cs typeface="Calibri" pitchFamily="34" charset="-120"/>
-              </a:rPr>
               <a:t>Official plugins</a:t>
             </a:r>
             <a:endParaRPr lang="en-US" sz="1200" dirty="0"/>
@@ -10775,7 +10956,7 @@
           <a:bodyPr wrap="square" rtlCol="0" anchor="ctr"/>
           <a:lstStyle/>
           <a:p>
-            <a:pPr algn="ctr" indent="0" marL="0">
+            <a:pPr marL="0" indent="0" algn="ctr">
               <a:buNone/>
             </a:pPr>
             <a:r>
@@ -10809,6 +10990,7 @@
         <a:solidFill>
           <a:srgbClr val="F0F4F8"/>
         </a:solidFill>
+        <a:effectLst/>
       </p:bgPr>
     </p:bg>
     <p:spTree>
@@ -10844,6 +11026,13 @@
           </a:solidFill>
           <a:ln/>
         </p:spPr>
+        <p:txBody>
+          <a:bodyPr/>
+          <a:lstStyle/>
+          <a:p>
+            <a:endParaRPr lang="en-US"/>
+          </a:p>
+        </p:txBody>
       </p:sp>
       <p:sp>
         <p:nvSpPr>
@@ -10866,7 +11055,7 @@
           <a:bodyPr wrap="square" rtlCol="0" anchor="ctr"/>
           <a:lstStyle/>
           <a:p>
-            <a:pPr indent="0" marL="0">
+            <a:pPr marL="0" indent="0">
               <a:buNone/>
             </a:pPr>
             <a:r>
@@ -10905,7 +11094,7 @@
           <a:bodyPr wrap="square" rtlCol="0" anchor="ctr"/>
           <a:lstStyle/>
           <a:p>
-            <a:pPr indent="0" marL="0">
+            <a:pPr marL="0" indent="0">
               <a:buNone/>
             </a:pPr>
             <a:r>
@@ -10944,7 +11133,7 @@
           <a:bodyPr wrap="square" lIns="0" tIns="0" rIns="0" bIns="0" rtlCol="0" anchor="ctr"/>
           <a:lstStyle/>
           <a:p>
-            <a:pPr indent="0" marL="0">
+            <a:pPr marL="0" indent="0">
               <a:buNone/>
             </a:pPr>
             <a:r>
@@ -10983,7 +11172,7 @@
           <a:bodyPr wrap="square" lIns="0" tIns="0" rIns="0" bIns="0" rtlCol="0" anchor="ctr"/>
           <a:lstStyle/>
           <a:p>
-            <a:pPr indent="0" marL="0">
+            <a:pPr marL="0" indent="0">
               <a:buNone/>
             </a:pPr>
             <a:r>
@@ -11022,7 +11211,7 @@
           <a:bodyPr wrap="square" rtlCol="0" anchor="ctr"/>
           <a:lstStyle/>
           <a:p>
-            <a:pPr indent="0" marL="0">
+            <a:pPr marL="0" indent="0">
               <a:buNone/>
             </a:pPr>
             <a:r>
@@ -11061,7 +11250,7 @@
           <a:bodyPr wrap="square" lIns="0" tIns="0" rIns="0" bIns="0" rtlCol="0" anchor="ctr"/>
           <a:lstStyle/>
           <a:p>
-            <a:pPr indent="0" marL="0">
+            <a:pPr marL="0" indent="0">
               <a:buNone/>
             </a:pPr>
             <a:r>
@@ -11100,7 +11289,7 @@
           <a:bodyPr wrap="square" lIns="0" tIns="0" rIns="0" bIns="0" rtlCol="0" anchor="ctr"/>
           <a:lstStyle/>
           <a:p>
-            <a:pPr indent="0" marL="0">
+            <a:pPr marL="0" indent="0">
               <a:buNone/>
             </a:pPr>
             <a:r>
@@ -11139,7 +11328,7 @@
           <a:bodyPr wrap="square" rtlCol="0" anchor="ctr"/>
           <a:lstStyle/>
           <a:p>
-            <a:pPr indent="0" marL="0">
+            <a:pPr marL="0" indent="0">
               <a:buNone/>
             </a:pPr>
             <a:r>
@@ -11178,7 +11367,7 @@
           <a:bodyPr wrap="square" lIns="0" tIns="0" rIns="0" bIns="0" rtlCol="0" anchor="ctr"/>
           <a:lstStyle/>
           <a:p>
-            <a:pPr indent="0" marL="0">
+            <a:pPr marL="0" indent="0">
               <a:buNone/>
             </a:pPr>
             <a:r>
@@ -11217,7 +11406,7 @@
           <a:bodyPr wrap="square" lIns="0" tIns="0" rIns="0" bIns="0" rtlCol="0" anchor="ctr"/>
           <a:lstStyle/>
           <a:p>
-            <a:pPr indent="0" marL="0">
+            <a:pPr marL="0" indent="0">
               <a:buNone/>
             </a:pPr>
             <a:r>
@@ -11256,7 +11445,7 @@
           <a:bodyPr wrap="square" rtlCol="0" anchor="ctr"/>
           <a:lstStyle/>
           <a:p>
-            <a:pPr indent="0" marL="0">
+            <a:pPr marL="0" indent="0">
               <a:buNone/>
             </a:pPr>
             <a:r>
@@ -11295,7 +11484,7 @@
           <a:bodyPr wrap="square" lIns="0" tIns="0" rIns="0" bIns="0" rtlCol="0" anchor="ctr"/>
           <a:lstStyle/>
           <a:p>
-            <a:pPr indent="0" marL="0">
+            <a:pPr marL="0" indent="0">
               <a:buNone/>
             </a:pPr>
             <a:r>
@@ -11334,7 +11523,7 @@
           <a:bodyPr wrap="square" lIns="0" tIns="0" rIns="0" bIns="0" rtlCol="0" anchor="ctr"/>
           <a:lstStyle/>
           <a:p>
-            <a:pPr indent="0" marL="0">
+            <a:pPr marL="0" indent="0">
               <a:buNone/>
             </a:pPr>
             <a:r>
@@ -11373,7 +11562,7 @@
           <a:bodyPr wrap="square" rtlCol="0" anchor="ctr"/>
           <a:lstStyle/>
           <a:p>
-            <a:pPr indent="0" marL="0">
+            <a:pPr marL="0" indent="0">
               <a:buNone/>
             </a:pPr>
             <a:r>
@@ -11412,7 +11601,7 @@
           <a:bodyPr wrap="square" lIns="0" tIns="0" rIns="0" bIns="0" rtlCol="0" anchor="ctr"/>
           <a:lstStyle/>
           <a:p>
-            <a:pPr indent="0" marL="0">
+            <a:pPr marL="0" indent="0">
               <a:buNone/>
             </a:pPr>
             <a:r>
@@ -11451,7 +11640,7 @@
           <a:bodyPr wrap="square" lIns="0" tIns="0" rIns="0" bIns="0" rtlCol="0" anchor="ctr"/>
           <a:lstStyle/>
           <a:p>
-            <a:pPr indent="0" marL="0">
+            <a:pPr marL="0" indent="0">
               <a:buNone/>
             </a:pPr>
             <a:r>
@@ -11490,7 +11679,7 @@
           <a:bodyPr wrap="square" rtlCol="0" anchor="ctr"/>
           <a:lstStyle/>
           <a:p>
-            <a:pPr indent="0" marL="0">
+            <a:pPr marL="0" indent="0">
               <a:buNone/>
             </a:pPr>
             <a:r>
@@ -11529,7 +11718,7 @@
           <a:bodyPr wrap="square" lIns="0" tIns="0" rIns="0" bIns="0" rtlCol="0" anchor="ctr"/>
           <a:lstStyle/>
           <a:p>
-            <a:pPr indent="0" marL="0">
+            <a:pPr marL="0" indent="0">
               <a:buNone/>
             </a:pPr>
             <a:r>
@@ -11568,7 +11757,7 @@
           <a:bodyPr wrap="square" lIns="0" tIns="0" rIns="0" bIns="0" rtlCol="0" anchor="ctr"/>
           <a:lstStyle/>
           <a:p>
-            <a:pPr indent="0" marL="0">
+            <a:pPr marL="0" indent="0">
               <a:buNone/>
             </a:pPr>
             <a:r>
@@ -11607,7 +11796,7 @@
           <a:bodyPr wrap="square" rtlCol="0" anchor="ctr"/>
           <a:lstStyle/>
           <a:p>
-            <a:pPr indent="0" marL="0">
+            <a:pPr marL="0" indent="0">
               <a:buNone/>
             </a:pPr>
             <a:r>
@@ -11646,7 +11835,7 @@
           <a:bodyPr wrap="square" lIns="0" tIns="0" rIns="0" bIns="0" rtlCol="0" anchor="ctr"/>
           <a:lstStyle/>
           <a:p>
-            <a:pPr indent="0" marL="0">
+            <a:pPr marL="0" indent="0">
               <a:buNone/>
             </a:pPr>
             <a:r>
@@ -11685,7 +11874,7 @@
           <a:bodyPr wrap="square" lIns="0" tIns="0" rIns="0" bIns="0" rtlCol="0" anchor="ctr"/>
           <a:lstStyle/>
           <a:p>
-            <a:pPr indent="0" marL="0">
+            <a:pPr marL="0" indent="0">
               <a:buNone/>
             </a:pPr>
             <a:r>
@@ -11719,6 +11908,7 @@
         <a:solidFill>
           <a:srgbClr val="1E2761"/>
         </a:solidFill>
+        <a:effectLst/>
       </p:bgPr>
     </p:bg>
     <p:spTree>
@@ -11754,6 +11944,13 @@
           </a:solidFill>
           <a:ln/>
         </p:spPr>
+        <p:txBody>
+          <a:bodyPr/>
+          <a:lstStyle/>
+          <a:p>
+            <a:endParaRPr lang="en-US"/>
+          </a:p>
+        </p:txBody>
       </p:sp>
       <p:sp>
         <p:nvSpPr>
@@ -11776,11 +11973,11 @@
           <a:bodyPr wrap="square" rtlCol="0" anchor="ctr"/>
           <a:lstStyle/>
           <a:p>
-            <a:pPr indent="0" marL="0">
-              <a:buNone/>
-            </a:pPr>
-            <a:r>
-              <a:rPr lang="en-US" sz="1400" b="1" spc="500" kern="0" dirty="0">
+            <a:pPr marL="0" indent="0">
+              <a:buNone/>
+            </a:pPr>
+            <a:r>
+              <a:rPr lang="en-US" sz="1400" b="1" kern="0" spc="500" dirty="0">
                 <a:solidFill>
                   <a:srgbClr val="0891B2"/>
                 </a:solidFill>
@@ -11815,7 +12012,7 @@
           <a:bodyPr wrap="square" rtlCol="0" anchor="ctr"/>
           <a:lstStyle/>
           <a:p>
-            <a:pPr indent="0" marL="0">
+            <a:pPr marL="0" indent="0">
               <a:buNone/>
             </a:pPr>
             <a:r>
@@ -11852,309 +12049,24 @@
           </a:solidFill>
           <a:ln/>
           <a:effectLst>
-            <a:outerShdw sx="100000" sy="100000" kx="0" ky="0" algn="bl" rotWithShape="0" blurRad="101600" dist="38100" dir="8100000">
+            <a:outerShdw blurRad="101600" dist="38100" dir="8100000" algn="bl" rotWithShape="0">
               <a:srgbClr val="000000">
                 <a:alpha val="12000"/>
               </a:srgbClr>
             </a:outerShdw>
           </a:effectLst>
         </p:spPr>
+        <p:txBody>
+          <a:bodyPr/>
+          <a:lstStyle/>
+          <a:p>
+            <a:endParaRPr lang="en-US"/>
+          </a:p>
+        </p:txBody>
       </p:sp>
       <p:pic>
         <p:nvPicPr>
-          <p:cNvPr id="6" name="Image 0" descr="preencoded.png">    </p:cNvPr>
-          <p:cNvPicPr>
-            <a:picLocks noChangeAspect="1"/>
-          </p:cNvPicPr>
-          <p:nvPr/>
-        </p:nvPicPr>
-        <p:blipFill>
-          <a:blip r:embed="rId1"/>
-          <a:stretch>
-            <a:fillRect/>
-          </a:stretch>
-        </p:blipFill>
-        <p:spPr>
-          <a:xfrm>
-            <a:off x="868680" y="1691640"/>
-            <a:ext cx="548640" cy="548640"/>
-          </a:xfrm>
-          <a:prstGeom prst="rect">
-            <a:avLst/>
-          </a:prstGeom>
-        </p:spPr>
-      </p:pic>
-      <p:sp>
-        <p:nvSpPr>
-          <p:cNvPr id="7" name="Text 4"/>
-          <p:cNvSpPr/>
-          <p:nvPr/>
-        </p:nvSpPr>
-        <p:spPr>
-          <a:xfrm>
-            <a:off x="411480" y="2377440"/>
-            <a:ext cx="1463040" cy="365760"/>
-          </a:xfrm>
-          <a:prstGeom prst="rect">
-            <a:avLst/>
-          </a:prstGeom>
-          <a:noFill/>
-          <a:ln/>
-        </p:spPr>
-        <p:txBody>
-          <a:bodyPr wrap="square" rtlCol="0" anchor="ctr"/>
-          <a:lstStyle/>
-          <a:p>
-            <a:pPr algn="ctr" indent="0" marL="0">
-              <a:buNone/>
-            </a:pPr>
-            <a:r>
-              <a:rPr lang="en-US" sz="1300" b="1" dirty="0">
-                <a:solidFill>
-                  <a:srgbClr val="FFFFFF"/>
-                </a:solidFill>
-                <a:latin typeface="Calibri" pitchFamily="34" charset="0"/>
-                <a:ea typeface="Calibri" pitchFamily="34" charset="-122"/>
-                <a:cs typeface="Calibri" pitchFamily="34" charset="-120"/>
-              </a:rPr>
-              <a:t>Web Chat</a:t>
-            </a:r>
-            <a:endParaRPr lang="en-US" sz="1300" dirty="0"/>
-          </a:p>
-        </p:txBody>
-      </p:sp>
-      <p:sp>
-        <p:nvSpPr>
-          <p:cNvPr id="8" name="Text 5"/>
-          <p:cNvSpPr/>
-          <p:nvPr/>
-        </p:nvSpPr>
-        <p:spPr>
-          <a:xfrm>
-            <a:off x="411480" y="2788920"/>
-            <a:ext cx="1463040" cy="731520"/>
-          </a:xfrm>
-          <a:prstGeom prst="rect">
-            <a:avLst/>
-          </a:prstGeom>
-          <a:noFill/>
-          <a:ln/>
-        </p:spPr>
-        <p:txBody>
-          <a:bodyPr wrap="square" rtlCol="0" anchor="t"/>
-          <a:lstStyle/>
-          <a:p>
-            <a:pPr algn="ctr" indent="0" marL="0">
-              <a:buNone/>
-            </a:pPr>
-            <a:r>
-              <a:rPr lang="en-US" sz="1000" dirty="0">
-                <a:solidFill>
-                  <a:srgbClr val="CADCFC"/>
-                </a:solidFill>
-                <a:latin typeface="Calibri" pitchFamily="34" charset="0"/>
-                <a:ea typeface="Calibri" pitchFamily="34" charset="-122"/>
-                <a:cs typeface="Calibri" pitchFamily="34" charset="-120"/>
-              </a:rPr>
-              <a:t>Browser-based</a:t>
-            </a:r>
-            <a:endParaRPr lang="en-US" sz="1000" dirty="0"/>
-          </a:p>
-          <a:p>
-            <a:pPr algn="ctr" indent="0" marL="0">
-              <a:buNone/>
-            </a:pPr>
-            <a:r>
-              <a:rPr lang="en-US" sz="1000" dirty="0">
-                <a:solidFill>
-                  <a:srgbClr val="CADCFC"/>
-                </a:solidFill>
-                <a:latin typeface="Calibri" pitchFamily="34" charset="0"/>
-                <a:ea typeface="Calibri" pitchFamily="34" charset="-122"/>
-                <a:cs typeface="Calibri" pitchFamily="34" charset="-120"/>
-              </a:rPr>
-              <a:t>claude.ai</a:t>
-            </a:r>
-            <a:endParaRPr lang="en-US" sz="1000" dirty="0"/>
-          </a:p>
-        </p:txBody>
-      </p:sp>
-      <p:sp>
-        <p:nvSpPr>
-          <p:cNvPr id="9" name="Shape 6"/>
-          <p:cNvSpPr/>
-          <p:nvPr/>
-        </p:nvSpPr>
-        <p:spPr>
-          <a:xfrm>
-            <a:off x="2103120" y="1463040"/>
-            <a:ext cx="1554480" cy="2560320"/>
-          </a:xfrm>
-          <a:prstGeom prst="rect">
-            <a:avLst/>
-          </a:prstGeom>
-          <a:solidFill>
-            <a:srgbClr val="21295C"/>
-          </a:solidFill>
-          <a:ln/>
-          <a:effectLst>
-            <a:outerShdw sx="100000" sy="100000" kx="0" ky="0" algn="bl" rotWithShape="0" blurRad="101600" dist="38100" dir="8100000">
-              <a:srgbClr val="000000">
-                <a:alpha val="12000"/>
-              </a:srgbClr>
-            </a:outerShdw>
-          </a:effectLst>
-        </p:spPr>
-      </p:sp>
-      <p:pic>
-        <p:nvPicPr>
-          <p:cNvPr id="10" name="Image 1" descr="preencoded.png">    </p:cNvPr>
-          <p:cNvPicPr>
-            <a:picLocks noChangeAspect="1"/>
-          </p:cNvPicPr>
-          <p:nvPr/>
-        </p:nvPicPr>
-        <p:blipFill>
-          <a:blip r:embed="rId2"/>
-          <a:stretch>
-            <a:fillRect/>
-          </a:stretch>
-        </p:blipFill>
-        <p:spPr>
-          <a:xfrm>
-            <a:off x="2606040" y="1691640"/>
-            <a:ext cx="548640" cy="548640"/>
-          </a:xfrm>
-          <a:prstGeom prst="rect">
-            <a:avLst/>
-          </a:prstGeom>
-        </p:spPr>
-      </p:pic>
-      <p:sp>
-        <p:nvSpPr>
-          <p:cNvPr id="11" name="Text 7"/>
-          <p:cNvSpPr/>
-          <p:nvPr/>
-        </p:nvSpPr>
-        <p:spPr>
-          <a:xfrm>
-            <a:off x="2148840" y="2377440"/>
-            <a:ext cx="1463040" cy="365760"/>
-          </a:xfrm>
-          <a:prstGeom prst="rect">
-            <a:avLst/>
-          </a:prstGeom>
-          <a:noFill/>
-          <a:ln/>
-        </p:spPr>
-        <p:txBody>
-          <a:bodyPr wrap="square" rtlCol="0" anchor="ctr"/>
-          <a:lstStyle/>
-          <a:p>
-            <a:pPr algn="ctr" indent="0" marL="0">
-              <a:buNone/>
-            </a:pPr>
-            <a:r>
-              <a:rPr lang="en-US" sz="1300" b="1" dirty="0">
-                <a:solidFill>
-                  <a:srgbClr val="FFFFFF"/>
-                </a:solidFill>
-                <a:latin typeface="Calibri" pitchFamily="34" charset="0"/>
-                <a:ea typeface="Calibri" pitchFamily="34" charset="-122"/>
-                <a:cs typeface="Calibri" pitchFamily="34" charset="-120"/>
-              </a:rPr>
-              <a:t>Desktop Chat</a:t>
-            </a:r>
-            <a:endParaRPr lang="en-US" sz="1300" dirty="0"/>
-          </a:p>
-        </p:txBody>
-      </p:sp>
-      <p:sp>
-        <p:nvSpPr>
-          <p:cNvPr id="12" name="Text 8"/>
-          <p:cNvSpPr/>
-          <p:nvPr/>
-        </p:nvSpPr>
-        <p:spPr>
-          <a:xfrm>
-            <a:off x="2148840" y="2788920"/>
-            <a:ext cx="1463040" cy="731520"/>
-          </a:xfrm>
-          <a:prstGeom prst="rect">
-            <a:avLst/>
-          </a:prstGeom>
-          <a:noFill/>
-          <a:ln/>
-        </p:spPr>
-        <p:txBody>
-          <a:bodyPr wrap="square" rtlCol="0" anchor="t"/>
-          <a:lstStyle/>
-          <a:p>
-            <a:pPr algn="ctr" indent="0" marL="0">
-              <a:buNone/>
-            </a:pPr>
-            <a:r>
-              <a:rPr lang="en-US" sz="1000" dirty="0">
-                <a:solidFill>
-                  <a:srgbClr val="CADCFC"/>
-                </a:solidFill>
-                <a:latin typeface="Calibri" pitchFamily="34" charset="0"/>
-                <a:ea typeface="Calibri" pitchFamily="34" charset="-122"/>
-                <a:cs typeface="Calibri" pitchFamily="34" charset="-120"/>
-              </a:rPr>
-              <a:t>Native app</a:t>
-            </a:r>
-            <a:endParaRPr lang="en-US" sz="1000" dirty="0"/>
-          </a:p>
-          <a:p>
-            <a:pPr algn="ctr" indent="0" marL="0">
-              <a:buNone/>
-            </a:pPr>
-            <a:r>
-              <a:rPr lang="en-US" sz="1000" dirty="0">
-                <a:solidFill>
-                  <a:srgbClr val="CADCFC"/>
-                </a:solidFill>
-                <a:latin typeface="Calibri" pitchFamily="34" charset="0"/>
-                <a:ea typeface="Calibri" pitchFamily="34" charset="-122"/>
-                <a:cs typeface="Calibri" pitchFamily="34" charset="-120"/>
-              </a:rPr>
-              <a:t>More power</a:t>
-            </a:r>
-            <a:endParaRPr lang="en-US" sz="1000" dirty="0"/>
-          </a:p>
-        </p:txBody>
-      </p:sp>
-      <p:sp>
-        <p:nvSpPr>
-          <p:cNvPr id="13" name="Shape 9"/>
-          <p:cNvSpPr/>
-          <p:nvPr/>
-        </p:nvSpPr>
-        <p:spPr>
-          <a:xfrm>
-            <a:off x="3840480" y="1463040"/>
-            <a:ext cx="1554480" cy="2560320"/>
-          </a:xfrm>
-          <a:prstGeom prst="rect">
-            <a:avLst/>
-          </a:prstGeom>
-          <a:solidFill>
-            <a:srgbClr val="21295C"/>
-          </a:solidFill>
-          <a:ln/>
-          <a:effectLst>
-            <a:outerShdw sx="100000" sy="100000" kx="0" ky="0" algn="bl" rotWithShape="0" blurRad="101600" dist="38100" dir="8100000">
-              <a:srgbClr val="000000">
-                <a:alpha val="12000"/>
-              </a:srgbClr>
-            </a:outerShdw>
-          </a:effectLst>
-        </p:spPr>
-      </p:sp>
-      <p:pic>
-        <p:nvPicPr>
-          <p:cNvPr id="14" name="Image 2" descr="preencoded.png">    </p:cNvPr>
+          <p:cNvPr id="6" name="Image 0" descr="preencoded.png"/>
           <p:cNvPicPr>
             <a:picLocks noChangeAspect="1"/>
           </p:cNvPicPr>
@@ -12168,7 +12080,7 @@
         </p:blipFill>
         <p:spPr>
           <a:xfrm>
-            <a:off x="4343400" y="1691640"/>
+            <a:off x="868680" y="1691640"/>
             <a:ext cx="548640" cy="548640"/>
           </a:xfrm>
           <a:prstGeom prst="rect">
@@ -12178,13 +12090,13 @@
       </p:pic>
       <p:sp>
         <p:nvSpPr>
-          <p:cNvPr id="15" name="Text 10"/>
-          <p:cNvSpPr/>
-          <p:nvPr/>
-        </p:nvSpPr>
-        <p:spPr>
-          <a:xfrm>
-            <a:off x="3886200" y="2377440"/>
+          <p:cNvPr id="7" name="Text 4"/>
+          <p:cNvSpPr/>
+          <p:nvPr/>
+        </p:nvSpPr>
+        <p:spPr>
+          <a:xfrm>
+            <a:off x="411480" y="2377440"/>
             <a:ext cx="1463040" cy="365760"/>
           </a:xfrm>
           <a:prstGeom prst="rect">
@@ -12197,7 +12109,7 @@
           <a:bodyPr wrap="square" rtlCol="0" anchor="ctr"/>
           <a:lstStyle/>
           <a:p>
-            <a:pPr algn="ctr" indent="0" marL="0">
+            <a:pPr marL="0" indent="0" algn="ctr">
               <a:buNone/>
             </a:pPr>
             <a:r>
@@ -12209,7 +12121,7 @@
                 <a:ea typeface="Calibri" pitchFamily="34" charset="-122"/>
                 <a:cs typeface="Calibri" pitchFamily="34" charset="-120"/>
               </a:rPr>
-              <a:t>Cowork</a:t>
+              <a:t>Web Chat</a:t>
             </a:r>
             <a:endParaRPr lang="en-US" sz="1300" dirty="0"/>
           </a:p>
@@ -12217,13 +12129,13 @@
       </p:sp>
       <p:sp>
         <p:nvSpPr>
-          <p:cNvPr id="16" name="Text 11"/>
-          <p:cNvSpPr/>
-          <p:nvPr/>
-        </p:nvSpPr>
-        <p:spPr>
-          <a:xfrm>
-            <a:off x="3886200" y="2788920"/>
+          <p:cNvPr id="8" name="Text 5"/>
+          <p:cNvSpPr/>
+          <p:nvPr/>
+        </p:nvSpPr>
+        <p:spPr>
+          <a:xfrm>
+            <a:off x="411480" y="2788920"/>
             <a:ext cx="1463040" cy="731520"/>
           </a:xfrm>
           <a:prstGeom prst="rect">
@@ -12236,7 +12148,7 @@
           <a:bodyPr wrap="square" rtlCol="0" anchor="t"/>
           <a:lstStyle/>
           <a:p>
-            <a:pPr algn="ctr" indent="0" marL="0">
+            <a:pPr marL="0" indent="0" algn="ctr">
               <a:buNone/>
             </a:pPr>
             <a:r>
@@ -12248,12 +12160,12 @@
                 <a:ea typeface="Calibri" pitchFamily="34" charset="-122"/>
                 <a:cs typeface="Calibri" pitchFamily="34" charset="-120"/>
               </a:rPr>
-              <a:t>Autonomous</a:t>
+              <a:t>Browser-based</a:t>
             </a:r>
             <a:endParaRPr lang="en-US" sz="1000" dirty="0"/>
           </a:p>
           <a:p>
-            <a:pPr algn="ctr" indent="0" marL="0">
+            <a:pPr marL="0" indent="0" algn="ctr">
               <a:buNone/>
             </a:pPr>
             <a:r>
@@ -12265,7 +12177,7 @@
                 <a:ea typeface="Calibri" pitchFamily="34" charset="-122"/>
                 <a:cs typeface="Calibri" pitchFamily="34" charset="-120"/>
               </a:rPr>
-              <a:t>Background agent</a:t>
+              <a:t>claude.ai</a:t>
             </a:r>
             <a:endParaRPr lang="en-US" sz="1000" dirty="0"/>
           </a:p>
@@ -12273,13 +12185,13 @@
       </p:sp>
       <p:sp>
         <p:nvSpPr>
-          <p:cNvPr id="17" name="Shape 12"/>
-          <p:cNvSpPr/>
-          <p:nvPr/>
-        </p:nvSpPr>
-        <p:spPr>
-          <a:xfrm>
-            <a:off x="5577840" y="1463040"/>
+          <p:cNvPr id="9" name="Shape 6"/>
+          <p:cNvSpPr/>
+          <p:nvPr/>
+        </p:nvSpPr>
+        <p:spPr>
+          <a:xfrm>
+            <a:off x="2103120" y="1463040"/>
             <a:ext cx="1554480" cy="2560320"/>
           </a:xfrm>
           <a:prstGeom prst="rect">
@@ -12290,17 +12202,24 @@
           </a:solidFill>
           <a:ln/>
           <a:effectLst>
-            <a:outerShdw sx="100000" sy="100000" kx="0" ky="0" algn="bl" rotWithShape="0" blurRad="101600" dist="38100" dir="8100000">
+            <a:outerShdw blurRad="101600" dist="38100" dir="8100000" algn="bl" rotWithShape="0">
               <a:srgbClr val="000000">
                 <a:alpha val="12000"/>
               </a:srgbClr>
             </a:outerShdw>
           </a:effectLst>
         </p:spPr>
+        <p:txBody>
+          <a:bodyPr/>
+          <a:lstStyle/>
+          <a:p>
+            <a:endParaRPr lang="en-US"/>
+          </a:p>
+        </p:txBody>
       </p:sp>
       <p:pic>
         <p:nvPicPr>
-          <p:cNvPr id="18" name="Image 3" descr="preencoded.png">    </p:cNvPr>
+          <p:cNvPr id="10" name="Image 1" descr="preencoded.png"/>
           <p:cNvPicPr>
             <a:picLocks noChangeAspect="1"/>
           </p:cNvPicPr>
@@ -12314,7 +12233,7 @@
         </p:blipFill>
         <p:spPr>
           <a:xfrm>
-            <a:off x="6080760" y="1691640"/>
+            <a:off x="2606040" y="1691640"/>
             <a:ext cx="548640" cy="548640"/>
           </a:xfrm>
           <a:prstGeom prst="rect">
@@ -12324,13 +12243,13 @@
       </p:pic>
       <p:sp>
         <p:nvSpPr>
-          <p:cNvPr id="19" name="Text 13"/>
-          <p:cNvSpPr/>
-          <p:nvPr/>
-        </p:nvSpPr>
-        <p:spPr>
-          <a:xfrm>
-            <a:off x="5623560" y="2377440"/>
+          <p:cNvPr id="11" name="Text 7"/>
+          <p:cNvSpPr/>
+          <p:nvPr/>
+        </p:nvSpPr>
+        <p:spPr>
+          <a:xfrm>
+            <a:off x="2148840" y="2377440"/>
             <a:ext cx="1463040" cy="365760"/>
           </a:xfrm>
           <a:prstGeom prst="rect">
@@ -12343,7 +12262,7 @@
           <a:bodyPr wrap="square" rtlCol="0" anchor="ctr"/>
           <a:lstStyle/>
           <a:p>
-            <a:pPr algn="ctr" indent="0" marL="0">
+            <a:pPr marL="0" indent="0" algn="ctr">
               <a:buNone/>
             </a:pPr>
             <a:r>
@@ -12355,7 +12274,7 @@
                 <a:ea typeface="Calibri" pitchFamily="34" charset="-122"/>
                 <a:cs typeface="Calibri" pitchFamily="34" charset="-120"/>
               </a:rPr>
-              <a:t>Code Desktop</a:t>
+              <a:t>Desktop Chat</a:t>
             </a:r>
             <a:endParaRPr lang="en-US" sz="1300" dirty="0"/>
           </a:p>
@@ -12363,13 +12282,13 @@
       </p:sp>
       <p:sp>
         <p:nvSpPr>
-          <p:cNvPr id="20" name="Text 14"/>
-          <p:cNvSpPr/>
-          <p:nvPr/>
-        </p:nvSpPr>
-        <p:spPr>
-          <a:xfrm>
-            <a:off x="5623560" y="2788920"/>
+          <p:cNvPr id="12" name="Text 8"/>
+          <p:cNvSpPr/>
+          <p:nvPr/>
+        </p:nvSpPr>
+        <p:spPr>
+          <a:xfrm>
+            <a:off x="2148840" y="2788920"/>
             <a:ext cx="1463040" cy="731520"/>
           </a:xfrm>
           <a:prstGeom prst="rect">
@@ -12382,7 +12301,7 @@
           <a:bodyPr wrap="square" rtlCol="0" anchor="t"/>
           <a:lstStyle/>
           <a:p>
-            <a:pPr algn="ctr" indent="0" marL="0">
+            <a:pPr marL="0" indent="0" algn="ctr">
               <a:buNone/>
             </a:pPr>
             <a:r>
@@ -12394,12 +12313,12 @@
                 <a:ea typeface="Calibri" pitchFamily="34" charset="-122"/>
                 <a:cs typeface="Calibri" pitchFamily="34" charset="-120"/>
               </a:rPr>
-              <a:t>Visual dev tool</a:t>
+              <a:t>Native app</a:t>
             </a:r>
             <a:endParaRPr lang="en-US" sz="1000" dirty="0"/>
           </a:p>
           <a:p>
-            <a:pPr algn="ctr" indent="0" marL="0">
+            <a:pPr marL="0" indent="0" algn="ctr">
               <a:buNone/>
             </a:pPr>
             <a:r>
@@ -12411,7 +12330,7 @@
                 <a:ea typeface="Calibri" pitchFamily="34" charset="-122"/>
                 <a:cs typeface="Calibri" pitchFamily="34" charset="-120"/>
               </a:rPr>
-              <a:t>Diff review</a:t>
+              <a:t>More power</a:t>
             </a:r>
             <a:endParaRPr lang="en-US" sz="1000" dirty="0"/>
           </a:p>
@@ -12419,13 +12338,13 @@
       </p:sp>
       <p:sp>
         <p:nvSpPr>
-          <p:cNvPr id="21" name="Shape 15"/>
-          <p:cNvSpPr/>
-          <p:nvPr/>
-        </p:nvSpPr>
-        <p:spPr>
-          <a:xfrm>
-            <a:off x="7315200" y="1463040"/>
+          <p:cNvPr id="13" name="Shape 9"/>
+          <p:cNvSpPr/>
+          <p:nvPr/>
+        </p:nvSpPr>
+        <p:spPr>
+          <a:xfrm>
+            <a:off x="3840480" y="1463040"/>
             <a:ext cx="1554480" cy="2560320"/>
           </a:xfrm>
           <a:prstGeom prst="rect">
@@ -12436,17 +12355,24 @@
           </a:solidFill>
           <a:ln/>
           <a:effectLst>
-            <a:outerShdw sx="100000" sy="100000" kx="0" ky="0" algn="bl" rotWithShape="0" blurRad="101600" dist="38100" dir="8100000">
+            <a:outerShdw blurRad="101600" dist="38100" dir="8100000" algn="bl" rotWithShape="0">
               <a:srgbClr val="000000">
                 <a:alpha val="12000"/>
               </a:srgbClr>
             </a:outerShdw>
           </a:effectLst>
         </p:spPr>
+        <p:txBody>
+          <a:bodyPr/>
+          <a:lstStyle/>
+          <a:p>
+            <a:endParaRPr lang="en-US"/>
+          </a:p>
+        </p:txBody>
       </p:sp>
       <p:pic>
         <p:nvPicPr>
-          <p:cNvPr id="22" name="Image 4" descr="preencoded.png">    </p:cNvPr>
+          <p:cNvPr id="14" name="Image 2" descr="preencoded.png"/>
           <p:cNvPicPr>
             <a:picLocks noChangeAspect="1"/>
           </p:cNvPicPr>
@@ -12460,7 +12386,7 @@
         </p:blipFill>
         <p:spPr>
           <a:xfrm>
-            <a:off x="7818120" y="1691640"/>
+            <a:off x="4343400" y="1691640"/>
             <a:ext cx="548640" cy="548640"/>
           </a:xfrm>
           <a:prstGeom prst="rect">
@@ -12470,13 +12396,13 @@
       </p:pic>
       <p:sp>
         <p:nvSpPr>
-          <p:cNvPr id="23" name="Text 16"/>
-          <p:cNvSpPr/>
-          <p:nvPr/>
-        </p:nvSpPr>
-        <p:spPr>
-          <a:xfrm>
-            <a:off x="7360920" y="2377440"/>
+          <p:cNvPr id="15" name="Text 10"/>
+          <p:cNvSpPr/>
+          <p:nvPr/>
+        </p:nvSpPr>
+        <p:spPr>
+          <a:xfrm>
+            <a:off x="3886200" y="2377440"/>
             <a:ext cx="1463040" cy="365760"/>
           </a:xfrm>
           <a:prstGeom prst="rect">
@@ -12489,7 +12415,7 @@
           <a:bodyPr wrap="square" rtlCol="0" anchor="ctr"/>
           <a:lstStyle/>
           <a:p>
-            <a:pPr algn="ctr" indent="0" marL="0">
+            <a:pPr marL="0" indent="0" algn="ctr">
               <a:buNone/>
             </a:pPr>
             <a:r>
@@ -12501,7 +12427,7 @@
                 <a:ea typeface="Calibri" pitchFamily="34" charset="-122"/>
                 <a:cs typeface="Calibri" pitchFamily="34" charset="-120"/>
               </a:rPr>
-              <a:t>Code CLI</a:t>
+              <a:t>Cowork</a:t>
             </a:r>
             <a:endParaRPr lang="en-US" sz="1300" dirty="0"/>
           </a:p>
@@ -12509,13 +12435,13 @@
       </p:sp>
       <p:sp>
         <p:nvSpPr>
-          <p:cNvPr id="24" name="Text 17"/>
-          <p:cNvSpPr/>
-          <p:nvPr/>
-        </p:nvSpPr>
-        <p:spPr>
-          <a:xfrm>
-            <a:off x="7360920" y="2788920"/>
+          <p:cNvPr id="16" name="Text 11"/>
+          <p:cNvSpPr/>
+          <p:nvPr/>
+        </p:nvSpPr>
+        <p:spPr>
+          <a:xfrm>
+            <a:off x="3886200" y="2788920"/>
             <a:ext cx="1463040" cy="731520"/>
           </a:xfrm>
           <a:prstGeom prst="rect">
@@ -12528,7 +12454,7 @@
           <a:bodyPr wrap="square" rtlCol="0" anchor="t"/>
           <a:lstStyle/>
           <a:p>
-            <a:pPr algn="ctr" indent="0" marL="0">
+            <a:pPr marL="0" indent="0" algn="ctr">
               <a:buNone/>
             </a:pPr>
             <a:r>
@@ -12540,12 +12466,12 @@
                 <a:ea typeface="Calibri" pitchFamily="34" charset="-122"/>
                 <a:cs typeface="Calibri" pitchFamily="34" charset="-120"/>
               </a:rPr>
-              <a:t>Terminal-based</a:t>
+              <a:t>Autonomous</a:t>
             </a:r>
             <a:endParaRPr lang="en-US" sz="1000" dirty="0"/>
           </a:p>
           <a:p>
-            <a:pPr algn="ctr" indent="0" marL="0">
+            <a:pPr marL="0" indent="0" algn="ctr">
               <a:buNone/>
             </a:pPr>
             <a:r>
@@ -12557,6 +12483,312 @@
                 <a:ea typeface="Calibri" pitchFamily="34" charset="-122"/>
                 <a:cs typeface="Calibri" pitchFamily="34" charset="-120"/>
               </a:rPr>
+              <a:t>Background agent</a:t>
+            </a:r>
+            <a:endParaRPr lang="en-US" sz="1000" dirty="0"/>
+          </a:p>
+        </p:txBody>
+      </p:sp>
+      <p:sp>
+        <p:nvSpPr>
+          <p:cNvPr id="17" name="Shape 12"/>
+          <p:cNvSpPr/>
+          <p:nvPr/>
+        </p:nvSpPr>
+        <p:spPr>
+          <a:xfrm>
+            <a:off x="5577840" y="1463040"/>
+            <a:ext cx="1554480" cy="2560320"/>
+          </a:xfrm>
+          <a:prstGeom prst="rect">
+            <a:avLst/>
+          </a:prstGeom>
+          <a:solidFill>
+            <a:srgbClr val="21295C"/>
+          </a:solidFill>
+          <a:ln/>
+          <a:effectLst>
+            <a:outerShdw blurRad="101600" dist="38100" dir="8100000" algn="bl" rotWithShape="0">
+              <a:srgbClr val="000000">
+                <a:alpha val="12000"/>
+              </a:srgbClr>
+            </a:outerShdw>
+          </a:effectLst>
+        </p:spPr>
+        <p:txBody>
+          <a:bodyPr/>
+          <a:lstStyle/>
+          <a:p>
+            <a:endParaRPr lang="en-US"/>
+          </a:p>
+        </p:txBody>
+      </p:sp>
+      <p:pic>
+        <p:nvPicPr>
+          <p:cNvPr id="18" name="Image 3" descr="preencoded.png"/>
+          <p:cNvPicPr>
+            <a:picLocks noChangeAspect="1"/>
+          </p:cNvPicPr>
+          <p:nvPr/>
+        </p:nvPicPr>
+        <p:blipFill>
+          <a:blip r:embed="rId6"/>
+          <a:stretch>
+            <a:fillRect/>
+          </a:stretch>
+        </p:blipFill>
+        <p:spPr>
+          <a:xfrm>
+            <a:off x="6080760" y="1691640"/>
+            <a:ext cx="548640" cy="548640"/>
+          </a:xfrm>
+          <a:prstGeom prst="rect">
+            <a:avLst/>
+          </a:prstGeom>
+        </p:spPr>
+      </p:pic>
+      <p:sp>
+        <p:nvSpPr>
+          <p:cNvPr id="19" name="Text 13"/>
+          <p:cNvSpPr/>
+          <p:nvPr/>
+        </p:nvSpPr>
+        <p:spPr>
+          <a:xfrm>
+            <a:off x="5623560" y="2377440"/>
+            <a:ext cx="1463040" cy="365760"/>
+          </a:xfrm>
+          <a:prstGeom prst="rect">
+            <a:avLst/>
+          </a:prstGeom>
+          <a:noFill/>
+          <a:ln/>
+        </p:spPr>
+        <p:txBody>
+          <a:bodyPr wrap="square" rtlCol="0" anchor="ctr"/>
+          <a:lstStyle/>
+          <a:p>
+            <a:pPr marL="0" indent="0" algn="ctr">
+              <a:buNone/>
+            </a:pPr>
+            <a:r>
+              <a:rPr lang="en-US" sz="1300" b="1" dirty="0">
+                <a:solidFill>
+                  <a:srgbClr val="FFFFFF"/>
+                </a:solidFill>
+                <a:latin typeface="Calibri" pitchFamily="34" charset="0"/>
+                <a:ea typeface="Calibri" pitchFamily="34" charset="-122"/>
+                <a:cs typeface="Calibri" pitchFamily="34" charset="-120"/>
+              </a:rPr>
+              <a:t>Code Desktop</a:t>
+            </a:r>
+            <a:endParaRPr lang="en-US" sz="1300" dirty="0"/>
+          </a:p>
+        </p:txBody>
+      </p:sp>
+      <p:sp>
+        <p:nvSpPr>
+          <p:cNvPr id="20" name="Text 14"/>
+          <p:cNvSpPr/>
+          <p:nvPr/>
+        </p:nvSpPr>
+        <p:spPr>
+          <a:xfrm>
+            <a:off x="5623560" y="2788920"/>
+            <a:ext cx="1463040" cy="731520"/>
+          </a:xfrm>
+          <a:prstGeom prst="rect">
+            <a:avLst/>
+          </a:prstGeom>
+          <a:noFill/>
+          <a:ln/>
+        </p:spPr>
+        <p:txBody>
+          <a:bodyPr wrap="square" rtlCol="0" anchor="t"/>
+          <a:lstStyle/>
+          <a:p>
+            <a:pPr marL="0" indent="0" algn="ctr">
+              <a:buNone/>
+            </a:pPr>
+            <a:r>
+              <a:rPr lang="en-US" sz="1000" dirty="0">
+                <a:solidFill>
+                  <a:srgbClr val="CADCFC"/>
+                </a:solidFill>
+                <a:latin typeface="Calibri" pitchFamily="34" charset="0"/>
+                <a:ea typeface="Calibri" pitchFamily="34" charset="-122"/>
+                <a:cs typeface="Calibri" pitchFamily="34" charset="-120"/>
+              </a:rPr>
+              <a:t>Visual dev tool</a:t>
+            </a:r>
+            <a:endParaRPr lang="en-US" sz="1000" dirty="0"/>
+          </a:p>
+          <a:p>
+            <a:pPr marL="0" indent="0" algn="ctr">
+              <a:buNone/>
+            </a:pPr>
+            <a:r>
+              <a:rPr lang="en-US" sz="1000" dirty="0">
+                <a:solidFill>
+                  <a:srgbClr val="CADCFC"/>
+                </a:solidFill>
+                <a:latin typeface="Calibri" pitchFamily="34" charset="0"/>
+                <a:ea typeface="Calibri" pitchFamily="34" charset="-122"/>
+                <a:cs typeface="Calibri" pitchFamily="34" charset="-120"/>
+              </a:rPr>
+              <a:t>Diff review</a:t>
+            </a:r>
+            <a:endParaRPr lang="en-US" sz="1000" dirty="0"/>
+          </a:p>
+        </p:txBody>
+      </p:sp>
+      <p:sp>
+        <p:nvSpPr>
+          <p:cNvPr id="21" name="Shape 15"/>
+          <p:cNvSpPr/>
+          <p:nvPr/>
+        </p:nvSpPr>
+        <p:spPr>
+          <a:xfrm>
+            <a:off x="7315200" y="1463040"/>
+            <a:ext cx="1554480" cy="2560320"/>
+          </a:xfrm>
+          <a:prstGeom prst="rect">
+            <a:avLst/>
+          </a:prstGeom>
+          <a:solidFill>
+            <a:srgbClr val="21295C"/>
+          </a:solidFill>
+          <a:ln/>
+          <a:effectLst>
+            <a:outerShdw blurRad="101600" dist="38100" dir="8100000" algn="bl" rotWithShape="0">
+              <a:srgbClr val="000000">
+                <a:alpha val="12000"/>
+              </a:srgbClr>
+            </a:outerShdw>
+          </a:effectLst>
+        </p:spPr>
+        <p:txBody>
+          <a:bodyPr/>
+          <a:lstStyle/>
+          <a:p>
+            <a:endParaRPr lang="en-US"/>
+          </a:p>
+        </p:txBody>
+      </p:sp>
+      <p:pic>
+        <p:nvPicPr>
+          <p:cNvPr id="22" name="Image 4" descr="preencoded.png"/>
+          <p:cNvPicPr>
+            <a:picLocks noChangeAspect="1"/>
+          </p:cNvPicPr>
+          <p:nvPr/>
+        </p:nvPicPr>
+        <p:blipFill>
+          <a:blip r:embed="rId7"/>
+          <a:stretch>
+            <a:fillRect/>
+          </a:stretch>
+        </p:blipFill>
+        <p:spPr>
+          <a:xfrm>
+            <a:off x="7818120" y="1691640"/>
+            <a:ext cx="548640" cy="548640"/>
+          </a:xfrm>
+          <a:prstGeom prst="rect">
+            <a:avLst/>
+          </a:prstGeom>
+        </p:spPr>
+      </p:pic>
+      <p:sp>
+        <p:nvSpPr>
+          <p:cNvPr id="23" name="Text 16"/>
+          <p:cNvSpPr/>
+          <p:nvPr/>
+        </p:nvSpPr>
+        <p:spPr>
+          <a:xfrm>
+            <a:off x="7360920" y="2377440"/>
+            <a:ext cx="1463040" cy="365760"/>
+          </a:xfrm>
+          <a:prstGeom prst="rect">
+            <a:avLst/>
+          </a:prstGeom>
+          <a:noFill/>
+          <a:ln/>
+        </p:spPr>
+        <p:txBody>
+          <a:bodyPr wrap="square" rtlCol="0" anchor="ctr"/>
+          <a:lstStyle/>
+          <a:p>
+            <a:pPr marL="0" indent="0" algn="ctr">
+              <a:buNone/>
+            </a:pPr>
+            <a:r>
+              <a:rPr lang="en-US" sz="1300" b="1" dirty="0">
+                <a:solidFill>
+                  <a:srgbClr val="FFFFFF"/>
+                </a:solidFill>
+                <a:latin typeface="Calibri" pitchFamily="34" charset="0"/>
+                <a:ea typeface="Calibri" pitchFamily="34" charset="-122"/>
+                <a:cs typeface="Calibri" pitchFamily="34" charset="-120"/>
+              </a:rPr>
+              <a:t>Code CLI</a:t>
+            </a:r>
+            <a:endParaRPr lang="en-US" sz="1300" dirty="0"/>
+          </a:p>
+        </p:txBody>
+      </p:sp>
+      <p:sp>
+        <p:nvSpPr>
+          <p:cNvPr id="24" name="Text 17"/>
+          <p:cNvSpPr/>
+          <p:nvPr/>
+        </p:nvSpPr>
+        <p:spPr>
+          <a:xfrm>
+            <a:off x="7360920" y="2788920"/>
+            <a:ext cx="1463040" cy="731520"/>
+          </a:xfrm>
+          <a:prstGeom prst="rect">
+            <a:avLst/>
+          </a:prstGeom>
+          <a:noFill/>
+          <a:ln/>
+        </p:spPr>
+        <p:txBody>
+          <a:bodyPr wrap="square" rtlCol="0" anchor="t"/>
+          <a:lstStyle/>
+          <a:p>
+            <a:pPr marL="0" indent="0" algn="ctr">
+              <a:buNone/>
+            </a:pPr>
+            <a:r>
+              <a:rPr lang="en-US" sz="1000" dirty="0">
+                <a:solidFill>
+                  <a:srgbClr val="CADCFC"/>
+                </a:solidFill>
+                <a:latin typeface="Calibri" pitchFamily="34" charset="0"/>
+                <a:ea typeface="Calibri" pitchFamily="34" charset="-122"/>
+                <a:cs typeface="Calibri" pitchFamily="34" charset="-120"/>
+              </a:rPr>
+              <a:t>Terminal-based</a:t>
+            </a:r>
+            <a:endParaRPr lang="en-US" sz="1000" dirty="0"/>
+          </a:p>
+          <a:p>
+            <a:pPr marL="0" indent="0" algn="ctr">
+              <a:buNone/>
+            </a:pPr>
+            <a:r>
+              <a:rPr lang="en-US" sz="1000" dirty="0">
+                <a:solidFill>
+                  <a:srgbClr val="CADCFC"/>
+                </a:solidFill>
+                <a:latin typeface="Calibri" pitchFamily="34" charset="0"/>
+                <a:ea typeface="Calibri" pitchFamily="34" charset="-122"/>
+                <a:cs typeface="Calibri" pitchFamily="34" charset="-120"/>
+              </a:rPr>
               <a:t>Full agentic</a:t>
             </a:r>
             <a:endParaRPr lang="en-US" sz="1000" dirty="0"/>
@@ -12584,7 +12816,7 @@
           <a:bodyPr wrap="square" rtlCol="0" anchor="ctr"/>
           <a:lstStyle/>
           <a:p>
-            <a:pPr algn="ctr" indent="0" marL="0">
+            <a:pPr marL="0" indent="0" algn="ctr">
               <a:buNone/>
             </a:pPr>
             <a:r>
@@ -12618,6 +12850,7 @@
         <a:solidFill>
           <a:srgbClr val="F0F4F8"/>
         </a:solidFill>
+        <a:effectLst/>
       </p:bgPr>
     </p:bg>
     <p:spTree>
@@ -12653,6 +12886,13 @@
           </a:solidFill>
           <a:ln/>
         </p:spPr>
+        <p:txBody>
+          <a:bodyPr/>
+          <a:lstStyle/>
+          <a:p>
+            <a:endParaRPr lang="en-US"/>
+          </a:p>
+        </p:txBody>
       </p:sp>
       <p:sp>
         <p:nvSpPr>
@@ -12675,7 +12915,7 @@
           <a:bodyPr wrap="square" rtlCol="0" anchor="ctr"/>
           <a:lstStyle/>
           <a:p>
-            <a:pPr indent="0" marL="0">
+            <a:pPr marL="0" indent="0">
               <a:buNone/>
             </a:pPr>
             <a:r>
@@ -12712,13 +12952,20 @@
           </a:solidFill>
           <a:ln/>
           <a:effectLst>
-            <a:outerShdw sx="100000" sy="100000" kx="0" ky="0" algn="bl" rotWithShape="0" blurRad="101600" dist="38100" dir="8100000">
+            <a:outerShdw blurRad="101600" dist="38100" dir="8100000" algn="bl" rotWithShape="0">
               <a:srgbClr val="000000">
                 <a:alpha val="12000"/>
               </a:srgbClr>
             </a:outerShdw>
           </a:effectLst>
         </p:spPr>
+        <p:txBody>
+          <a:bodyPr/>
+          <a:lstStyle/>
+          <a:p>
+            <a:endParaRPr lang="en-US"/>
+          </a:p>
+        </p:txBody>
       </p:sp>
       <p:sp>
         <p:nvSpPr>
@@ -12739,17 +12986,24 @@
           </a:solidFill>
           <a:ln/>
         </p:spPr>
+        <p:txBody>
+          <a:bodyPr/>
+          <a:lstStyle/>
+          <a:p>
+            <a:endParaRPr lang="en-US"/>
+          </a:p>
+        </p:txBody>
       </p:sp>
       <p:pic>
         <p:nvPicPr>
-          <p:cNvPr id="6" name="Image 0" descr="preencoded.png">    </p:cNvPr>
+          <p:cNvPr id="6" name="Image 0" descr="preencoded.png"/>
           <p:cNvPicPr>
             <a:picLocks noChangeAspect="1"/>
           </p:cNvPicPr>
           <p:nvPr/>
         </p:nvPicPr>
         <p:blipFill>
-          <a:blip r:embed="rId1"/>
+          <a:blip r:embed="rId3"/>
           <a:stretch>
             <a:fillRect/>
           </a:stretch>
@@ -12785,7 +13039,7 @@
           <a:bodyPr wrap="square" lIns="0" tIns="0" rIns="0" bIns="0" rtlCol="0" anchor="ctr"/>
           <a:lstStyle/>
           <a:p>
-            <a:pPr indent="0" marL="0">
+            <a:pPr marL="0" indent="0">
               <a:buNone/>
             </a:pPr>
             <a:r>
@@ -12824,7 +13078,7 @@
           <a:bodyPr wrap="square" rtlCol="0" anchor="t"/>
           <a:lstStyle/>
           <a:p>
-            <a:pPr indent="0" marL="0">
+            <a:pPr marL="0" indent="0">
               <a:buNone/>
             </a:pPr>
             <a:r>
@@ -12841,7 +13095,7 @@
             <a:endParaRPr lang="en-US" sz="1200" dirty="0"/>
           </a:p>
           <a:p>
-            <a:pPr indent="0" marL="0">
+            <a:pPr marL="0" indent="0">
               <a:buNone/>
             </a:pPr>
             <a:r>
@@ -12858,13 +13112,13 @@
             <a:endParaRPr lang="en-US" sz="1200" dirty="0"/>
           </a:p>
           <a:p>
-            <a:pPr indent="0" marL="0">
+            <a:pPr marL="0" indent="0">
               <a:buNone/>
             </a:pPr>
             <a:endParaRPr lang="en-US" sz="1200" dirty="0"/>
           </a:p>
           <a:p>
-            <a:pPr indent="0" marL="0">
+            <a:pPr marL="0" indent="0">
               <a:buNone/>
             </a:pPr>
             <a:r>
@@ -12881,7 +13135,7 @@
             <a:endParaRPr lang="en-US" sz="1200" dirty="0"/>
           </a:p>
           <a:p>
-            <a:pPr indent="0" marL="0">
+            <a:pPr marL="0" indent="0">
               <a:buNone/>
             </a:pPr>
             <a:r>
@@ -12898,13 +13152,13 @@
             <a:endParaRPr lang="en-US" sz="1200" dirty="0"/>
           </a:p>
           <a:p>
-            <a:pPr indent="0" marL="0">
+            <a:pPr marL="0" indent="0">
               <a:buNone/>
             </a:pPr>
             <a:endParaRPr lang="en-US" sz="1200" dirty="0"/>
           </a:p>
           <a:p>
-            <a:pPr indent="0" marL="0">
+            <a:pPr marL="0" indent="0">
               <a:buNone/>
             </a:pPr>
             <a:r>
@@ -12921,7 +13175,7 @@
             <a:endParaRPr lang="en-US" sz="1200" dirty="0"/>
           </a:p>
           <a:p>
-            <a:pPr indent="0" marL="0">
+            <a:pPr marL="0" indent="0">
               <a:buNone/>
             </a:pPr>
             <a:r>
@@ -12938,13 +13192,13 @@
             <a:endParaRPr lang="en-US" sz="1200" dirty="0"/>
           </a:p>
           <a:p>
-            <a:pPr indent="0" marL="0">
+            <a:pPr marL="0" indent="0">
               <a:buNone/>
             </a:pPr>
             <a:endParaRPr lang="en-US" sz="1200" dirty="0"/>
           </a:p>
           <a:p>
-            <a:pPr indent="0" marL="0">
+            <a:pPr marL="0" indent="0">
               <a:buNone/>
             </a:pPr>
             <a:r>
@@ -12961,7 +13215,7 @@
             <a:endParaRPr lang="en-US" sz="1200" dirty="0"/>
           </a:p>
           <a:p>
-            <a:pPr indent="0" marL="0">
+            <a:pPr marL="0" indent="0">
               <a:buNone/>
             </a:pPr>
             <a:r>
@@ -12998,13 +13252,20 @@
           </a:solidFill>
           <a:ln/>
           <a:effectLst>
-            <a:outerShdw sx="100000" sy="100000" kx="0" ky="0" algn="bl" rotWithShape="0" blurRad="101600" dist="38100" dir="8100000">
+            <a:outerShdw blurRad="101600" dist="38100" dir="8100000" algn="bl" rotWithShape="0">
               <a:srgbClr val="000000">
                 <a:alpha val="12000"/>
               </a:srgbClr>
             </a:outerShdw>
           </a:effectLst>
         </p:spPr>
+        <p:txBody>
+          <a:bodyPr/>
+          <a:lstStyle/>
+          <a:p>
+            <a:endParaRPr lang="en-US"/>
+          </a:p>
+        </p:txBody>
       </p:sp>
       <p:sp>
         <p:nvSpPr>
@@ -13025,17 +13286,24 @@
           </a:solidFill>
           <a:ln/>
         </p:spPr>
+        <p:txBody>
+          <a:bodyPr/>
+          <a:lstStyle/>
+          <a:p>
+            <a:endParaRPr lang="en-US"/>
+          </a:p>
+        </p:txBody>
       </p:sp>
       <p:pic>
         <p:nvPicPr>
-          <p:cNvPr id="11" name="Image 1" descr="preencoded.png">    </p:cNvPr>
+          <p:cNvPr id="11" name="Image 1" descr="preencoded.png"/>
           <p:cNvPicPr>
             <a:picLocks noChangeAspect="1"/>
           </p:cNvPicPr>
           <p:nvPr/>
         </p:nvPicPr>
         <p:blipFill>
-          <a:blip r:embed="rId2"/>
+          <a:blip r:embed="rId4"/>
           <a:stretch>
             <a:fillRect/>
           </a:stretch>
@@ -13071,7 +13339,7 @@
           <a:bodyPr wrap="square" lIns="0" tIns="0" rIns="0" bIns="0" rtlCol="0" anchor="ctr"/>
           <a:lstStyle/>
           <a:p>
-            <a:pPr indent="0" marL="0">
+            <a:pPr marL="0" indent="0">
               <a:buNone/>
             </a:pPr>
             <a:r>
@@ -13110,7 +13378,7 @@
           <a:bodyPr wrap="square" rtlCol="0" anchor="t"/>
           <a:lstStyle/>
           <a:p>
-            <a:pPr indent="0" marL="0">
+            <a:pPr marL="0" indent="0">
               <a:buNone/>
             </a:pPr>
             <a:r>
@@ -13127,13 +13395,13 @@
             <a:endParaRPr lang="en-US" sz="1200" dirty="0"/>
           </a:p>
           <a:p>
-            <a:pPr indent="0" marL="0">
+            <a:pPr marL="0" indent="0">
               <a:buNone/>
             </a:pPr>
             <a:endParaRPr lang="en-US" sz="1200" dirty="0"/>
           </a:p>
           <a:p>
-            <a:pPr indent="0" marL="0">
+            <a:pPr marL="0" indent="0">
               <a:buNone/>
             </a:pPr>
             <a:r>
@@ -13150,7 +13418,7 @@
             <a:endParaRPr lang="en-US" sz="1200" dirty="0"/>
           </a:p>
           <a:p>
-            <a:pPr indent="0" marL="0">
+            <a:pPr marL="0" indent="0">
               <a:buNone/>
             </a:pPr>
             <a:r>
@@ -13167,13 +13435,13 @@
             <a:endParaRPr lang="en-US" sz="1200" dirty="0"/>
           </a:p>
           <a:p>
-            <a:pPr indent="0" marL="0">
+            <a:pPr marL="0" indent="0">
               <a:buNone/>
             </a:pPr>
             <a:endParaRPr lang="en-US" sz="1200" dirty="0"/>
           </a:p>
           <a:p>
-            <a:pPr indent="0" marL="0">
+            <a:pPr marL="0" indent="0">
               <a:buNone/>
             </a:pPr>
             <a:r>
@@ -13190,7 +13458,7 @@
             <a:endParaRPr lang="en-US" sz="1200" dirty="0"/>
           </a:p>
           <a:p>
-            <a:pPr indent="0" marL="0">
+            <a:pPr marL="0" indent="0">
               <a:buNone/>
             </a:pPr>
             <a:r>
@@ -13207,13 +13475,13 @@
             <a:endParaRPr lang="en-US" sz="1200" dirty="0"/>
           </a:p>
           <a:p>
-            <a:pPr indent="0" marL="0">
+            <a:pPr marL="0" indent="0">
               <a:buNone/>
             </a:pPr>
             <a:endParaRPr lang="en-US" sz="1200" dirty="0"/>
           </a:p>
           <a:p>
-            <a:pPr indent="0" marL="0">
+            <a:pPr marL="0" indent="0">
               <a:buNone/>
             </a:pPr>
             <a:r>
@@ -13230,7 +13498,7 @@
             <a:endParaRPr lang="en-US" sz="1200" dirty="0"/>
           </a:p>
           <a:p>
-            <a:pPr indent="0" marL="0">
+            <a:pPr marL="0" indent="0">
               <a:buNone/>
             </a:pPr>
             <a:r>
@@ -13269,7 +13537,7 @@
           <a:bodyPr wrap="square" rtlCol="0" anchor="ctr"/>
           <a:lstStyle/>
           <a:p>
-            <a:pPr indent="0" marL="0">
+            <a:pPr marL="0" indent="0">
               <a:buNone/>
             </a:pPr>
             <a:r>
@@ -13303,6 +13571,7 @@
         <a:solidFill>
           <a:srgbClr val="1E2761"/>
         </a:solidFill>
+        <a:effectLst/>
       </p:bgPr>
     </p:bg>
     <p:spTree>
@@ -13338,6 +13607,13 @@
           </a:solidFill>
           <a:ln/>
         </p:spPr>
+        <p:txBody>
+          <a:bodyPr/>
+          <a:lstStyle/>
+          <a:p>
+            <a:endParaRPr lang="en-US"/>
+          </a:p>
+        </p:txBody>
       </p:sp>
       <p:sp>
         <p:nvSpPr>
@@ -13360,11 +13636,11 @@
           <a:bodyPr wrap="square" rtlCol="0" anchor="ctr"/>
           <a:lstStyle/>
           <a:p>
-            <a:pPr indent="0" marL="0">
-              <a:buNone/>
-            </a:pPr>
-            <a:r>
-              <a:rPr lang="en-US" sz="1400" b="1" spc="500" kern="0" dirty="0">
+            <a:pPr marL="0" indent="0">
+              <a:buNone/>
+            </a:pPr>
+            <a:r>
+              <a:rPr lang="en-US" sz="1400" b="1" kern="0" spc="500" dirty="0">
                 <a:solidFill>
                   <a:srgbClr val="0891B2"/>
                 </a:solidFill>
@@ -13399,7 +13675,7 @@
           <a:bodyPr wrap="square" rtlCol="0" anchor="ctr"/>
           <a:lstStyle/>
           <a:p>
-            <a:pPr indent="0" marL="0">
+            <a:pPr marL="0" indent="0">
               <a:buNone/>
             </a:pPr>
             <a:r>
@@ -13419,14 +13695,14 @@
       </p:sp>
       <p:pic>
         <p:nvPicPr>
-          <p:cNvPr id="5" name="Image 0" descr="preencoded.png">    </p:cNvPr>
+          <p:cNvPr id="5" name="Image 0" descr="preencoded.png"/>
           <p:cNvPicPr>
             <a:picLocks noChangeAspect="1"/>
           </p:cNvPicPr>
           <p:nvPr/>
         </p:nvPicPr>
         <p:blipFill>
-          <a:blip r:embed="rId1"/>
+          <a:blip r:embed="rId3"/>
           <a:stretch>
             <a:fillRect/>
           </a:stretch>
@@ -13462,7 +13738,7 @@
           <a:bodyPr wrap="square" rtlCol="0" anchor="ctr"/>
           <a:lstStyle/>
           <a:p>
-            <a:pPr indent="0" marL="0">
+            <a:pPr marL="0" indent="0">
               <a:buNone/>
             </a:pPr>
             <a:r>
@@ -13499,13 +13775,20 @@
           </a:solidFill>
           <a:ln/>
           <a:effectLst>
-            <a:outerShdw sx="100000" sy="100000" kx="0" ky="0" algn="bl" rotWithShape="0" blurRad="101600" dist="38100" dir="8100000">
+            <a:outerShdw blurRad="101600" dist="38100" dir="8100000" algn="bl" rotWithShape="0">
               <a:srgbClr val="000000">
                 <a:alpha val="12000"/>
               </a:srgbClr>
             </a:outerShdw>
           </a:effectLst>
         </p:spPr>
+        <p:txBody>
+          <a:bodyPr/>
+          <a:lstStyle/>
+          <a:p>
+            <a:endParaRPr lang="en-US"/>
+          </a:p>
+        </p:txBody>
       </p:sp>
       <p:sp>
         <p:nvSpPr>
@@ -13528,7 +13811,7 @@
           <a:bodyPr wrap="square" lIns="0" tIns="0" rIns="0" bIns="0" rtlCol="0" anchor="ctr"/>
           <a:lstStyle/>
           <a:p>
-            <a:pPr indent="0" marL="0">
+            <a:pPr marL="0" indent="0">
               <a:buNone/>
             </a:pPr>
             <a:r>
@@ -13567,7 +13850,7 @@
           <a:bodyPr wrap="square" lIns="0" tIns="0" rIns="0" bIns="0" rtlCol="0" anchor="ctr"/>
           <a:lstStyle/>
           <a:p>
-            <a:pPr indent="0" marL="0">
+            <a:pPr marL="0" indent="0">
               <a:buNone/>
             </a:pPr>
             <a:r>
@@ -13604,13 +13887,20 @@
           </a:solidFill>
           <a:ln/>
           <a:effectLst>
-            <a:outerShdw sx="100000" sy="100000" kx="0" ky="0" algn="bl" rotWithShape="0" blurRad="101600" dist="38100" dir="8100000">
+            <a:outerShdw blurRad="101600" dist="38100" dir="8100000" algn="bl" rotWithShape="0">
               <a:srgbClr val="000000">
                 <a:alpha val="12000"/>
               </a:srgbClr>
             </a:outerShdw>
           </a:effectLst>
         </p:spPr>
+        <p:txBody>
+          <a:bodyPr/>
+          <a:lstStyle/>
+          <a:p>
+            <a:endParaRPr lang="en-US"/>
+          </a:p>
+        </p:txBody>
       </p:sp>
       <p:sp>
         <p:nvSpPr>
@@ -13633,7 +13923,7 @@
           <a:bodyPr wrap="square" lIns="0" tIns="0" rIns="0" bIns="0" rtlCol="0" anchor="ctr"/>
           <a:lstStyle/>
           <a:p>
-            <a:pPr indent="0" marL="0">
+            <a:pPr marL="0" indent="0">
               <a:buNone/>
             </a:pPr>
             <a:r>
@@ -13672,7 +13962,7 @@
           <a:bodyPr wrap="square" lIns="0" tIns="0" rIns="0" bIns="0" rtlCol="0" anchor="ctr"/>
           <a:lstStyle/>
           <a:p>
-            <a:pPr indent="0" marL="0">
+            <a:pPr marL="0" indent="0">
               <a:buNone/>
             </a:pPr>
             <a:r>
@@ -13709,13 +13999,20 @@
           </a:solidFill>
           <a:ln/>
           <a:effectLst>
-            <a:outerShdw sx="100000" sy="100000" kx="0" ky="0" algn="bl" rotWithShape="0" blurRad="101600" dist="38100" dir="8100000">
+            <a:outerShdw blurRad="101600" dist="38100" dir="8100000" algn="bl" rotWithShape="0">
               <a:srgbClr val="000000">
                 <a:alpha val="12000"/>
               </a:srgbClr>
             </a:outerShdw>
           </a:effectLst>
         </p:spPr>
+        <p:txBody>
+          <a:bodyPr/>
+          <a:lstStyle/>
+          <a:p>
+            <a:endParaRPr lang="en-US"/>
+          </a:p>
+        </p:txBody>
       </p:sp>
       <p:sp>
         <p:nvSpPr>
@@ -13738,7 +14035,7 @@
           <a:bodyPr wrap="square" lIns="0" tIns="0" rIns="0" bIns="0" rtlCol="0" anchor="ctr"/>
           <a:lstStyle/>
           <a:p>
-            <a:pPr indent="0" marL="0">
+            <a:pPr marL="0" indent="0">
               <a:buNone/>
             </a:pPr>
             <a:r>
@@ -13777,7 +14074,7 @@
           <a:bodyPr wrap="square" lIns="0" tIns="0" rIns="0" bIns="0" rtlCol="0" anchor="ctr"/>
           <a:lstStyle/>
           <a:p>
-            <a:pPr indent="0" marL="0">
+            <a:pPr marL="0" indent="0">
               <a:buNone/>
             </a:pPr>
             <a:r>
@@ -13814,13 +14111,20 @@
           </a:solidFill>
           <a:ln/>
           <a:effectLst>
-            <a:outerShdw sx="100000" sy="100000" kx="0" ky="0" algn="bl" rotWithShape="0" blurRad="101600" dist="38100" dir="8100000">
+            <a:outerShdw blurRad="101600" dist="38100" dir="8100000" algn="bl" rotWithShape="0">
               <a:srgbClr val="000000">
                 <a:alpha val="12000"/>
               </a:srgbClr>
             </a:outerShdw>
           </a:effectLst>
         </p:spPr>
+        <p:txBody>
+          <a:bodyPr/>
+          <a:lstStyle/>
+          <a:p>
+            <a:endParaRPr lang="en-US"/>
+          </a:p>
+        </p:txBody>
       </p:sp>
       <p:sp>
         <p:nvSpPr>
@@ -13843,7 +14147,7 @@
           <a:bodyPr wrap="square" lIns="0" tIns="0" rIns="0" bIns="0" rtlCol="0" anchor="ctr"/>
           <a:lstStyle/>
           <a:p>
-            <a:pPr indent="0" marL="0">
+            <a:pPr marL="0" indent="0">
               <a:buNone/>
             </a:pPr>
             <a:r>
@@ -13882,7 +14186,7 @@
           <a:bodyPr wrap="square" lIns="0" tIns="0" rIns="0" bIns="0" rtlCol="0" anchor="ctr"/>
           <a:lstStyle/>
           <a:p>
-            <a:pPr indent="0" marL="0">
+            <a:pPr marL="0" indent="0">
               <a:buNone/>
             </a:pPr>
             <a:r>
@@ -13919,13 +14223,20 @@
           </a:solidFill>
           <a:ln/>
           <a:effectLst>
-            <a:outerShdw sx="100000" sy="100000" kx="0" ky="0" algn="bl" rotWithShape="0" blurRad="101600" dist="38100" dir="8100000">
+            <a:outerShdw blurRad="101600" dist="38100" dir="8100000" algn="bl" rotWithShape="0">
               <a:srgbClr val="000000">
                 <a:alpha val="12000"/>
               </a:srgbClr>
             </a:outerShdw>
           </a:effectLst>
         </p:spPr>
+        <p:txBody>
+          <a:bodyPr/>
+          <a:lstStyle/>
+          <a:p>
+            <a:endParaRPr lang="en-US"/>
+          </a:p>
+        </p:txBody>
       </p:sp>
       <p:sp>
         <p:nvSpPr>
@@ -13948,7 +14259,7 @@
           <a:bodyPr wrap="square" lIns="0" tIns="0" rIns="0" bIns="0" rtlCol="0" anchor="ctr"/>
           <a:lstStyle/>
           <a:p>
-            <a:pPr indent="0" marL="0">
+            <a:pPr marL="0" indent="0">
               <a:buNone/>
             </a:pPr>
             <a:r>
@@ -13987,7 +14298,7 @@
           <a:bodyPr wrap="square" lIns="0" tIns="0" rIns="0" bIns="0" rtlCol="0" anchor="ctr"/>
           <a:lstStyle/>
           <a:p>
-            <a:pPr indent="0" marL="0">
+            <a:pPr marL="0" indent="0">
               <a:buNone/>
             </a:pPr>
             <a:r>
@@ -14024,13 +14335,20 @@
           </a:solidFill>
           <a:ln/>
           <a:effectLst>
-            <a:outerShdw sx="100000" sy="100000" kx="0" ky="0" algn="bl" rotWithShape="0" blurRad="101600" dist="38100" dir="8100000">
+            <a:outerShdw blurRad="101600" dist="38100" dir="8100000" algn="bl" rotWithShape="0">
               <a:srgbClr val="000000">
                 <a:alpha val="12000"/>
               </a:srgbClr>
             </a:outerShdw>
           </a:effectLst>
         </p:spPr>
+        <p:txBody>
+          <a:bodyPr/>
+          <a:lstStyle/>
+          <a:p>
+            <a:endParaRPr lang="en-US"/>
+          </a:p>
+        </p:txBody>
       </p:sp>
       <p:sp>
         <p:nvSpPr>
@@ -14053,7 +14371,7 @@
           <a:bodyPr wrap="square" lIns="0" tIns="0" rIns="0" bIns="0" rtlCol="0" anchor="ctr"/>
           <a:lstStyle/>
           <a:p>
-            <a:pPr indent="0" marL="0">
+            <a:pPr marL="0" indent="0">
               <a:buNone/>
             </a:pPr>
             <a:r>
@@ -14092,7 +14410,7 @@
           <a:bodyPr wrap="square" lIns="0" tIns="0" rIns="0" bIns="0" rtlCol="0" anchor="ctr"/>
           <a:lstStyle/>
           <a:p>
-            <a:pPr indent="0" marL="0">
+            <a:pPr marL="0" indent="0">
               <a:buNone/>
             </a:pPr>
             <a:r>
@@ -14131,7 +14449,7 @@
           <a:bodyPr wrap="square" rtlCol="0" anchor="ctr"/>
           <a:lstStyle/>
           <a:p>
-            <a:pPr indent="0" marL="0">
+            <a:pPr marL="0" indent="0">
               <a:buNone/>
             </a:pPr>
             <a:r>
@@ -14165,6 +14483,7 @@
         <a:solidFill>
           <a:srgbClr val="F0F4F8"/>
         </a:solidFill>
+        <a:effectLst/>
       </p:bgPr>
     </p:bg>
     <p:spTree>
@@ -14200,6 +14519,13 @@
           </a:solidFill>
           <a:ln/>
         </p:spPr>
+        <p:txBody>
+          <a:bodyPr/>
+          <a:lstStyle/>
+          <a:p>
+            <a:endParaRPr lang="en-US"/>
+          </a:p>
+        </p:txBody>
       </p:sp>
       <p:sp>
         <p:nvSpPr>
@@ -14222,7 +14548,7 @@
           <a:bodyPr wrap="square" rtlCol="0" anchor="ctr"/>
           <a:lstStyle/>
           <a:p>
-            <a:pPr indent="0" marL="0">
+            <a:pPr marL="0" indent="0">
               <a:buNone/>
             </a:pPr>
             <a:r>
@@ -14259,13 +14585,20 @@
           </a:solidFill>
           <a:ln/>
           <a:effectLst>
-            <a:outerShdw sx="100000" sy="100000" kx="0" ky="0" algn="bl" rotWithShape="0" blurRad="101600" dist="38100" dir="8100000">
+            <a:outerShdw blurRad="101600" dist="38100" dir="8100000" algn="bl" rotWithShape="0">
               <a:srgbClr val="000000">
                 <a:alpha val="12000"/>
               </a:srgbClr>
             </a:outerShdw>
           </a:effectLst>
         </p:spPr>
+        <p:txBody>
+          <a:bodyPr/>
+          <a:lstStyle/>
+          <a:p>
+            <a:endParaRPr lang="en-US"/>
+          </a:p>
+        </p:txBody>
       </p:sp>
       <p:sp>
         <p:nvSpPr>
@@ -14286,17 +14619,24 @@
           </a:solidFill>
           <a:ln/>
         </p:spPr>
+        <p:txBody>
+          <a:bodyPr/>
+          <a:lstStyle/>
+          <a:p>
+            <a:endParaRPr lang="en-US"/>
+          </a:p>
+        </p:txBody>
       </p:sp>
       <p:pic>
         <p:nvPicPr>
-          <p:cNvPr id="6" name="Image 0" descr="preencoded.png">    </p:cNvPr>
+          <p:cNvPr id="6" name="Image 0" descr="preencoded.png"/>
           <p:cNvPicPr>
             <a:picLocks noChangeAspect="1"/>
           </p:cNvPicPr>
           <p:nvPr/>
         </p:nvPicPr>
         <p:blipFill>
-          <a:blip r:embed="rId1"/>
+          <a:blip r:embed="rId3"/>
           <a:stretch>
             <a:fillRect/>
           </a:stretch>
@@ -14332,7 +14672,7 @@
           <a:bodyPr wrap="square" lIns="0" tIns="0" rIns="0" bIns="0" rtlCol="0" anchor="ctr"/>
           <a:lstStyle/>
           <a:p>
-            <a:pPr indent="0" marL="0">
+            <a:pPr marL="0" indent="0">
               <a:buNone/>
             </a:pPr>
             <a:r>
@@ -14371,7 +14711,7 @@
           <a:bodyPr wrap="square" lIns="0" tIns="0" rIns="0" bIns="0" rtlCol="0" anchor="ctr"/>
           <a:lstStyle/>
           <a:p>
-            <a:pPr indent="0" marL="0">
+            <a:pPr marL="0" indent="0">
               <a:buNone/>
             </a:pPr>
             <a:r>
@@ -14408,6 +14748,13 @@
           </a:solidFill>
           <a:ln/>
         </p:spPr>
+        <p:txBody>
+          <a:bodyPr/>
+          <a:lstStyle/>
+          <a:p>
+            <a:endParaRPr lang="en-US"/>
+          </a:p>
+        </p:txBody>
       </p:sp>
       <p:sp>
         <p:nvSpPr>
@@ -14430,7 +14777,7 @@
           <a:bodyPr wrap="square" lIns="0" tIns="0" rIns="0" bIns="0" rtlCol="0" anchor="ctr"/>
           <a:lstStyle/>
           <a:p>
-            <a:pPr indent="0" marL="0">
+            <a:pPr marL="0" indent="0">
               <a:buNone/>
             </a:pPr>
             <a:r>
@@ -14469,7 +14816,7 @@
           <a:bodyPr wrap="square" lIns="0" tIns="0" rIns="0" bIns="0" rtlCol="0" anchor="ctr"/>
           <a:lstStyle/>
           <a:p>
-            <a:pPr indent="0" marL="0">
+            <a:pPr marL="0" indent="0">
               <a:buNone/>
             </a:pPr>
             <a:r>
@@ -14506,6 +14853,13 @@
           </a:solidFill>
           <a:ln/>
         </p:spPr>
+        <p:txBody>
+          <a:bodyPr/>
+          <a:lstStyle/>
+          <a:p>
+            <a:endParaRPr lang="en-US"/>
+          </a:p>
+        </p:txBody>
       </p:sp>
       <p:sp>
         <p:nvSpPr>
@@ -14528,7 +14882,7 @@
           <a:bodyPr wrap="square" lIns="0" tIns="0" rIns="0" bIns="0" rtlCol="0" anchor="ctr"/>
           <a:lstStyle/>
           <a:p>
-            <a:pPr indent="0" marL="0">
+            <a:pPr marL="0" indent="0">
               <a:buNone/>
             </a:pPr>
             <a:r>
@@ -14567,7 +14921,7 @@
           <a:bodyPr wrap="square" lIns="0" tIns="0" rIns="0" bIns="0" rtlCol="0" anchor="ctr"/>
           <a:lstStyle/>
           <a:p>
-            <a:pPr indent="0" marL="0">
+            <a:pPr marL="0" indent="0">
               <a:buNone/>
             </a:pPr>
             <a:r>
@@ -14604,6 +14958,13 @@
           </a:solidFill>
           <a:ln/>
         </p:spPr>
+        <p:txBody>
+          <a:bodyPr/>
+          <a:lstStyle/>
+          <a:p>
+            <a:endParaRPr lang="en-US"/>
+          </a:p>
+        </p:txBody>
       </p:sp>
       <p:sp>
         <p:nvSpPr>
@@ -14626,7 +14987,7 @@
           <a:bodyPr wrap="square" lIns="0" tIns="0" rIns="0" bIns="0" rtlCol="0" anchor="ctr"/>
           <a:lstStyle/>
           <a:p>
-            <a:pPr indent="0" marL="0">
+            <a:pPr marL="0" indent="0">
               <a:buNone/>
             </a:pPr>
             <a:r>
@@ -14665,7 +15026,7 @@
           <a:bodyPr wrap="square" lIns="0" tIns="0" rIns="0" bIns="0" rtlCol="0" anchor="ctr"/>
           <a:lstStyle/>
           <a:p>
-            <a:pPr indent="0" marL="0">
+            <a:pPr marL="0" indent="0">
               <a:buNone/>
             </a:pPr>
             <a:r>
@@ -14702,13 +15063,20 @@
           </a:solidFill>
           <a:ln/>
           <a:effectLst>
-            <a:outerShdw sx="100000" sy="100000" kx="0" ky="0" algn="bl" rotWithShape="0" blurRad="101600" dist="38100" dir="8100000">
+            <a:outerShdw blurRad="101600" dist="38100" dir="8100000" algn="bl" rotWithShape="0">
               <a:srgbClr val="000000">
                 <a:alpha val="12000"/>
               </a:srgbClr>
             </a:outerShdw>
           </a:effectLst>
         </p:spPr>
+        <p:txBody>
+          <a:bodyPr/>
+          <a:lstStyle/>
+          <a:p>
+            <a:endParaRPr lang="en-US"/>
+          </a:p>
+        </p:txBody>
       </p:sp>
       <p:sp>
         <p:nvSpPr>
@@ -14729,17 +15097,24 @@
           </a:solidFill>
           <a:ln/>
         </p:spPr>
+        <p:txBody>
+          <a:bodyPr/>
+          <a:lstStyle/>
+          <a:p>
+            <a:endParaRPr lang="en-US"/>
+          </a:p>
+        </p:txBody>
       </p:sp>
       <p:pic>
         <p:nvPicPr>
-          <p:cNvPr id="20" name="Image 1" descr="preencoded.png">    </p:cNvPr>
+          <p:cNvPr id="20" name="Image 1" descr="preencoded.png"/>
           <p:cNvPicPr>
             <a:picLocks noChangeAspect="1"/>
           </p:cNvPicPr>
           <p:nvPr/>
         </p:nvPicPr>
         <p:blipFill>
-          <a:blip r:embed="rId2"/>
+          <a:blip r:embed="rId4"/>
           <a:stretch>
             <a:fillRect/>
           </a:stretch>
@@ -14775,7 +15150,7 @@
           <a:bodyPr wrap="square" lIns="0" tIns="0" rIns="0" bIns="0" rtlCol="0" anchor="ctr"/>
           <a:lstStyle/>
           <a:p>
-            <a:pPr indent="0" marL="0">
+            <a:pPr marL="0" indent="0">
               <a:buNone/>
             </a:pPr>
             <a:r>
@@ -14814,7 +15189,7 @@
           <a:bodyPr wrap="square" lIns="0" tIns="0" rIns="0" bIns="0" rtlCol="0" anchor="ctr"/>
           <a:lstStyle/>
           <a:p>
-            <a:pPr indent="0" marL="0">
+            <a:pPr marL="0" indent="0">
               <a:buNone/>
             </a:pPr>
             <a:r>
@@ -14980,7 +15355,7 @@
           <a:bodyPr wrap="square" rtlCol="0" anchor="ctr"/>
           <a:lstStyle/>
           <a:p>
-            <a:pPr algn="ctr" indent="0" marL="0">
+            <a:pPr marL="0" indent="0" algn="ctr">
               <a:buNone/>
             </a:pPr>
             <a:r>
@@ -15014,6 +15389,7 @@
         <a:solidFill>
           <a:srgbClr val="F0F4F8"/>
         </a:solidFill>
+        <a:effectLst/>
       </p:bgPr>
     </p:bg>
     <p:spTree>
@@ -15049,6 +15425,13 @@
           </a:solidFill>
           <a:ln/>
         </p:spPr>
+        <p:txBody>
+          <a:bodyPr/>
+          <a:lstStyle/>
+          <a:p>
+            <a:endParaRPr lang="en-US"/>
+          </a:p>
+        </p:txBody>
       </p:sp>
       <p:sp>
         <p:nvSpPr>
@@ -15071,7 +15454,7 @@
           <a:bodyPr wrap="square" rtlCol="0" anchor="ctr"/>
           <a:lstStyle/>
           <a:p>
-            <a:pPr indent="0" marL="0">
+            <a:pPr marL="0" indent="0">
               <a:buNone/>
             </a:pPr>
             <a:r>
@@ -15098,22 +15481,34 @@
           <p:nvPr>
             <p:extLst>
               <p:ext uri="{D42A27DB-BD31-4B8C-83A1-F6EECF244321}">
-                <p14:modId xmlns:p14="http://schemas.microsoft.com/office/powerpoint/2010/main" val="1579011935"/>
+                <p14:modId xmlns:p14="http://schemas.microsoft.com/office/powerpoint/2010/main" val="3052091237"/>
               </p:ext>
             </p:extLst>
           </p:nvPr>
         </p:nvGraphicFramePr>
         <p:xfrm>
           <a:off x="457200" y="1005840"/>
-          <a:ext cx="8229600" cy="3474720"/>
+          <a:ext cx="8229600" cy="3291840"/>
         </p:xfrm>
         <a:graphic>
           <a:graphicData uri="http://schemas.openxmlformats.org/drawingml/2006/table">
             <a:tbl>
               <a:tblPr/>
               <a:tblGrid>
-                <a:gridCol w="5029200"/>
-                <a:gridCol w="3200400"/>
+                <a:gridCol w="5029200">
+                  <a:extLst>
+                    <a:ext uri="{9D8B030D-6E8A-4147-A177-3AD203B41FA5}">
+                      <a16:colId xmlns:a16="http://schemas.microsoft.com/office/drawing/2014/main" val="20000"/>
+                    </a:ext>
+                  </a:extLst>
+                </a:gridCol>
+                <a:gridCol w="3200400">
+                  <a:extLst>
+                    <a:ext uri="{9D8B030D-6E8A-4147-A177-3AD203B41FA5}">
+                      <a16:colId xmlns:a16="http://schemas.microsoft.com/office/drawing/2014/main" val="20001"/>
+                    </a:ext>
+                  </a:extLst>
+                </a:gridCol>
               </a:tblGrid>
               <a:tr h="411480">
                 <a:tc>
@@ -15121,7 +15516,7 @@
                     <a:bodyPr/>
                     <a:lstStyle/>
                     <a:p>
-                      <a:pPr indent="0" marL="0">
+                      <a:pPr marL="0" indent="0">
                         <a:buNone/>
                       </a:pPr>
                       <a:r>
@@ -15142,7 +15537,7 @@
                       </a:endParaRPr>
                     </a:p>
                   </a:txBody>
-                  <a:tcPr marL="91440" marR="91440" marT="45720" marB="45720">
+                  <a:tcPr>
                     <a:lnL w="6350" cap="flat" cmpd="sng" algn="ctr">
                       <a:solidFill>
                         <a:srgbClr val="E8EDF2"/>
@@ -15189,7 +15584,7 @@
                     <a:bodyPr/>
                     <a:lstStyle/>
                     <a:p>
-                      <a:pPr indent="0" marL="0">
+                      <a:pPr marL="0" indent="0">
                         <a:buNone/>
                       </a:pPr>
                       <a:r>
@@ -15210,7 +15605,7 @@
                       </a:endParaRPr>
                     </a:p>
                   </a:txBody>
-                  <a:tcPr marL="91440" marR="91440" marT="45720" marB="45720">
+                  <a:tcPr>
                     <a:lnL w="6350" cap="flat" cmpd="sng" algn="ctr">
                       <a:solidFill>
                         <a:srgbClr val="E8EDF2"/>
@@ -15252,6 +15647,11 @@
                     </a:solidFill>
                   </a:tcPr>
                 </a:tc>
+                <a:extLst>
+                  <a:ext uri="{0D108BD9-81ED-4DB2-BD59-A6C34878D82A}">
+                    <a16:rowId xmlns:a16="http://schemas.microsoft.com/office/drawing/2014/main" val="10000"/>
+                  </a:ext>
+                </a:extLst>
               </a:tr>
               <a:tr h="411480">
                 <a:tc>
@@ -15259,7 +15659,7 @@
                     <a:bodyPr/>
                     <a:lstStyle/>
                     <a:p>
-                      <a:pPr indent="0" marL="0">
+                      <a:pPr marL="0" indent="0">
                         <a:buNone/>
                       </a:pPr>
                       <a:r>
@@ -15280,7 +15680,7 @@
                       </a:endParaRPr>
                     </a:p>
                   </a:txBody>
-                  <a:tcPr marL="91440" marR="91440" marT="45720" marB="45720">
+                  <a:tcPr>
                     <a:lnL w="6350" cap="flat" cmpd="sng" algn="ctr">
                       <a:solidFill>
                         <a:srgbClr val="E8EDF2"/>
@@ -15324,7 +15724,7 @@
                     <a:bodyPr/>
                     <a:lstStyle/>
                     <a:p>
-                      <a:pPr indent="0" marL="0">
+                      <a:pPr marL="0" indent="0">
                         <a:buNone/>
                       </a:pPr>
                       <a:r>
@@ -15336,7 +15736,7 @@
                           <a:ea typeface="Calibri" pitchFamily="34" charset="-122"/>
                           <a:cs typeface="Calibri" pitchFamily="34" charset="-120"/>
                         </a:rPr>
-                        <a:t>Web Chat (claude.ai)</a:t>
+                        <a:t>Web/Desktop Chat (claude.ai)</a:t>
                       </a:r>
                       <a:endParaRPr lang="en-US" sz="1200" dirty="0">
                         <a:latin typeface="Calibri" charset="0"/>
@@ -15345,7 +15745,7 @@
                       </a:endParaRPr>
                     </a:p>
                   </a:txBody>
-                  <a:tcPr marL="91440" marR="91440" marT="45720" marB="45720">
+                  <a:tcPr>
                     <a:lnL w="6350" cap="flat" cmpd="sng" algn="ctr">
                       <a:solidFill>
                         <a:srgbClr val="E8EDF2"/>
@@ -15384,6 +15784,11 @@
                     </a:lnB>
                   </a:tcPr>
                 </a:tc>
+                <a:extLst>
+                  <a:ext uri="{0D108BD9-81ED-4DB2-BD59-A6C34878D82A}">
+                    <a16:rowId xmlns:a16="http://schemas.microsoft.com/office/drawing/2014/main" val="10001"/>
+                  </a:ext>
+                </a:extLst>
               </a:tr>
               <a:tr h="411480">
                 <a:tc>
@@ -15391,7 +15796,7 @@
                     <a:bodyPr/>
                     <a:lstStyle/>
                     <a:p>
-                      <a:pPr indent="0" marL="0">
+                      <a:pPr marL="0" indent="0">
                         <a:buNone/>
                       </a:pPr>
                       <a:r>
@@ -15412,7 +15817,7 @@
                       </a:endParaRPr>
                     </a:p>
                   </a:txBody>
-                  <a:tcPr marL="91440" marR="91440" marT="45720" marB="45720">
+                  <a:tcPr>
                     <a:lnL w="6350" cap="flat" cmpd="sng" algn="ctr">
                       <a:solidFill>
                         <a:srgbClr val="E8EDF2"/>
@@ -15456,7 +15861,7 @@
                     <a:bodyPr/>
                     <a:lstStyle/>
                     <a:p>
-                      <a:pPr indent="0" marL="0">
+                      <a:pPr marL="0" indent="0">
                         <a:buNone/>
                       </a:pPr>
                       <a:r>
@@ -15468,7 +15873,7 @@
                           <a:ea typeface="Calibri" pitchFamily="34" charset="-122"/>
                           <a:cs typeface="Calibri" pitchFamily="34" charset="-120"/>
                         </a:rPr>
-                        <a:t>Web Chat with Projects</a:t>
+                        <a:t>Web/Desktop Chat with Projects</a:t>
                       </a:r>
                       <a:endParaRPr lang="en-US" sz="1200" dirty="0">
                         <a:latin typeface="Calibri" charset="0"/>
@@ -15477,7 +15882,7 @@
                       </a:endParaRPr>
                     </a:p>
                   </a:txBody>
-                  <a:tcPr marL="91440" marR="91440" marT="45720" marB="45720">
+                  <a:tcPr>
                     <a:lnL w="6350" cap="flat" cmpd="sng" algn="ctr">
                       <a:solidFill>
                         <a:srgbClr val="E8EDF2"/>
@@ -15516,6 +15921,11 @@
                     </a:lnB>
                   </a:tcPr>
                 </a:tc>
+                <a:extLst>
+                  <a:ext uri="{0D108BD9-81ED-4DB2-BD59-A6C34878D82A}">
+                    <a16:rowId xmlns:a16="http://schemas.microsoft.com/office/drawing/2014/main" val="10002"/>
+                  </a:ext>
+                </a:extLst>
               </a:tr>
               <a:tr h="411480">
                 <a:tc>
@@ -15523,7 +15933,7 @@
                     <a:bodyPr/>
                     <a:lstStyle/>
                     <a:p>
-                      <a:pPr indent="0" marL="0">
+                      <a:pPr marL="0" indent="0">
                         <a:buNone/>
                       </a:pPr>
                       <a:r>
@@ -15544,7 +15954,7 @@
                       </a:endParaRPr>
                     </a:p>
                   </a:txBody>
-                  <a:tcPr marL="91440" marR="91440" marT="45720" marB="45720">
+                  <a:tcPr>
                     <a:lnL w="6350" cap="flat" cmpd="sng" algn="ctr">
                       <a:solidFill>
                         <a:srgbClr val="E8EDF2"/>
@@ -15588,7 +15998,7 @@
                     <a:bodyPr/>
                     <a:lstStyle/>
                     <a:p>
-                      <a:pPr indent="0" marL="0">
+                      <a:pPr marL="0" indent="0">
                         <a:buNone/>
                       </a:pPr>
                       <a:r>
@@ -15609,7 +16019,7 @@
                       </a:endParaRPr>
                     </a:p>
                   </a:txBody>
-                  <a:tcPr marL="91440" marR="91440" marT="45720" marB="45720">
+                  <a:tcPr>
                     <a:lnL w="6350" cap="flat" cmpd="sng" algn="ctr">
                       <a:solidFill>
                         <a:srgbClr val="E8EDF2"/>
@@ -15648,6 +16058,11 @@
                     </a:lnB>
                   </a:tcPr>
                 </a:tc>
+                <a:extLst>
+                  <a:ext uri="{0D108BD9-81ED-4DB2-BD59-A6C34878D82A}">
+                    <a16:rowId xmlns:a16="http://schemas.microsoft.com/office/drawing/2014/main" val="10003"/>
+                  </a:ext>
+                </a:extLst>
               </a:tr>
               <a:tr h="411480">
                 <a:tc>
@@ -15655,7 +16070,7 @@
                     <a:bodyPr/>
                     <a:lstStyle/>
                     <a:p>
-                      <a:pPr indent="0" marL="0">
+                      <a:pPr marL="0" indent="0">
                         <a:buNone/>
                       </a:pPr>
                       <a:r>
@@ -15676,7 +16091,7 @@
                       </a:endParaRPr>
                     </a:p>
                   </a:txBody>
-                  <a:tcPr marL="91440" marR="91440" marT="45720" marB="45720">
+                  <a:tcPr>
                     <a:lnL w="6350" cap="flat" cmpd="sng" algn="ctr">
                       <a:solidFill>
                         <a:srgbClr val="E8EDF2"/>
@@ -15720,7 +16135,7 @@
                     <a:bodyPr/>
                     <a:lstStyle/>
                     <a:p>
-                      <a:pPr indent="0" marL="0">
+                      <a:pPr marL="0" indent="0">
                         <a:buNone/>
                       </a:pPr>
                       <a:r>
@@ -15741,7 +16156,7 @@
                       </a:endParaRPr>
                     </a:p>
                   </a:txBody>
-                  <a:tcPr marL="91440" marR="91440" marT="45720" marB="45720">
+                  <a:tcPr>
                     <a:lnL w="6350" cap="flat" cmpd="sng" algn="ctr">
                       <a:solidFill>
                         <a:srgbClr val="E8EDF2"/>
@@ -15780,6 +16195,11 @@
                     </a:lnB>
                   </a:tcPr>
                 </a:tc>
+                <a:extLst>
+                  <a:ext uri="{0D108BD9-81ED-4DB2-BD59-A6C34878D82A}">
+                    <a16:rowId xmlns:a16="http://schemas.microsoft.com/office/drawing/2014/main" val="10004"/>
+                  </a:ext>
+                </a:extLst>
               </a:tr>
               <a:tr h="411480">
                 <a:tc>
@@ -15787,7 +16207,7 @@
                     <a:bodyPr/>
                     <a:lstStyle/>
                     <a:p>
-                      <a:pPr indent="0" marL="0">
+                      <a:pPr marL="0" indent="0">
                         <a:buNone/>
                       </a:pPr>
                       <a:r>
@@ -15808,7 +16228,7 @@
                       </a:endParaRPr>
                     </a:p>
                   </a:txBody>
-                  <a:tcPr marL="91440" marR="91440" marT="45720" marB="45720">
+                  <a:tcPr>
                     <a:lnL w="6350" cap="flat" cmpd="sng" algn="ctr">
                       <a:solidFill>
                         <a:srgbClr val="E8EDF2"/>
@@ -15852,7 +16272,7 @@
                     <a:bodyPr/>
                     <a:lstStyle/>
                     <a:p>
-                      <a:pPr indent="0" marL="0">
+                      <a:pPr marL="0" indent="0">
                         <a:buNone/>
                       </a:pPr>
                       <a:r>
@@ -15873,7 +16293,7 @@
                       </a:endParaRPr>
                     </a:p>
                   </a:txBody>
-                  <a:tcPr marL="91440" marR="91440" marT="45720" marB="45720">
+                  <a:tcPr>
                     <a:lnL w="6350" cap="flat" cmpd="sng" algn="ctr">
                       <a:solidFill>
                         <a:srgbClr val="E8EDF2"/>
@@ -15912,6 +16332,11 @@
                     </a:lnB>
                   </a:tcPr>
                 </a:tc>
+                <a:extLst>
+                  <a:ext uri="{0D108BD9-81ED-4DB2-BD59-A6C34878D82A}">
+                    <a16:rowId xmlns:a16="http://schemas.microsoft.com/office/drawing/2014/main" val="10005"/>
+                  </a:ext>
+                </a:extLst>
               </a:tr>
               <a:tr h="411480">
                 <a:tc>
@@ -15919,7 +16344,7 @@
                     <a:bodyPr/>
                     <a:lstStyle/>
                     <a:p>
-                      <a:pPr indent="0" marL="0">
+                      <a:pPr marL="0" indent="0">
                         <a:buNone/>
                       </a:pPr>
                       <a:r>
@@ -15940,7 +16365,7 @@
                       </a:endParaRPr>
                     </a:p>
                   </a:txBody>
-                  <a:tcPr marL="91440" marR="91440" marT="45720" marB="45720">
+                  <a:tcPr>
                     <a:lnL w="6350" cap="flat" cmpd="sng" algn="ctr">
                       <a:solidFill>
                         <a:srgbClr val="E8EDF2"/>
@@ -15984,7 +16409,7 @@
                     <a:bodyPr/>
                     <a:lstStyle/>
                     <a:p>
-                      <a:pPr indent="0" marL="0">
+                      <a:pPr marL="0" indent="0">
                         <a:buNone/>
                       </a:pPr>
                       <a:r>
@@ -16005,7 +16430,7 @@
                       </a:endParaRPr>
                     </a:p>
                   </a:txBody>
-                  <a:tcPr marL="91440" marR="91440" marT="45720" marB="45720">
+                  <a:tcPr>
                     <a:lnL w="6350" cap="flat" cmpd="sng" algn="ctr">
                       <a:solidFill>
                         <a:srgbClr val="E8EDF2"/>
@@ -16044,6 +16469,11 @@
                     </a:lnB>
                   </a:tcPr>
                 </a:tc>
+                <a:extLst>
+                  <a:ext uri="{0D108BD9-81ED-4DB2-BD59-A6C34878D82A}">
+                    <a16:rowId xmlns:a16="http://schemas.microsoft.com/office/drawing/2014/main" val="10006"/>
+                  </a:ext>
+                </a:extLst>
               </a:tr>
               <a:tr h="411480">
                 <a:tc>
@@ -16051,7 +16481,7 @@
                     <a:bodyPr/>
                     <a:lstStyle/>
                     <a:p>
-                      <a:pPr indent="0" marL="0">
+                      <a:pPr marL="0" indent="0">
                         <a:buNone/>
                       </a:pPr>
                       <a:r>
@@ -16072,7 +16502,7 @@
                       </a:endParaRPr>
                     </a:p>
                   </a:txBody>
-                  <a:tcPr marL="91440" marR="91440" marT="45720" marB="45720">
+                  <a:tcPr>
                     <a:lnL w="6350" cap="flat" cmpd="sng" algn="ctr">
                       <a:solidFill>
                         <a:srgbClr val="E8EDF2"/>
@@ -16116,7 +16546,7 @@
                     <a:bodyPr/>
                     <a:lstStyle/>
                     <a:p>
-                      <a:pPr indent="0" marL="0">
+                      <a:pPr marL="0" indent="0">
                         <a:buNone/>
                       </a:pPr>
                       <a:r>
@@ -16137,7 +16567,7 @@
                       </a:endParaRPr>
                     </a:p>
                   </a:txBody>
-                  <a:tcPr marL="91440" marR="91440" marT="45720" marB="45720">
+                  <a:tcPr>
                     <a:lnL w="6350" cap="flat" cmpd="sng" algn="ctr">
                       <a:solidFill>
                         <a:srgbClr val="E8EDF2"/>
@@ -16176,6 +16606,11 @@
                     </a:lnB>
                   </a:tcPr>
                 </a:tc>
+                <a:extLst>
+                  <a:ext uri="{0D108BD9-81ED-4DB2-BD59-A6C34878D82A}">
+                    <a16:rowId xmlns:a16="http://schemas.microsoft.com/office/drawing/2014/main" val="10007"/>
+                  </a:ext>
+                </a:extLst>
               </a:tr>
             </a:tbl>
           </a:graphicData>
@@ -16197,6 +16632,7 @@
         <a:solidFill>
           <a:srgbClr val="1E2761"/>
         </a:solidFill>
+        <a:effectLst/>
       </p:bgPr>
     </p:bg>
     <p:spTree>
@@ -16232,6 +16668,13 @@
           </a:solidFill>
           <a:ln/>
         </p:spPr>
+        <p:txBody>
+          <a:bodyPr/>
+          <a:lstStyle/>
+          <a:p>
+            <a:endParaRPr lang="en-US"/>
+          </a:p>
+        </p:txBody>
       </p:sp>
       <p:sp>
         <p:nvSpPr>
@@ -16254,11 +16697,11 @@
           <a:bodyPr wrap="square" rtlCol="0" anchor="ctr"/>
           <a:lstStyle/>
           <a:p>
-            <a:pPr indent="0" marL="0">
-              <a:buNone/>
-            </a:pPr>
-            <a:r>
-              <a:rPr lang="en-US" sz="1400" b="1" spc="500" kern="0" dirty="0">
+            <a:pPr marL="0" indent="0">
+              <a:buNone/>
+            </a:pPr>
+            <a:r>
+              <a:rPr lang="en-US" sz="1400" b="1" kern="0" spc="500" dirty="0">
                 <a:solidFill>
                   <a:srgbClr val="0891B2"/>
                 </a:solidFill>
@@ -16293,7 +16736,7 @@
           <a:bodyPr wrap="square" rtlCol="0" anchor="ctr"/>
           <a:lstStyle/>
           <a:p>
-            <a:pPr indent="0" marL="0">
+            <a:pPr marL="0" indent="0">
               <a:buNone/>
             </a:pPr>
             <a:r>
@@ -16313,14 +16756,14 @@
       </p:sp>
       <p:pic>
         <p:nvPicPr>
-          <p:cNvPr id="5" name="Image 0" descr="preencoded.png">    </p:cNvPr>
+          <p:cNvPr id="5" name="Image 0" descr="preencoded.png"/>
           <p:cNvPicPr>
             <a:picLocks noChangeAspect="1"/>
           </p:cNvPicPr>
           <p:nvPr/>
         </p:nvPicPr>
         <p:blipFill>
-          <a:blip r:embed="rId1"/>
+          <a:blip r:embed="rId3"/>
           <a:stretch>
             <a:fillRect/>
           </a:stretch>
@@ -16356,7 +16799,7 @@
           <a:bodyPr wrap="square" rtlCol="0" anchor="ctr"/>
           <a:lstStyle/>
           <a:p>
-            <a:pPr indent="0" marL="0">
+            <a:pPr marL="0" indent="0">
               <a:buNone/>
             </a:pPr>
             <a:r>
@@ -16393,13 +16836,20 @@
           </a:solidFill>
           <a:ln/>
           <a:effectLst>
-            <a:outerShdw sx="100000" sy="100000" kx="0" ky="0" algn="bl" rotWithShape="0" blurRad="101600" dist="38100" dir="8100000">
+            <a:outerShdw blurRad="101600" dist="38100" dir="8100000" algn="bl" rotWithShape="0">
               <a:srgbClr val="000000">
                 <a:alpha val="12000"/>
               </a:srgbClr>
             </a:outerShdw>
           </a:effectLst>
         </p:spPr>
+        <p:txBody>
+          <a:bodyPr/>
+          <a:lstStyle/>
+          <a:p>
+            <a:endParaRPr lang="en-US"/>
+          </a:p>
+        </p:txBody>
       </p:sp>
       <p:sp>
         <p:nvSpPr>
@@ -16422,7 +16872,7 @@
           <a:bodyPr wrap="square" lIns="0" tIns="0" rIns="0" bIns="0" rtlCol="0" anchor="ctr"/>
           <a:lstStyle/>
           <a:p>
-            <a:pPr indent="0" marL="0">
+            <a:pPr marL="0" indent="0">
               <a:buNone/>
             </a:pPr>
             <a:r>
@@ -16461,7 +16911,7 @@
           <a:bodyPr wrap="square" rtlCol="0" anchor="ctr"/>
           <a:lstStyle/>
           <a:p>
-            <a:pPr indent="0" marL="0">
+            <a:pPr marL="0" indent="0">
               <a:buNone/>
             </a:pPr>
             <a:r>
@@ -16478,7 +16928,7 @@
             <a:endParaRPr lang="en-US" sz="1200" dirty="0"/>
           </a:p>
           <a:p>
-            <a:pPr indent="0" marL="0">
+            <a:pPr marL="0" indent="0">
               <a:buNone/>
             </a:pPr>
             <a:r>
@@ -16515,13 +16965,20 @@
           </a:solidFill>
           <a:ln/>
           <a:effectLst>
-            <a:outerShdw sx="100000" sy="100000" kx="0" ky="0" algn="bl" rotWithShape="0" blurRad="101600" dist="38100" dir="8100000">
+            <a:outerShdw blurRad="101600" dist="38100" dir="8100000" algn="bl" rotWithShape="0">
               <a:srgbClr val="000000">
                 <a:alpha val="12000"/>
               </a:srgbClr>
             </a:outerShdw>
           </a:effectLst>
         </p:spPr>
+        <p:txBody>
+          <a:bodyPr/>
+          <a:lstStyle/>
+          <a:p>
+            <a:endParaRPr lang="en-US"/>
+          </a:p>
+        </p:txBody>
       </p:sp>
       <p:sp>
         <p:nvSpPr>
@@ -16544,7 +17001,7 @@
           <a:bodyPr wrap="square" lIns="0" tIns="0" rIns="0" bIns="0" rtlCol="0" anchor="ctr"/>
           <a:lstStyle/>
           <a:p>
-            <a:pPr indent="0" marL="0">
+            <a:pPr marL="0" indent="0">
               <a:buNone/>
             </a:pPr>
             <a:r>
@@ -16583,7 +17040,7 @@
           <a:bodyPr wrap="square" rtlCol="0" anchor="ctr"/>
           <a:lstStyle/>
           <a:p>
-            <a:pPr indent="0" marL="0">
+            <a:pPr marL="0" indent="0">
               <a:buNone/>
             </a:pPr>
             <a:r>
@@ -16600,7 +17057,7 @@
             <a:endParaRPr lang="en-US" sz="1200" dirty="0"/>
           </a:p>
           <a:p>
-            <a:pPr indent="0" marL="0">
+            <a:pPr marL="0" indent="0">
               <a:buNone/>
             </a:pPr>
             <a:r>
@@ -16639,7 +17096,7 @@
           <a:bodyPr wrap="square" rtlCol="0" anchor="ctr"/>
           <a:lstStyle/>
           <a:p>
-            <a:pPr indent="0" marL="0">
+            <a:pPr marL="0" indent="0">
               <a:buNone/>
             </a:pPr>
             <a:r>
@@ -16676,6 +17133,13 @@
           </a:solidFill>
           <a:ln/>
         </p:spPr>
+        <p:txBody>
+          <a:bodyPr/>
+          <a:lstStyle/>
+          <a:p>
+            <a:endParaRPr lang="en-US"/>
+          </a:p>
+        </p:txBody>
       </p:sp>
       <p:sp>
         <p:nvSpPr>
@@ -16698,7 +17162,7 @@
           <a:bodyPr wrap="square" rtlCol="0" anchor="ctr"/>
           <a:lstStyle/>
           <a:p>
-            <a:pPr algn="ctr" indent="0" marL="0">
+            <a:pPr marL="0" indent="0" algn="ctr">
               <a:buNone/>
             </a:pPr>
             <a:r>
@@ -16710,7 +17174,7 @@
                 <a:ea typeface="Calibri" pitchFamily="34" charset="-122"/>
                 <a:cs typeface="Calibri" pitchFamily="34" charset="-120"/>
               </a:rPr>
-              <a:t>Cowork</a:t>
+              <a:t>Claude Desktop</a:t>
             </a:r>
             <a:endParaRPr lang="en-US" sz="1100" dirty="0"/>
           </a:p>
@@ -16735,6 +17199,13 @@
           </a:solidFill>
           <a:ln/>
         </p:spPr>
+        <p:txBody>
+          <a:bodyPr/>
+          <a:lstStyle/>
+          <a:p>
+            <a:endParaRPr lang="en-US"/>
+          </a:p>
+        </p:txBody>
       </p:sp>
       <p:sp>
         <p:nvSpPr>
@@ -16757,7 +17228,7 @@
           <a:bodyPr wrap="square" rtlCol="0" anchor="ctr"/>
           <a:lstStyle/>
           <a:p>
-            <a:pPr algn="ctr" indent="0" marL="0">
+            <a:pPr marL="0" indent="0" algn="ctr">
               <a:buNone/>
             </a:pPr>
             <a:r>
@@ -16794,6 +17265,13 @@
           </a:solidFill>
           <a:ln/>
         </p:spPr>
+        <p:txBody>
+          <a:bodyPr/>
+          <a:lstStyle/>
+          <a:p>
+            <a:endParaRPr lang="en-US"/>
+          </a:p>
+        </p:txBody>
       </p:sp>
       <p:sp>
         <p:nvSpPr>
@@ -16816,7 +17294,7 @@
           <a:bodyPr wrap="square" rtlCol="0" anchor="ctr"/>
           <a:lstStyle/>
           <a:p>
-            <a:pPr algn="ctr" indent="0" marL="0">
+            <a:pPr marL="0" indent="0" algn="ctr">
               <a:buNone/>
             </a:pPr>
             <a:r>
@@ -16855,7 +17333,7 @@
           <a:bodyPr wrap="square" rtlCol="0" anchor="ctr"/>
           <a:lstStyle/>
           <a:p>
-            <a:pPr indent="0" marL="0">
+            <a:pPr marL="0" indent="0">
               <a:buNone/>
             </a:pPr>
             <a:r>
@@ -16889,6 +17367,7 @@
         <a:solidFill>
           <a:srgbClr val="F0F4F8"/>
         </a:solidFill>
+        <a:effectLst/>
       </p:bgPr>
     </p:bg>
     <p:spTree>
@@ -16924,6 +17403,13 @@
           </a:solidFill>
           <a:ln/>
         </p:spPr>
+        <p:txBody>
+          <a:bodyPr/>
+          <a:lstStyle/>
+          <a:p>
+            <a:endParaRPr lang="en-US"/>
+          </a:p>
+        </p:txBody>
       </p:sp>
       <p:sp>
         <p:nvSpPr>
@@ -16946,7 +17432,7 @@
           <a:bodyPr wrap="square" rtlCol="0" anchor="ctr"/>
           <a:lstStyle/>
           <a:p>
-            <a:pPr indent="0" marL="0">
+            <a:pPr marL="0" indent="0">
               <a:buNone/>
             </a:pPr>
             <a:r>
@@ -16983,13 +17469,20 @@
           </a:solidFill>
           <a:ln/>
           <a:effectLst>
-            <a:outerShdw sx="100000" sy="100000" kx="0" ky="0" algn="bl" rotWithShape="0" blurRad="101600" dist="38100" dir="8100000">
+            <a:outerShdw blurRad="101600" dist="38100" dir="8100000" algn="bl" rotWithShape="0">
               <a:srgbClr val="000000">
                 <a:alpha val="12000"/>
               </a:srgbClr>
             </a:outerShdw>
           </a:effectLst>
         </p:spPr>
+        <p:txBody>
+          <a:bodyPr/>
+          <a:lstStyle/>
+          <a:p>
+            <a:endParaRPr lang="en-US"/>
+          </a:p>
+        </p:txBody>
       </p:sp>
       <p:sp>
         <p:nvSpPr>
@@ -17010,6 +17503,13 @@
           </a:solidFill>
           <a:ln/>
         </p:spPr>
+        <p:txBody>
+          <a:bodyPr/>
+          <a:lstStyle/>
+          <a:p>
+            <a:endParaRPr lang="en-US"/>
+          </a:p>
+        </p:txBody>
       </p:sp>
       <p:sp>
         <p:nvSpPr>
@@ -17032,7 +17532,7 @@
           <a:bodyPr wrap="square" lIns="0" tIns="0" rIns="0" bIns="0" rtlCol="0" anchor="ctr"/>
           <a:lstStyle/>
           <a:p>
-            <a:pPr indent="0" marL="0">
+            <a:pPr marL="0" indent="0">
               <a:buNone/>
             </a:pPr>
             <a:r>
@@ -17071,7 +17571,7 @@
           <a:bodyPr wrap="square" lIns="0" tIns="0" rIns="0" bIns="0" rtlCol="0" anchor="ctr"/>
           <a:lstStyle/>
           <a:p>
-            <a:pPr indent="0" marL="0">
+            <a:pPr marL="0" indent="0">
               <a:buNone/>
             </a:pPr>
             <a:r>
@@ -17108,13 +17608,20 @@
           </a:solidFill>
           <a:ln/>
           <a:effectLst>
-            <a:outerShdw sx="100000" sy="100000" kx="0" ky="0" algn="bl" rotWithShape="0" blurRad="101600" dist="38100" dir="8100000">
+            <a:outerShdw blurRad="101600" dist="38100" dir="8100000" algn="bl" rotWithShape="0">
               <a:srgbClr val="000000">
                 <a:alpha val="12000"/>
               </a:srgbClr>
             </a:outerShdw>
           </a:effectLst>
         </p:spPr>
+        <p:txBody>
+          <a:bodyPr/>
+          <a:lstStyle/>
+          <a:p>
+            <a:endParaRPr lang="en-US"/>
+          </a:p>
+        </p:txBody>
       </p:sp>
       <p:sp>
         <p:nvSpPr>
@@ -17135,6 +17642,13 @@
           </a:solidFill>
           <a:ln/>
         </p:spPr>
+        <p:txBody>
+          <a:bodyPr/>
+          <a:lstStyle/>
+          <a:p>
+            <a:endParaRPr lang="en-US"/>
+          </a:p>
+        </p:txBody>
       </p:sp>
       <p:sp>
         <p:nvSpPr>
@@ -17157,7 +17671,7 @@
           <a:bodyPr wrap="square" lIns="0" tIns="0" rIns="0" bIns="0" rtlCol="0" anchor="ctr"/>
           <a:lstStyle/>
           <a:p>
-            <a:pPr indent="0" marL="0">
+            <a:pPr marL="0" indent="0">
               <a:buNone/>
             </a:pPr>
             <a:r>
@@ -17196,7 +17710,7 @@
           <a:bodyPr wrap="square" lIns="0" tIns="0" rIns="0" bIns="0" rtlCol="0" anchor="ctr"/>
           <a:lstStyle/>
           <a:p>
-            <a:pPr indent="0" marL="0">
+            <a:pPr marL="0" indent="0">
               <a:buNone/>
             </a:pPr>
             <a:r>
@@ -17233,13 +17747,20 @@
           </a:solidFill>
           <a:ln/>
           <a:effectLst>
-            <a:outerShdw sx="100000" sy="100000" kx="0" ky="0" algn="bl" rotWithShape="0" blurRad="101600" dist="38100" dir="8100000">
+            <a:outerShdw blurRad="101600" dist="38100" dir="8100000" algn="bl" rotWithShape="0">
               <a:srgbClr val="000000">
                 <a:alpha val="12000"/>
               </a:srgbClr>
             </a:outerShdw>
           </a:effectLst>
         </p:spPr>
+        <p:txBody>
+          <a:bodyPr/>
+          <a:lstStyle/>
+          <a:p>
+            <a:endParaRPr lang="en-US"/>
+          </a:p>
+        </p:txBody>
       </p:sp>
       <p:sp>
         <p:nvSpPr>
@@ -17260,6 +17781,13 @@
           </a:solidFill>
           <a:ln/>
         </p:spPr>
+        <p:txBody>
+          <a:bodyPr/>
+          <a:lstStyle/>
+          <a:p>
+            <a:endParaRPr lang="en-US"/>
+          </a:p>
+        </p:txBody>
       </p:sp>
       <p:sp>
         <p:nvSpPr>
@@ -17282,7 +17810,7 @@
           <a:bodyPr wrap="square" lIns="0" tIns="0" rIns="0" bIns="0" rtlCol="0" anchor="ctr"/>
           <a:lstStyle/>
           <a:p>
-            <a:pPr indent="0" marL="0">
+            <a:pPr marL="0" indent="0">
               <a:buNone/>
             </a:pPr>
             <a:r>
@@ -17321,7 +17849,7 @@
           <a:bodyPr wrap="square" lIns="0" tIns="0" rIns="0" bIns="0" rtlCol="0" anchor="ctr"/>
           <a:lstStyle/>
           <a:p>
-            <a:pPr indent="0" marL="0">
+            <a:pPr marL="0" indent="0">
               <a:buNone/>
             </a:pPr>
             <a:r>
@@ -17358,13 +17886,20 @@
           </a:solidFill>
           <a:ln/>
           <a:effectLst>
-            <a:outerShdw sx="100000" sy="100000" kx="0" ky="0" algn="bl" rotWithShape="0" blurRad="101600" dist="38100" dir="8100000">
+            <a:outerShdw blurRad="101600" dist="38100" dir="8100000" algn="bl" rotWithShape="0">
               <a:srgbClr val="000000">
                 <a:alpha val="12000"/>
               </a:srgbClr>
             </a:outerShdw>
           </a:effectLst>
         </p:spPr>
+        <p:txBody>
+          <a:bodyPr/>
+          <a:lstStyle/>
+          <a:p>
+            <a:endParaRPr lang="en-US"/>
+          </a:p>
+        </p:txBody>
       </p:sp>
       <p:sp>
         <p:nvSpPr>
@@ -17385,6 +17920,13 @@
           </a:solidFill>
           <a:ln/>
         </p:spPr>
+        <p:txBody>
+          <a:bodyPr/>
+          <a:lstStyle/>
+          <a:p>
+            <a:endParaRPr lang="en-US"/>
+          </a:p>
+        </p:txBody>
       </p:sp>
       <p:sp>
         <p:nvSpPr>
@@ -17407,7 +17949,7 @@
           <a:bodyPr wrap="square" lIns="0" tIns="0" rIns="0" bIns="0" rtlCol="0" anchor="ctr"/>
           <a:lstStyle/>
           <a:p>
-            <a:pPr indent="0" marL="0">
+            <a:pPr marL="0" indent="0">
               <a:buNone/>
             </a:pPr>
             <a:r>
@@ -17446,7 +17988,7 @@
           <a:bodyPr wrap="square" lIns="0" tIns="0" rIns="0" bIns="0" rtlCol="0" anchor="ctr"/>
           <a:lstStyle/>
           <a:p>
-            <a:pPr indent="0" marL="0">
+            <a:pPr marL="0" indent="0">
               <a:buNone/>
             </a:pPr>
             <a:r>
@@ -17483,13 +18025,20 @@
           </a:solidFill>
           <a:ln/>
           <a:effectLst>
-            <a:outerShdw sx="100000" sy="100000" kx="0" ky="0" algn="bl" rotWithShape="0" blurRad="101600" dist="38100" dir="8100000">
+            <a:outerShdw blurRad="101600" dist="38100" dir="8100000" algn="bl" rotWithShape="0">
               <a:srgbClr val="000000">
                 <a:alpha val="12000"/>
               </a:srgbClr>
             </a:outerShdw>
           </a:effectLst>
         </p:spPr>
+        <p:txBody>
+          <a:bodyPr/>
+          <a:lstStyle/>
+          <a:p>
+            <a:endParaRPr lang="en-US"/>
+          </a:p>
+        </p:txBody>
       </p:sp>
       <p:sp>
         <p:nvSpPr>
@@ -17510,6 +18059,13 @@
           </a:solidFill>
           <a:ln/>
         </p:spPr>
+        <p:txBody>
+          <a:bodyPr/>
+          <a:lstStyle/>
+          <a:p>
+            <a:endParaRPr lang="en-US"/>
+          </a:p>
+        </p:txBody>
       </p:sp>
       <p:sp>
         <p:nvSpPr>
@@ -17532,7 +18088,7 @@
           <a:bodyPr wrap="square" lIns="0" tIns="0" rIns="0" bIns="0" rtlCol="0" anchor="ctr"/>
           <a:lstStyle/>
           <a:p>
-            <a:pPr indent="0" marL="0">
+            <a:pPr marL="0" indent="0">
               <a:buNone/>
             </a:pPr>
             <a:r>
@@ -17571,7 +18127,7 @@
           <a:bodyPr wrap="square" lIns="0" tIns="0" rIns="0" bIns="0" rtlCol="0" anchor="ctr"/>
           <a:lstStyle/>
           <a:p>
-            <a:pPr indent="0" marL="0">
+            <a:pPr marL="0" indent="0">
               <a:buNone/>
             </a:pPr>
             <a:r>
@@ -17608,13 +18164,20 @@
           </a:solidFill>
           <a:ln/>
           <a:effectLst>
-            <a:outerShdw sx="100000" sy="100000" kx="0" ky="0" algn="bl" rotWithShape="0" blurRad="101600" dist="38100" dir="8100000">
+            <a:outerShdw blurRad="101600" dist="38100" dir="8100000" algn="bl" rotWithShape="0">
               <a:srgbClr val="000000">
                 <a:alpha val="12000"/>
               </a:srgbClr>
             </a:outerShdw>
           </a:effectLst>
         </p:spPr>
+        <p:txBody>
+          <a:bodyPr/>
+          <a:lstStyle/>
+          <a:p>
+            <a:endParaRPr lang="en-US"/>
+          </a:p>
+        </p:txBody>
       </p:sp>
       <p:sp>
         <p:nvSpPr>
@@ -17635,6 +18198,13 @@
           </a:solidFill>
           <a:ln/>
         </p:spPr>
+        <p:txBody>
+          <a:bodyPr/>
+          <a:lstStyle/>
+          <a:p>
+            <a:endParaRPr lang="en-US"/>
+          </a:p>
+        </p:txBody>
       </p:sp>
       <p:sp>
         <p:nvSpPr>
@@ -17657,7 +18227,7 @@
           <a:bodyPr wrap="square" lIns="0" tIns="0" rIns="0" bIns="0" rtlCol="0" anchor="ctr"/>
           <a:lstStyle/>
           <a:p>
-            <a:pPr indent="0" marL="0">
+            <a:pPr marL="0" indent="0">
               <a:buNone/>
             </a:pPr>
             <a:r>
@@ -17696,7 +18266,7 @@
           <a:bodyPr wrap="square" lIns="0" tIns="0" rIns="0" bIns="0" rtlCol="0" anchor="ctr"/>
           <a:lstStyle/>
           <a:p>
-            <a:pPr indent="0" marL="0">
+            <a:pPr marL="0" indent="0">
               <a:buNone/>
             </a:pPr>
             <a:r>
@@ -17733,13 +18303,20 @@
           </a:solidFill>
           <a:ln/>
           <a:effectLst>
-            <a:outerShdw sx="100000" sy="100000" kx="0" ky="0" algn="bl" rotWithShape="0" blurRad="101600" dist="38100" dir="8100000">
+            <a:outerShdw blurRad="101600" dist="38100" dir="8100000" algn="bl" rotWithShape="0">
               <a:srgbClr val="000000">
                 <a:alpha val="12000"/>
               </a:srgbClr>
             </a:outerShdw>
           </a:effectLst>
         </p:spPr>
+        <p:txBody>
+          <a:bodyPr/>
+          <a:lstStyle/>
+          <a:p>
+            <a:endParaRPr lang="en-US"/>
+          </a:p>
+        </p:txBody>
       </p:sp>
       <p:sp>
         <p:nvSpPr>
@@ -17760,6 +18337,13 @@
           </a:solidFill>
           <a:ln/>
         </p:spPr>
+        <p:txBody>
+          <a:bodyPr/>
+          <a:lstStyle/>
+          <a:p>
+            <a:endParaRPr lang="en-US"/>
+          </a:p>
+        </p:txBody>
       </p:sp>
       <p:sp>
         <p:nvSpPr>
@@ -17782,7 +18366,7 @@
           <a:bodyPr wrap="square" lIns="0" tIns="0" rIns="0" bIns="0" rtlCol="0" anchor="ctr"/>
           <a:lstStyle/>
           <a:p>
-            <a:pPr indent="0" marL="0">
+            <a:pPr marL="0" indent="0">
               <a:buNone/>
             </a:pPr>
             <a:r>
@@ -17821,7 +18405,7 @@
           <a:bodyPr wrap="square" lIns="0" tIns="0" rIns="0" bIns="0" rtlCol="0" anchor="ctr"/>
           <a:lstStyle/>
           <a:p>
-            <a:pPr indent="0" marL="0">
+            <a:pPr marL="0" indent="0">
               <a:buNone/>
             </a:pPr>
             <a:r>
@@ -17858,13 +18442,20 @@
           </a:solidFill>
           <a:ln/>
           <a:effectLst>
-            <a:outerShdw sx="100000" sy="100000" kx="0" ky="0" algn="bl" rotWithShape="0" blurRad="101600" dist="38100" dir="8100000">
+            <a:outerShdw blurRad="101600" dist="38100" dir="8100000" algn="bl" rotWithShape="0">
               <a:srgbClr val="000000">
                 <a:alpha val="12000"/>
               </a:srgbClr>
             </a:outerShdw>
           </a:effectLst>
         </p:spPr>
+        <p:txBody>
+          <a:bodyPr/>
+          <a:lstStyle/>
+          <a:p>
+            <a:endParaRPr lang="en-US"/>
+          </a:p>
+        </p:txBody>
       </p:sp>
       <p:sp>
         <p:nvSpPr>
@@ -17885,6 +18476,13 @@
           </a:solidFill>
           <a:ln/>
         </p:spPr>
+        <p:txBody>
+          <a:bodyPr/>
+          <a:lstStyle/>
+          <a:p>
+            <a:endParaRPr lang="en-US"/>
+          </a:p>
+        </p:txBody>
       </p:sp>
       <p:sp>
         <p:nvSpPr>
@@ -17907,7 +18505,7 @@
           <a:bodyPr wrap="square" lIns="0" tIns="0" rIns="0" bIns="0" rtlCol="0" anchor="ctr"/>
           <a:lstStyle/>
           <a:p>
-            <a:pPr indent="0" marL="0">
+            <a:pPr marL="0" indent="0">
               <a:buNone/>
             </a:pPr>
             <a:r>
@@ -17946,7 +18544,7 @@
           <a:bodyPr wrap="square" lIns="0" tIns="0" rIns="0" bIns="0" rtlCol="0" anchor="ctr"/>
           <a:lstStyle/>
           <a:p>
-            <a:pPr indent="0" marL="0">
+            <a:pPr marL="0" indent="0">
               <a:buNone/>
             </a:pPr>
             <a:r>
@@ -17983,13 +18581,20 @@
           </a:solidFill>
           <a:ln/>
           <a:effectLst>
-            <a:outerShdw sx="100000" sy="100000" kx="0" ky="0" algn="bl" rotWithShape="0" blurRad="101600" dist="38100" dir="8100000">
+            <a:outerShdw blurRad="101600" dist="38100" dir="8100000" algn="bl" rotWithShape="0">
               <a:srgbClr val="000000">
                 <a:alpha val="12000"/>
               </a:srgbClr>
             </a:outerShdw>
           </a:effectLst>
         </p:spPr>
+        <p:txBody>
+          <a:bodyPr/>
+          <a:lstStyle/>
+          <a:p>
+            <a:endParaRPr lang="en-US"/>
+          </a:p>
+        </p:txBody>
       </p:sp>
       <p:sp>
         <p:nvSpPr>
@@ -18010,6 +18615,13 @@
           </a:solidFill>
           <a:ln/>
         </p:spPr>
+        <p:txBody>
+          <a:bodyPr/>
+          <a:lstStyle/>
+          <a:p>
+            <a:endParaRPr lang="en-US"/>
+          </a:p>
+        </p:txBody>
       </p:sp>
       <p:sp>
         <p:nvSpPr>
@@ -18032,7 +18644,7 @@
           <a:bodyPr wrap="square" lIns="0" tIns="0" rIns="0" bIns="0" rtlCol="0" anchor="ctr"/>
           <a:lstStyle/>
           <a:p>
-            <a:pPr indent="0" marL="0">
+            <a:pPr marL="0" indent="0">
               <a:buNone/>
             </a:pPr>
             <a:r>
@@ -18071,7 +18683,7 @@
           <a:bodyPr wrap="square" lIns="0" tIns="0" rIns="0" bIns="0" rtlCol="0" anchor="ctr"/>
           <a:lstStyle/>
           <a:p>
-            <a:pPr indent="0" marL="0">
+            <a:pPr marL="0" indent="0">
               <a:buNone/>
             </a:pPr>
             <a:r>
@@ -18108,13 +18720,20 @@
           </a:solidFill>
           <a:ln/>
           <a:effectLst>
-            <a:outerShdw sx="100000" sy="100000" kx="0" ky="0" algn="bl" rotWithShape="0" blurRad="101600" dist="38100" dir="8100000">
+            <a:outerShdw blurRad="101600" dist="38100" dir="8100000" algn="bl" rotWithShape="0">
               <a:srgbClr val="000000">
                 <a:alpha val="12000"/>
               </a:srgbClr>
             </a:outerShdw>
           </a:effectLst>
         </p:spPr>
+        <p:txBody>
+          <a:bodyPr/>
+          <a:lstStyle/>
+          <a:p>
+            <a:endParaRPr lang="en-US"/>
+          </a:p>
+        </p:txBody>
       </p:sp>
       <p:sp>
         <p:nvSpPr>
@@ -18135,6 +18754,13 @@
           </a:solidFill>
           <a:ln/>
         </p:spPr>
+        <p:txBody>
+          <a:bodyPr/>
+          <a:lstStyle/>
+          <a:p>
+            <a:endParaRPr lang="en-US"/>
+          </a:p>
+        </p:txBody>
       </p:sp>
       <p:sp>
         <p:nvSpPr>
@@ -18157,7 +18783,7 @@
           <a:bodyPr wrap="square" lIns="0" tIns="0" rIns="0" bIns="0" rtlCol="0" anchor="ctr"/>
           <a:lstStyle/>
           <a:p>
-            <a:pPr indent="0" marL="0">
+            <a:pPr marL="0" indent="0">
               <a:buNone/>
             </a:pPr>
             <a:r>
@@ -18196,7 +18822,7 @@
           <a:bodyPr wrap="square" lIns="0" tIns="0" rIns="0" bIns="0" rtlCol="0" anchor="ctr"/>
           <a:lstStyle/>
           <a:p>
-            <a:pPr indent="0" marL="0">
+            <a:pPr marL="0" indent="0">
               <a:buNone/>
             </a:pPr>
             <a:r>
@@ -18233,13 +18859,20 @@
           </a:solidFill>
           <a:ln/>
           <a:effectLst>
-            <a:outerShdw sx="100000" sy="100000" kx="0" ky="0" algn="bl" rotWithShape="0" blurRad="101600" dist="38100" dir="8100000">
+            <a:outerShdw blurRad="101600" dist="38100" dir="8100000" algn="bl" rotWithShape="0">
               <a:srgbClr val="000000">
                 <a:alpha val="12000"/>
               </a:srgbClr>
             </a:outerShdw>
           </a:effectLst>
         </p:spPr>
+        <p:txBody>
+          <a:bodyPr/>
+          <a:lstStyle/>
+          <a:p>
+            <a:endParaRPr lang="en-US"/>
+          </a:p>
+        </p:txBody>
       </p:sp>
       <p:sp>
         <p:nvSpPr>
@@ -18260,6 +18893,13 @@
           </a:solidFill>
           <a:ln/>
         </p:spPr>
+        <p:txBody>
+          <a:bodyPr/>
+          <a:lstStyle/>
+          <a:p>
+            <a:endParaRPr lang="en-US"/>
+          </a:p>
+        </p:txBody>
       </p:sp>
       <p:sp>
         <p:nvSpPr>
@@ -18282,7 +18922,7 @@
           <a:bodyPr wrap="square" lIns="0" tIns="0" rIns="0" bIns="0" rtlCol="0" anchor="ctr"/>
           <a:lstStyle/>
           <a:p>
-            <a:pPr indent="0" marL="0">
+            <a:pPr marL="0" indent="0">
               <a:buNone/>
             </a:pPr>
             <a:r>
@@ -18321,7 +18961,7 @@
           <a:bodyPr wrap="square" lIns="0" tIns="0" rIns="0" bIns="0" rtlCol="0" anchor="ctr"/>
           <a:lstStyle/>
           <a:p>
-            <a:pPr indent="0" marL="0">
+            <a:pPr marL="0" indent="0">
               <a:buNone/>
             </a:pPr>
             <a:r>
@@ -18358,13 +18998,20 @@
           </a:solidFill>
           <a:ln/>
           <a:effectLst>
-            <a:outerShdw sx="100000" sy="100000" kx="0" ky="0" algn="bl" rotWithShape="0" blurRad="101600" dist="38100" dir="8100000">
+            <a:outerShdw blurRad="101600" dist="38100" dir="8100000" algn="bl" rotWithShape="0">
               <a:srgbClr val="000000">
                 <a:alpha val="12000"/>
               </a:srgbClr>
             </a:outerShdw>
           </a:effectLst>
         </p:spPr>
+        <p:txBody>
+          <a:bodyPr/>
+          <a:lstStyle/>
+          <a:p>
+            <a:endParaRPr lang="en-US"/>
+          </a:p>
+        </p:txBody>
       </p:sp>
       <p:sp>
         <p:nvSpPr>
@@ -18385,6 +19032,13 @@
           </a:solidFill>
           <a:ln/>
         </p:spPr>
+        <p:txBody>
+          <a:bodyPr/>
+          <a:lstStyle/>
+          <a:p>
+            <a:endParaRPr lang="en-US"/>
+          </a:p>
+        </p:txBody>
       </p:sp>
       <p:sp>
         <p:nvSpPr>
@@ -18407,7 +19061,7 @@
           <a:bodyPr wrap="square" lIns="0" tIns="0" rIns="0" bIns="0" rtlCol="0" anchor="ctr"/>
           <a:lstStyle/>
           <a:p>
-            <a:pPr indent="0" marL="0">
+            <a:pPr marL="0" indent="0">
               <a:buNone/>
             </a:pPr>
             <a:r>
@@ -18446,7 +19100,7 @@
           <a:bodyPr wrap="square" lIns="0" tIns="0" rIns="0" bIns="0" rtlCol="0" anchor="ctr"/>
           <a:lstStyle/>
           <a:p>
-            <a:pPr indent="0" marL="0">
+            <a:pPr marL="0" indent="0">
               <a:buNone/>
             </a:pPr>
             <a:r>
@@ -18485,7 +19139,7 @@
           <a:bodyPr wrap="square" rtlCol="0" anchor="ctr"/>
           <a:lstStyle/>
           <a:p>
-            <a:pPr algn="ctr" indent="0" marL="0">
+            <a:pPr marL="0" indent="0" algn="ctr">
               <a:buNone/>
             </a:pPr>
             <a:r>
@@ -18804,4 +19458,319 @@
     </a:ext>
   </a:extLst>
 </a:theme>
+</file>
+
+<file path=ppt/theme/theme2.xml><?xml version="1.0" encoding="utf-8"?>
+<a:theme xmlns:a="http://schemas.openxmlformats.org/drawingml/2006/main" name="Office Theme">
+  <a:themeElements>
+    <a:clrScheme name="Office">
+      <a:dk1>
+        <a:sysClr val="windowText" lastClr="000000"/>
+      </a:dk1>
+      <a:lt1>
+        <a:sysClr val="window" lastClr="FFFFFF"/>
+      </a:lt1>
+      <a:dk2>
+        <a:srgbClr val="0E2841"/>
+      </a:dk2>
+      <a:lt2>
+        <a:srgbClr val="E8E8E8"/>
+      </a:lt2>
+      <a:accent1>
+        <a:srgbClr val="156082"/>
+      </a:accent1>
+      <a:accent2>
+        <a:srgbClr val="E97132"/>
+      </a:accent2>
+      <a:accent3>
+        <a:srgbClr val="196B24"/>
+      </a:accent3>
+      <a:accent4>
+        <a:srgbClr val="0F9ED5"/>
+      </a:accent4>
+      <a:accent5>
+        <a:srgbClr val="A02B93"/>
+      </a:accent5>
+      <a:accent6>
+        <a:srgbClr val="4EA72E"/>
+      </a:accent6>
+      <a:hlink>
+        <a:srgbClr val="467886"/>
+      </a:hlink>
+      <a:folHlink>
+        <a:srgbClr val="96607D"/>
+      </a:folHlink>
+    </a:clrScheme>
+    <a:fontScheme name="Office">
+      <a:majorFont>
+        <a:latin typeface="Aptos Display" panose="02110004020202020204"/>
+        <a:ea typeface=""/>
+        <a:cs typeface=""/>
+        <a:font script="Jpan" typeface="游ゴシック Light"/>
+        <a:font script="Hang" typeface="맑은 고딕"/>
+        <a:font script="Hans" typeface="等线 Light"/>
+        <a:font script="Hant" typeface="新細明體"/>
+        <a:font script="Arab" typeface="Times New Roman"/>
+        <a:font script="Hebr" typeface="Times New Roman"/>
+        <a:font script="Thai" typeface="Angsana New"/>
+        <a:font script="Ethi" typeface="Nyala"/>
+        <a:font script="Beng" typeface="Vrinda"/>
+        <a:font script="Gujr" typeface="Shruti"/>
+        <a:font script="Khmr" typeface="MoolBoran"/>
+        <a:font script="Knda" typeface="Tunga"/>
+        <a:font script="Guru" typeface="Raavi"/>
+        <a:font script="Cans" typeface="Euphemia"/>
+        <a:font script="Cher" typeface="Plantagenet Cherokee"/>
+        <a:font script="Yiii" typeface="Microsoft Yi Baiti"/>
+        <a:font script="Tibt" typeface="Microsoft Himalaya"/>
+        <a:font script="Thaa" typeface="MV Boli"/>
+        <a:font script="Deva" typeface="Mangal"/>
+        <a:font script="Telu" typeface="Gautami"/>
+        <a:font script="Taml" typeface="Latha"/>
+        <a:font script="Syrc" typeface="Estrangelo Edessa"/>
+        <a:font script="Orya" typeface="Kalinga"/>
+        <a:font script="Mlym" typeface="Kartika"/>
+        <a:font script="Laoo" typeface="DokChampa"/>
+        <a:font script="Sinh" typeface="Iskoola Pota"/>
+        <a:font script="Mong" typeface="Mongolian Baiti"/>
+        <a:font script="Viet" typeface="Times New Roman"/>
+        <a:font script="Uigh" typeface="Microsoft Uighur"/>
+        <a:font script="Geor" typeface="Sylfaen"/>
+        <a:font script="Armn" typeface="Arial"/>
+        <a:font script="Bugi" typeface="Leelawadee UI"/>
+        <a:font script="Bopo" typeface="Microsoft JhengHei"/>
+        <a:font script="Java" typeface="Javanese Text"/>
+        <a:font script="Lisu" typeface="Segoe UI"/>
+        <a:font script="Mymr" typeface="Myanmar Text"/>
+        <a:font script="Nkoo" typeface="Ebrima"/>
+        <a:font script="Olck" typeface="Nirmala UI"/>
+        <a:font script="Osma" typeface="Ebrima"/>
+        <a:font script="Phag" typeface="Phagspa"/>
+        <a:font script="Syrn" typeface="Estrangelo Edessa"/>
+        <a:font script="Syrj" typeface="Estrangelo Edessa"/>
+        <a:font script="Syre" typeface="Estrangelo Edessa"/>
+        <a:font script="Sora" typeface="Nirmala UI"/>
+        <a:font script="Tale" typeface="Microsoft Tai Le"/>
+        <a:font script="Talu" typeface="Microsoft New Tai Lue"/>
+        <a:font script="Tfng" typeface="Ebrima"/>
+      </a:majorFont>
+      <a:minorFont>
+        <a:latin typeface="Aptos" panose="02110004020202020204"/>
+        <a:ea typeface=""/>
+        <a:cs typeface=""/>
+        <a:font script="Jpan" typeface="游ゴシック"/>
+        <a:font script="Hang" typeface="맑은 고딕"/>
+        <a:font script="Hans" typeface="等线"/>
+        <a:font script="Hant" typeface="新細明體"/>
+        <a:font script="Arab" typeface="Arial"/>
+        <a:font script="Hebr" typeface="Arial"/>
+        <a:font script="Thai" typeface="Cordia New"/>
+        <a:font script="Ethi" typeface="Nyala"/>
+        <a:font script="Beng" typeface="Vrinda"/>
+        <a:font script="Gujr" typeface="Shruti"/>
+        <a:font script="Khmr" typeface="DaunPenh"/>
+        <a:font script="Knda" typeface="Tunga"/>
+        <a:font script="Guru" typeface="Raavi"/>
+        <a:font script="Cans" typeface="Euphemia"/>
+        <a:font script="Cher" typeface="Plantagenet Cherokee"/>
+        <a:font script="Yiii" typeface="Microsoft Yi Baiti"/>
+        <a:font script="Tibt" typeface="Microsoft Himalaya"/>
+        <a:font script="Thaa" typeface="MV Boli"/>
+        <a:font script="Deva" typeface="Mangal"/>
+        <a:font script="Telu" typeface="Gautami"/>
+        <a:font script="Taml" typeface="Latha"/>
+        <a:font script="Syrc" typeface="Estrangelo Edessa"/>
+        <a:font script="Orya" typeface="Kalinga"/>
+        <a:font script="Mlym" typeface="Kartika"/>
+        <a:font script="Laoo" typeface="DokChampa"/>
+        <a:font script="Sinh" typeface="Iskoola Pota"/>
+        <a:font script="Mong" typeface="Mongolian Baiti"/>
+        <a:font script="Viet" typeface="Arial"/>
+        <a:font script="Uigh" typeface="Microsoft Uighur"/>
+        <a:font script="Geor" typeface="Sylfaen"/>
+        <a:font script="Armn" typeface="Arial"/>
+        <a:font script="Bugi" typeface="Leelawadee UI"/>
+        <a:font script="Bopo" typeface="Microsoft JhengHei"/>
+        <a:font script="Java" typeface="Javanese Text"/>
+        <a:font script="Lisu" typeface="Segoe UI"/>
+        <a:font script="Mymr" typeface="Myanmar Text"/>
+        <a:font script="Nkoo" typeface="Ebrima"/>
+        <a:font script="Olck" typeface="Nirmala UI"/>
+        <a:font script="Osma" typeface="Ebrima"/>
+        <a:font script="Phag" typeface="Phagspa"/>
+        <a:font script="Syrn" typeface="Estrangelo Edessa"/>
+        <a:font script="Syrj" typeface="Estrangelo Edessa"/>
+        <a:font script="Syre" typeface="Estrangelo Edessa"/>
+        <a:font script="Sora" typeface="Nirmala UI"/>
+        <a:font script="Tale" typeface="Microsoft Tai Le"/>
+        <a:font script="Talu" typeface="Microsoft New Tai Lue"/>
+        <a:font script="Tfng" typeface="Ebrima"/>
+      </a:minorFont>
+    </a:fontScheme>
+    <a:fmtScheme name="Office">
+      <a:fillStyleLst>
+        <a:solidFill>
+          <a:schemeClr val="phClr"/>
+        </a:solidFill>
+        <a:gradFill rotWithShape="1">
+          <a:gsLst>
+            <a:gs pos="0">
+              <a:schemeClr val="phClr">
+                <a:lumMod val="110000"/>
+                <a:satMod val="105000"/>
+                <a:tint val="67000"/>
+              </a:schemeClr>
+            </a:gs>
+            <a:gs pos="50000">
+              <a:schemeClr val="phClr">
+                <a:lumMod val="105000"/>
+                <a:satMod val="103000"/>
+                <a:tint val="73000"/>
+              </a:schemeClr>
+            </a:gs>
+            <a:gs pos="100000">
+              <a:schemeClr val="phClr">
+                <a:lumMod val="105000"/>
+                <a:satMod val="109000"/>
+                <a:tint val="81000"/>
+              </a:schemeClr>
+            </a:gs>
+          </a:gsLst>
+          <a:lin ang="5400000" scaled="0"/>
+        </a:gradFill>
+        <a:gradFill rotWithShape="1">
+          <a:gsLst>
+            <a:gs pos="0">
+              <a:schemeClr val="phClr">
+                <a:satMod val="103000"/>
+                <a:lumMod val="102000"/>
+                <a:tint val="94000"/>
+              </a:schemeClr>
+            </a:gs>
+            <a:gs pos="50000">
+              <a:schemeClr val="phClr">
+                <a:satMod val="110000"/>
+                <a:lumMod val="100000"/>
+                <a:shade val="100000"/>
+              </a:schemeClr>
+            </a:gs>
+            <a:gs pos="100000">
+              <a:schemeClr val="phClr">
+                <a:lumMod val="99000"/>
+                <a:satMod val="120000"/>
+                <a:shade val="78000"/>
+              </a:schemeClr>
+            </a:gs>
+          </a:gsLst>
+          <a:lin ang="5400000" scaled="0"/>
+        </a:gradFill>
+      </a:fillStyleLst>
+      <a:lnStyleLst>
+        <a:ln w="12700" cap="flat" cmpd="sng" algn="ctr">
+          <a:solidFill>
+            <a:schemeClr val="phClr"/>
+          </a:solidFill>
+          <a:prstDash val="solid"/>
+          <a:miter lim="800000"/>
+        </a:ln>
+        <a:ln w="19050" cap="flat" cmpd="sng" algn="ctr">
+          <a:solidFill>
+            <a:schemeClr val="phClr"/>
+          </a:solidFill>
+          <a:prstDash val="solid"/>
+          <a:miter lim="800000"/>
+        </a:ln>
+        <a:ln w="25400" cap="flat" cmpd="sng" algn="ctr">
+          <a:solidFill>
+            <a:schemeClr val="phClr"/>
+          </a:solidFill>
+          <a:prstDash val="solid"/>
+          <a:miter lim="800000"/>
+        </a:ln>
+      </a:lnStyleLst>
+      <a:effectStyleLst>
+        <a:effectStyle>
+          <a:effectLst/>
+        </a:effectStyle>
+        <a:effectStyle>
+          <a:effectLst/>
+        </a:effectStyle>
+        <a:effectStyle>
+          <a:effectLst>
+            <a:outerShdw blurRad="57150" dist="19050" dir="5400000" algn="ctr" rotWithShape="0">
+              <a:srgbClr val="000000">
+                <a:alpha val="63000"/>
+              </a:srgbClr>
+            </a:outerShdw>
+          </a:effectLst>
+        </a:effectStyle>
+      </a:effectStyleLst>
+      <a:bgFillStyleLst>
+        <a:solidFill>
+          <a:schemeClr val="phClr"/>
+        </a:solidFill>
+        <a:solidFill>
+          <a:schemeClr val="phClr">
+            <a:tint val="95000"/>
+            <a:satMod val="170000"/>
+          </a:schemeClr>
+        </a:solidFill>
+        <a:gradFill rotWithShape="1">
+          <a:gsLst>
+            <a:gs pos="0">
+              <a:schemeClr val="phClr">
+                <a:tint val="93000"/>
+                <a:satMod val="150000"/>
+                <a:shade val="98000"/>
+                <a:lumMod val="102000"/>
+              </a:schemeClr>
+            </a:gs>
+            <a:gs pos="50000">
+              <a:schemeClr val="phClr">
+                <a:tint val="98000"/>
+                <a:satMod val="130000"/>
+                <a:shade val="90000"/>
+                <a:lumMod val="103000"/>
+              </a:schemeClr>
+            </a:gs>
+            <a:gs pos="100000">
+              <a:schemeClr val="phClr">
+                <a:shade val="63000"/>
+                <a:satMod val="120000"/>
+              </a:schemeClr>
+            </a:gs>
+          </a:gsLst>
+          <a:lin ang="5400000" scaled="0"/>
+        </a:gradFill>
+      </a:bgFillStyleLst>
+    </a:fmtScheme>
+  </a:themeElements>
+  <a:objectDefaults>
+    <a:lnDef>
+      <a:spPr/>
+      <a:bodyPr/>
+      <a:lstStyle/>
+      <a:style>
+        <a:lnRef idx="2">
+          <a:schemeClr val="accent1"/>
+        </a:lnRef>
+        <a:fillRef idx="0">
+          <a:schemeClr val="accent1"/>
+        </a:fillRef>
+        <a:effectRef idx="1">
+          <a:schemeClr val="accent1"/>
+        </a:effectRef>
+        <a:fontRef idx="minor">
+          <a:schemeClr val="tx1"/>
+        </a:fontRef>
+      </a:style>
+    </a:lnDef>
+  </a:objectDefaults>
+  <a:extraClrSchemeLst/>
+  <a:extLst>
+    <a:ext uri="{05A4C25C-085E-4340-85A3-A5531E510DB2}">
+      <thm15:themeFamily xmlns:thm15="http://schemas.microsoft.com/office/thememl/2012/main" name="Office Theme" id="{2E142A2C-CD16-42D6-873A-C26D2A0506FA}" vid="{1BDDFF52-6CD6-40A5-AB3C-68EB2F1E4D0A}"/>
+    </a:ext>
+  </a:extLst>
+</a:theme>
 </file>